--- a/icon/design.pptx
+++ b/icon/design.pptx
@@ -261,7 +261,7 @@
           <a:p>
             <a:fld id="{CC7F0EFD-98CC-144B-86FC-2C31795ED826}" type="datetimeFigureOut">
               <a:rPr lang="en-TW" smtClean="0"/>
-              <a:t>2026/4/26</a:t>
+              <a:t>2026/5/1</a:t>
             </a:fld>
             <a:endParaRPr lang="en-TW"/>
           </a:p>
@@ -461,7 +461,7 @@
           <a:p>
             <a:fld id="{CC7F0EFD-98CC-144B-86FC-2C31795ED826}" type="datetimeFigureOut">
               <a:rPr lang="en-TW" smtClean="0"/>
-              <a:t>2026/4/26</a:t>
+              <a:t>2026/5/1</a:t>
             </a:fld>
             <a:endParaRPr lang="en-TW"/>
           </a:p>
@@ -671,7 +671,7 @@
           <a:p>
             <a:fld id="{CC7F0EFD-98CC-144B-86FC-2C31795ED826}" type="datetimeFigureOut">
               <a:rPr lang="en-TW" smtClean="0"/>
-              <a:t>2026/4/26</a:t>
+              <a:t>2026/5/1</a:t>
             </a:fld>
             <a:endParaRPr lang="en-TW"/>
           </a:p>
@@ -871,7 +871,7 @@
           <a:p>
             <a:fld id="{CC7F0EFD-98CC-144B-86FC-2C31795ED826}" type="datetimeFigureOut">
               <a:rPr lang="en-TW" smtClean="0"/>
-              <a:t>2026/4/26</a:t>
+              <a:t>2026/5/1</a:t>
             </a:fld>
             <a:endParaRPr lang="en-TW"/>
           </a:p>
@@ -1147,7 +1147,7 @@
           <a:p>
             <a:fld id="{CC7F0EFD-98CC-144B-86FC-2C31795ED826}" type="datetimeFigureOut">
               <a:rPr lang="en-TW" smtClean="0"/>
-              <a:t>2026/4/26</a:t>
+              <a:t>2026/5/1</a:t>
             </a:fld>
             <a:endParaRPr lang="en-TW"/>
           </a:p>
@@ -1415,7 +1415,7 @@
           <a:p>
             <a:fld id="{CC7F0EFD-98CC-144B-86FC-2C31795ED826}" type="datetimeFigureOut">
               <a:rPr lang="en-TW" smtClean="0"/>
-              <a:t>2026/4/26</a:t>
+              <a:t>2026/5/1</a:t>
             </a:fld>
             <a:endParaRPr lang="en-TW"/>
           </a:p>
@@ -1830,7 +1830,7 @@
           <a:p>
             <a:fld id="{CC7F0EFD-98CC-144B-86FC-2C31795ED826}" type="datetimeFigureOut">
               <a:rPr lang="en-TW" smtClean="0"/>
-              <a:t>2026/4/26</a:t>
+              <a:t>2026/5/1</a:t>
             </a:fld>
             <a:endParaRPr lang="en-TW"/>
           </a:p>
@@ -1972,7 +1972,7 @@
           <a:p>
             <a:fld id="{CC7F0EFD-98CC-144B-86FC-2C31795ED826}" type="datetimeFigureOut">
               <a:rPr lang="en-TW" smtClean="0"/>
-              <a:t>2026/4/26</a:t>
+              <a:t>2026/5/1</a:t>
             </a:fld>
             <a:endParaRPr lang="en-TW"/>
           </a:p>
@@ -2085,7 +2085,7 @@
           <a:p>
             <a:fld id="{CC7F0EFD-98CC-144B-86FC-2C31795ED826}" type="datetimeFigureOut">
               <a:rPr lang="en-TW" smtClean="0"/>
-              <a:t>2026/4/26</a:t>
+              <a:t>2026/5/1</a:t>
             </a:fld>
             <a:endParaRPr lang="en-TW"/>
           </a:p>
@@ -2398,7 +2398,7 @@
           <a:p>
             <a:fld id="{CC7F0EFD-98CC-144B-86FC-2C31795ED826}" type="datetimeFigureOut">
               <a:rPr lang="en-TW" smtClean="0"/>
-              <a:t>2026/4/26</a:t>
+              <a:t>2026/5/1</a:t>
             </a:fld>
             <a:endParaRPr lang="en-TW"/>
           </a:p>
@@ -2687,7 +2687,7 @@
           <a:p>
             <a:fld id="{CC7F0EFD-98CC-144B-86FC-2C31795ED826}" type="datetimeFigureOut">
               <a:rPr lang="en-TW" smtClean="0"/>
-              <a:t>2026/4/26</a:t>
+              <a:t>2026/5/1</a:t>
             </a:fld>
             <a:endParaRPr lang="en-TW"/>
           </a:p>
@@ -2930,7 +2930,7 @@
           <a:p>
             <a:fld id="{CC7F0EFD-98CC-144B-86FC-2C31795ED826}" type="datetimeFigureOut">
               <a:rPr lang="en-TW" smtClean="0"/>
-              <a:t>2026/4/26</a:t>
+              <a:t>2026/5/1</a:t>
             </a:fld>
             <a:endParaRPr lang="en-TW"/>
           </a:p>
@@ -4951,6 +4951,76 @@
           </p:txBody>
         </p:sp>
       </p:grpSp>
+      <p:sp>
+        <p:nvSpPr>
+          <p:cNvPr id="2" name="Oval 1">
+            <a:extLst>
+              <a:ext uri="{FF2B5EF4-FFF2-40B4-BE49-F238E27FC236}">
+                <a16:creationId xmlns:a16="http://schemas.microsoft.com/office/drawing/2014/main" id="{511DB84E-6FF7-1CFA-234D-F3F3060A6B87}"/>
+              </a:ext>
+            </a:extLst>
+          </p:cNvPr>
+          <p:cNvSpPr/>
+          <p:nvPr/>
+        </p:nvSpPr>
+        <p:spPr>
+          <a:xfrm>
+            <a:off x="4201331" y="3226376"/>
+            <a:ext cx="360000" cy="360000"/>
+          </a:xfrm>
+          <a:prstGeom prst="ellipse">
+            <a:avLst/>
+          </a:prstGeom>
+          <a:gradFill flip="none" rotWithShape="1">
+            <a:gsLst>
+              <a:gs pos="60000">
+                <a:srgbClr val="92D050"/>
+              </a:gs>
+              <a:gs pos="40000">
+                <a:srgbClr val="FFC000"/>
+              </a:gs>
+              <a:gs pos="20000">
+                <a:srgbClr val="FF7E79"/>
+              </a:gs>
+              <a:gs pos="80000">
+                <a:schemeClr val="accent1">
+                  <a:lumMod val="60000"/>
+                  <a:lumOff val="40000"/>
+                </a:schemeClr>
+              </a:gs>
+            </a:gsLst>
+            <a:lin ang="1800000" scaled="0"/>
+            <a:tileRect/>
+          </a:gradFill>
+          <a:ln>
+            <a:noFill/>
+          </a:ln>
+        </p:spPr>
+        <p:style>
+          <a:lnRef idx="2">
+            <a:schemeClr val="accent1">
+              <a:shade val="15000"/>
+            </a:schemeClr>
+          </a:lnRef>
+          <a:fillRef idx="1">
+            <a:schemeClr val="accent1"/>
+          </a:fillRef>
+          <a:effectRef idx="0">
+            <a:schemeClr val="accent1"/>
+          </a:effectRef>
+          <a:fontRef idx="minor">
+            <a:schemeClr val="lt1"/>
+          </a:fontRef>
+        </p:style>
+        <p:txBody>
+          <a:bodyPr rtlCol="0" anchor="ctr"/>
+          <a:lstStyle/>
+          <a:p>
+            <a:pPr algn="ctr"/>
+            <a:endParaRPr lang="en-TW" dirty="0"/>
+          </a:p>
+        </p:txBody>
+      </p:sp>
     </p:spTree>
     <p:extLst>
       <p:ext uri="{BB962C8B-B14F-4D97-AF65-F5344CB8AC3E}">

--- a/icon/design.pptx
+++ b/icon/design.pptx
@@ -7,6 +7,7 @@
   <p:sldIdLst>
     <p:sldId id="256" r:id="rId2"/>
     <p:sldId id="257" r:id="rId3"/>
+    <p:sldId id="258" r:id="rId4"/>
   </p:sldIdLst>
   <p:sldSz cx="12192000" cy="6858000"/>
   <p:notesSz cx="6858000" cy="9144000"/>
@@ -9507,6 +9508,6152 @@
 </p:sld>
 </file>
 
+<file path=ppt/slides/slide3.xml><?xml version="1.0" encoding="utf-8"?>
+<p:sld xmlns:a="http://schemas.openxmlformats.org/drawingml/2006/main" xmlns:r="http://schemas.openxmlformats.org/officeDocument/2006/relationships" xmlns:p="http://schemas.openxmlformats.org/presentationml/2006/main">
+  <p:cSld>
+    <p:spTree>
+      <p:nvGrpSpPr>
+        <p:cNvPr id="1" name=""/>
+        <p:cNvGrpSpPr/>
+        <p:nvPr/>
+      </p:nvGrpSpPr>
+      <p:grpSpPr>
+        <a:xfrm>
+          <a:off x="0" y="0"/>
+          <a:ext cx="0" cy="0"/>
+          <a:chOff x="0" y="0"/>
+          <a:chExt cx="0" cy="0"/>
+        </a:xfrm>
+      </p:grpSpPr>
+      <p:sp>
+        <p:nvSpPr>
+          <p:cNvPr id="4" name="Graphic 2">
+            <a:extLst>
+              <a:ext uri="{FF2B5EF4-FFF2-40B4-BE49-F238E27FC236}">
+                <a16:creationId xmlns:a16="http://schemas.microsoft.com/office/drawing/2014/main" id="{DFFF7A5F-6546-932C-44AC-5BFC7690F9EF}"/>
+              </a:ext>
+            </a:extLst>
+          </p:cNvPr>
+          <p:cNvSpPr>
+            <a:spLocks noChangeAspect="1"/>
+          </p:cNvSpPr>
+          <p:nvPr/>
+        </p:nvSpPr>
+        <p:spPr>
+          <a:xfrm>
+            <a:off x="4116000" y="1449000"/>
+            <a:ext cx="3960000" cy="3960000"/>
+          </a:xfrm>
+          <a:custGeom>
+            <a:avLst/>
+            <a:gdLst>
+              <a:gd name="connsiteX0" fmla="*/ 4495800 w 4495800"/>
+              <a:gd name="connsiteY0" fmla="*/ 2247900 h 4495800"/>
+              <a:gd name="connsiteX1" fmla="*/ 4495676 w 4495800"/>
+              <a:gd name="connsiteY1" fmla="*/ 2602754 h 4495800"/>
+              <a:gd name="connsiteX2" fmla="*/ 4495305 w 4495800"/>
+              <a:gd name="connsiteY2" fmla="*/ 2730751 h 4495800"/>
+              <a:gd name="connsiteX3" fmla="*/ 4494695 w 4495800"/>
+              <a:gd name="connsiteY3" fmla="*/ 2826039 h 4495800"/>
+              <a:gd name="connsiteX4" fmla="*/ 4493829 w 4495800"/>
+              <a:gd name="connsiteY4" fmla="*/ 2904811 h 4495800"/>
+              <a:gd name="connsiteX5" fmla="*/ 4492714 w 4495800"/>
+              <a:gd name="connsiteY5" fmla="*/ 2973181 h 4495800"/>
+              <a:gd name="connsiteX6" fmla="*/ 4491362 w 4495800"/>
+              <a:gd name="connsiteY6" fmla="*/ 3034246 h 4495800"/>
+              <a:gd name="connsiteX7" fmla="*/ 4489761 w 4495800"/>
+              <a:gd name="connsiteY7" fmla="*/ 3089805 h 4495800"/>
+              <a:gd name="connsiteX8" fmla="*/ 4487904 w 4495800"/>
+              <a:gd name="connsiteY8" fmla="*/ 3141040 h 4495800"/>
+              <a:gd name="connsiteX9" fmla="*/ 4485808 w 4495800"/>
+              <a:gd name="connsiteY9" fmla="*/ 3188742 h 4495800"/>
+              <a:gd name="connsiteX10" fmla="*/ 4483456 w 4495800"/>
+              <a:gd name="connsiteY10" fmla="*/ 3233500 h 4495800"/>
+              <a:gd name="connsiteX11" fmla="*/ 4480865 w 4495800"/>
+              <a:gd name="connsiteY11" fmla="*/ 3275753 h 4495800"/>
+              <a:gd name="connsiteX12" fmla="*/ 4478017 w 4495800"/>
+              <a:gd name="connsiteY12" fmla="*/ 3315833 h 4495800"/>
+              <a:gd name="connsiteX13" fmla="*/ 4474922 w 4495800"/>
+              <a:gd name="connsiteY13" fmla="*/ 3354000 h 4495800"/>
+              <a:gd name="connsiteX14" fmla="*/ 4471578 w 4495800"/>
+              <a:gd name="connsiteY14" fmla="*/ 3390471 h 4495800"/>
+              <a:gd name="connsiteX15" fmla="*/ 4467978 w 4495800"/>
+              <a:gd name="connsiteY15" fmla="*/ 3425428 h 4495800"/>
+              <a:gd name="connsiteX16" fmla="*/ 4464130 w 4495800"/>
+              <a:gd name="connsiteY16" fmla="*/ 3459004 h 4495800"/>
+              <a:gd name="connsiteX17" fmla="*/ 4460034 w 4495800"/>
+              <a:gd name="connsiteY17" fmla="*/ 3491322 h 4495800"/>
+              <a:gd name="connsiteX18" fmla="*/ 4455681 w 4495800"/>
+              <a:gd name="connsiteY18" fmla="*/ 3522498 h 4495800"/>
+              <a:gd name="connsiteX19" fmla="*/ 4451080 w 4495800"/>
+              <a:gd name="connsiteY19" fmla="*/ 3552606 h 4495800"/>
+              <a:gd name="connsiteX20" fmla="*/ 4446223 w 4495800"/>
+              <a:gd name="connsiteY20" fmla="*/ 3581734 h 4495800"/>
+              <a:gd name="connsiteX21" fmla="*/ 4441108 w 4495800"/>
+              <a:gd name="connsiteY21" fmla="*/ 3609947 h 4495800"/>
+              <a:gd name="connsiteX22" fmla="*/ 4435736 w 4495800"/>
+              <a:gd name="connsiteY22" fmla="*/ 3637302 h 4495800"/>
+              <a:gd name="connsiteX23" fmla="*/ 4430106 w 4495800"/>
+              <a:gd name="connsiteY23" fmla="*/ 3663849 h 4495800"/>
+              <a:gd name="connsiteX24" fmla="*/ 4424220 w 4495800"/>
+              <a:gd name="connsiteY24" fmla="*/ 3689633 h 4495800"/>
+              <a:gd name="connsiteX25" fmla="*/ 4418076 w 4495800"/>
+              <a:gd name="connsiteY25" fmla="*/ 3714702 h 4495800"/>
+              <a:gd name="connsiteX26" fmla="*/ 4411666 w 4495800"/>
+              <a:gd name="connsiteY26" fmla="*/ 3739096 h 4495800"/>
+              <a:gd name="connsiteX27" fmla="*/ 4404999 w 4495800"/>
+              <a:gd name="connsiteY27" fmla="*/ 3762832 h 4495800"/>
+              <a:gd name="connsiteX28" fmla="*/ 4398074 w 4495800"/>
+              <a:gd name="connsiteY28" fmla="*/ 3785950 h 4495800"/>
+              <a:gd name="connsiteX29" fmla="*/ 4390873 w 4495800"/>
+              <a:gd name="connsiteY29" fmla="*/ 3808476 h 4495800"/>
+              <a:gd name="connsiteX30" fmla="*/ 4383415 w 4495800"/>
+              <a:gd name="connsiteY30" fmla="*/ 3830431 h 4495800"/>
+              <a:gd name="connsiteX31" fmla="*/ 4375681 w 4495800"/>
+              <a:gd name="connsiteY31" fmla="*/ 3851853 h 4495800"/>
+              <a:gd name="connsiteX32" fmla="*/ 4367680 w 4495800"/>
+              <a:gd name="connsiteY32" fmla="*/ 3872741 h 4495800"/>
+              <a:gd name="connsiteX33" fmla="*/ 4359412 w 4495800"/>
+              <a:gd name="connsiteY33" fmla="*/ 3893125 h 4495800"/>
+              <a:gd name="connsiteX34" fmla="*/ 4350868 w 4495800"/>
+              <a:gd name="connsiteY34" fmla="*/ 3913023 h 4495800"/>
+              <a:gd name="connsiteX35" fmla="*/ 4342038 w 4495800"/>
+              <a:gd name="connsiteY35" fmla="*/ 3932444 h 4495800"/>
+              <a:gd name="connsiteX36" fmla="*/ 4332942 w 4495800"/>
+              <a:gd name="connsiteY36" fmla="*/ 3951408 h 4495800"/>
+              <a:gd name="connsiteX37" fmla="*/ 4323569 w 4495800"/>
+              <a:gd name="connsiteY37" fmla="*/ 3969925 h 4495800"/>
+              <a:gd name="connsiteX38" fmla="*/ 4313911 w 4495800"/>
+              <a:gd name="connsiteY38" fmla="*/ 3988013 h 4495800"/>
+              <a:gd name="connsiteX39" fmla="*/ 4303957 w 4495800"/>
+              <a:gd name="connsiteY39" fmla="*/ 4005682 h 4495800"/>
+              <a:gd name="connsiteX40" fmla="*/ 4293727 w 4495800"/>
+              <a:gd name="connsiteY40" fmla="*/ 4022941 h 4495800"/>
+              <a:gd name="connsiteX41" fmla="*/ 4283202 w 4495800"/>
+              <a:gd name="connsiteY41" fmla="*/ 4039800 h 4495800"/>
+              <a:gd name="connsiteX42" fmla="*/ 4272392 w 4495800"/>
+              <a:gd name="connsiteY42" fmla="*/ 4056260 h 4495800"/>
+              <a:gd name="connsiteX43" fmla="*/ 4261276 w 4495800"/>
+              <a:gd name="connsiteY43" fmla="*/ 4072347 h 4495800"/>
+              <a:gd name="connsiteX44" fmla="*/ 4249865 w 4495800"/>
+              <a:gd name="connsiteY44" fmla="*/ 4088063 h 4495800"/>
+              <a:gd name="connsiteX45" fmla="*/ 4238149 w 4495800"/>
+              <a:gd name="connsiteY45" fmla="*/ 4103408 h 4495800"/>
+              <a:gd name="connsiteX46" fmla="*/ 4226128 w 4495800"/>
+              <a:gd name="connsiteY46" fmla="*/ 4118400 h 4495800"/>
+              <a:gd name="connsiteX47" fmla="*/ 4213803 w 4495800"/>
+              <a:gd name="connsiteY47" fmla="*/ 4133041 h 4495800"/>
+              <a:gd name="connsiteX48" fmla="*/ 4201154 w 4495800"/>
+              <a:gd name="connsiteY48" fmla="*/ 4147328 h 4495800"/>
+              <a:gd name="connsiteX49" fmla="*/ 4188190 w 4495800"/>
+              <a:gd name="connsiteY49" fmla="*/ 4161282 h 4495800"/>
+              <a:gd name="connsiteX50" fmla="*/ 4174903 w 4495800"/>
+              <a:gd name="connsiteY50" fmla="*/ 4174903 h 4495800"/>
+              <a:gd name="connsiteX51" fmla="*/ 4161282 w 4495800"/>
+              <a:gd name="connsiteY51" fmla="*/ 4188190 h 4495800"/>
+              <a:gd name="connsiteX52" fmla="*/ 4147328 w 4495800"/>
+              <a:gd name="connsiteY52" fmla="*/ 4201154 h 4495800"/>
+              <a:gd name="connsiteX53" fmla="*/ 4133041 w 4495800"/>
+              <a:gd name="connsiteY53" fmla="*/ 4213803 h 4495800"/>
+              <a:gd name="connsiteX54" fmla="*/ 4118400 w 4495800"/>
+              <a:gd name="connsiteY54" fmla="*/ 4226128 h 4495800"/>
+              <a:gd name="connsiteX55" fmla="*/ 4103408 w 4495800"/>
+              <a:gd name="connsiteY55" fmla="*/ 4238149 h 4495800"/>
+              <a:gd name="connsiteX56" fmla="*/ 4088063 w 4495800"/>
+              <a:gd name="connsiteY56" fmla="*/ 4249865 h 4495800"/>
+              <a:gd name="connsiteX57" fmla="*/ 4072347 w 4495800"/>
+              <a:gd name="connsiteY57" fmla="*/ 4261276 h 4495800"/>
+              <a:gd name="connsiteX58" fmla="*/ 4056260 w 4495800"/>
+              <a:gd name="connsiteY58" fmla="*/ 4272392 h 4495800"/>
+              <a:gd name="connsiteX59" fmla="*/ 4039800 w 4495800"/>
+              <a:gd name="connsiteY59" fmla="*/ 4283202 h 4495800"/>
+              <a:gd name="connsiteX60" fmla="*/ 4022941 w 4495800"/>
+              <a:gd name="connsiteY60" fmla="*/ 4293727 h 4495800"/>
+              <a:gd name="connsiteX61" fmla="*/ 4005682 w 4495800"/>
+              <a:gd name="connsiteY61" fmla="*/ 4303957 h 4495800"/>
+              <a:gd name="connsiteX62" fmla="*/ 3988013 w 4495800"/>
+              <a:gd name="connsiteY62" fmla="*/ 4313911 h 4495800"/>
+              <a:gd name="connsiteX63" fmla="*/ 3969925 w 4495800"/>
+              <a:gd name="connsiteY63" fmla="*/ 4323569 h 4495800"/>
+              <a:gd name="connsiteX64" fmla="*/ 3951408 w 4495800"/>
+              <a:gd name="connsiteY64" fmla="*/ 4332942 h 4495800"/>
+              <a:gd name="connsiteX65" fmla="*/ 3932444 w 4495800"/>
+              <a:gd name="connsiteY65" fmla="*/ 4342038 h 4495800"/>
+              <a:gd name="connsiteX66" fmla="*/ 3913023 w 4495800"/>
+              <a:gd name="connsiteY66" fmla="*/ 4350868 h 4495800"/>
+              <a:gd name="connsiteX67" fmla="*/ 3893125 w 4495800"/>
+              <a:gd name="connsiteY67" fmla="*/ 4359412 h 4495800"/>
+              <a:gd name="connsiteX68" fmla="*/ 3872741 w 4495800"/>
+              <a:gd name="connsiteY68" fmla="*/ 4367680 h 4495800"/>
+              <a:gd name="connsiteX69" fmla="*/ 3851853 w 4495800"/>
+              <a:gd name="connsiteY69" fmla="*/ 4375681 h 4495800"/>
+              <a:gd name="connsiteX70" fmla="*/ 3830431 w 4495800"/>
+              <a:gd name="connsiteY70" fmla="*/ 4383415 h 4495800"/>
+              <a:gd name="connsiteX71" fmla="*/ 3808476 w 4495800"/>
+              <a:gd name="connsiteY71" fmla="*/ 4390873 h 4495800"/>
+              <a:gd name="connsiteX72" fmla="*/ 3785950 w 4495800"/>
+              <a:gd name="connsiteY72" fmla="*/ 4398074 h 4495800"/>
+              <a:gd name="connsiteX73" fmla="*/ 3762832 w 4495800"/>
+              <a:gd name="connsiteY73" fmla="*/ 4404999 h 4495800"/>
+              <a:gd name="connsiteX74" fmla="*/ 3739096 w 4495800"/>
+              <a:gd name="connsiteY74" fmla="*/ 4411666 h 4495800"/>
+              <a:gd name="connsiteX75" fmla="*/ 3714702 w 4495800"/>
+              <a:gd name="connsiteY75" fmla="*/ 4418076 h 4495800"/>
+              <a:gd name="connsiteX76" fmla="*/ 3689633 w 4495800"/>
+              <a:gd name="connsiteY76" fmla="*/ 4424220 h 4495800"/>
+              <a:gd name="connsiteX77" fmla="*/ 3663849 w 4495800"/>
+              <a:gd name="connsiteY77" fmla="*/ 4430106 h 4495800"/>
+              <a:gd name="connsiteX78" fmla="*/ 3637302 w 4495800"/>
+              <a:gd name="connsiteY78" fmla="*/ 4435736 h 4495800"/>
+              <a:gd name="connsiteX79" fmla="*/ 3609947 w 4495800"/>
+              <a:gd name="connsiteY79" fmla="*/ 4441108 h 4495800"/>
+              <a:gd name="connsiteX80" fmla="*/ 3581734 w 4495800"/>
+              <a:gd name="connsiteY80" fmla="*/ 4446223 h 4495800"/>
+              <a:gd name="connsiteX81" fmla="*/ 3552606 w 4495800"/>
+              <a:gd name="connsiteY81" fmla="*/ 4451080 h 4495800"/>
+              <a:gd name="connsiteX82" fmla="*/ 3522498 w 4495800"/>
+              <a:gd name="connsiteY82" fmla="*/ 4455681 h 4495800"/>
+              <a:gd name="connsiteX83" fmla="*/ 3491322 w 4495800"/>
+              <a:gd name="connsiteY83" fmla="*/ 4460034 h 4495800"/>
+              <a:gd name="connsiteX84" fmla="*/ 3459004 w 4495800"/>
+              <a:gd name="connsiteY84" fmla="*/ 4464130 h 4495800"/>
+              <a:gd name="connsiteX85" fmla="*/ 3425428 w 4495800"/>
+              <a:gd name="connsiteY85" fmla="*/ 4467978 h 4495800"/>
+              <a:gd name="connsiteX86" fmla="*/ 3390471 w 4495800"/>
+              <a:gd name="connsiteY86" fmla="*/ 4471578 h 4495800"/>
+              <a:gd name="connsiteX87" fmla="*/ 3354000 w 4495800"/>
+              <a:gd name="connsiteY87" fmla="*/ 4474922 h 4495800"/>
+              <a:gd name="connsiteX88" fmla="*/ 3315833 w 4495800"/>
+              <a:gd name="connsiteY88" fmla="*/ 4478017 h 4495800"/>
+              <a:gd name="connsiteX89" fmla="*/ 3275753 w 4495800"/>
+              <a:gd name="connsiteY89" fmla="*/ 4480865 h 4495800"/>
+              <a:gd name="connsiteX90" fmla="*/ 3233500 w 4495800"/>
+              <a:gd name="connsiteY90" fmla="*/ 4483456 h 4495800"/>
+              <a:gd name="connsiteX91" fmla="*/ 3188742 w 4495800"/>
+              <a:gd name="connsiteY91" fmla="*/ 4485808 h 4495800"/>
+              <a:gd name="connsiteX92" fmla="*/ 3141040 w 4495800"/>
+              <a:gd name="connsiteY92" fmla="*/ 4487904 h 4495800"/>
+              <a:gd name="connsiteX93" fmla="*/ 3089805 w 4495800"/>
+              <a:gd name="connsiteY93" fmla="*/ 4489761 h 4495800"/>
+              <a:gd name="connsiteX94" fmla="*/ 3034246 w 4495800"/>
+              <a:gd name="connsiteY94" fmla="*/ 4491362 h 4495800"/>
+              <a:gd name="connsiteX95" fmla="*/ 2973181 w 4495800"/>
+              <a:gd name="connsiteY95" fmla="*/ 4492714 h 4495800"/>
+              <a:gd name="connsiteX96" fmla="*/ 2904811 w 4495800"/>
+              <a:gd name="connsiteY96" fmla="*/ 4493829 h 4495800"/>
+              <a:gd name="connsiteX97" fmla="*/ 2826039 w 4495800"/>
+              <a:gd name="connsiteY97" fmla="*/ 4494695 h 4495800"/>
+              <a:gd name="connsiteX98" fmla="*/ 2730751 w 4495800"/>
+              <a:gd name="connsiteY98" fmla="*/ 4495305 h 4495800"/>
+              <a:gd name="connsiteX99" fmla="*/ 2602754 w 4495800"/>
+              <a:gd name="connsiteY99" fmla="*/ 4495676 h 4495800"/>
+              <a:gd name="connsiteX100" fmla="*/ 2247900 w 4495800"/>
+              <a:gd name="connsiteY100" fmla="*/ 4495800 h 4495800"/>
+              <a:gd name="connsiteX101" fmla="*/ 1893046 w 4495800"/>
+              <a:gd name="connsiteY101" fmla="*/ 4495676 h 4495800"/>
+              <a:gd name="connsiteX102" fmla="*/ 1765049 w 4495800"/>
+              <a:gd name="connsiteY102" fmla="*/ 4495305 h 4495800"/>
+              <a:gd name="connsiteX103" fmla="*/ 1669761 w 4495800"/>
+              <a:gd name="connsiteY103" fmla="*/ 4494695 h 4495800"/>
+              <a:gd name="connsiteX104" fmla="*/ 1590989 w 4495800"/>
+              <a:gd name="connsiteY104" fmla="*/ 4493829 h 4495800"/>
+              <a:gd name="connsiteX105" fmla="*/ 1522619 w 4495800"/>
+              <a:gd name="connsiteY105" fmla="*/ 4492714 h 4495800"/>
+              <a:gd name="connsiteX106" fmla="*/ 1461554 w 4495800"/>
+              <a:gd name="connsiteY106" fmla="*/ 4491362 h 4495800"/>
+              <a:gd name="connsiteX107" fmla="*/ 1405995 w 4495800"/>
+              <a:gd name="connsiteY107" fmla="*/ 4489761 h 4495800"/>
+              <a:gd name="connsiteX108" fmla="*/ 1354760 w 4495800"/>
+              <a:gd name="connsiteY108" fmla="*/ 4487904 h 4495800"/>
+              <a:gd name="connsiteX109" fmla="*/ 1307059 w 4495800"/>
+              <a:gd name="connsiteY109" fmla="*/ 4485808 h 4495800"/>
+              <a:gd name="connsiteX110" fmla="*/ 1262301 w 4495800"/>
+              <a:gd name="connsiteY110" fmla="*/ 4483456 h 4495800"/>
+              <a:gd name="connsiteX111" fmla="*/ 1220048 w 4495800"/>
+              <a:gd name="connsiteY111" fmla="*/ 4480865 h 4495800"/>
+              <a:gd name="connsiteX112" fmla="*/ 1179967 w 4495800"/>
+              <a:gd name="connsiteY112" fmla="*/ 4478017 h 4495800"/>
+              <a:gd name="connsiteX113" fmla="*/ 1141800 w 4495800"/>
+              <a:gd name="connsiteY113" fmla="*/ 4474922 h 4495800"/>
+              <a:gd name="connsiteX114" fmla="*/ 1105329 w 4495800"/>
+              <a:gd name="connsiteY114" fmla="*/ 4471578 h 4495800"/>
+              <a:gd name="connsiteX115" fmla="*/ 1070372 w 4495800"/>
+              <a:gd name="connsiteY115" fmla="*/ 4467978 h 4495800"/>
+              <a:gd name="connsiteX116" fmla="*/ 1036796 w 4495800"/>
+              <a:gd name="connsiteY116" fmla="*/ 4464130 h 4495800"/>
+              <a:gd name="connsiteX117" fmla="*/ 1004478 w 4495800"/>
+              <a:gd name="connsiteY117" fmla="*/ 4460034 h 4495800"/>
+              <a:gd name="connsiteX118" fmla="*/ 973303 w 4495800"/>
+              <a:gd name="connsiteY118" fmla="*/ 4455681 h 4495800"/>
+              <a:gd name="connsiteX119" fmla="*/ 943194 w 4495800"/>
+              <a:gd name="connsiteY119" fmla="*/ 4451080 h 4495800"/>
+              <a:gd name="connsiteX120" fmla="*/ 914067 w 4495800"/>
+              <a:gd name="connsiteY120" fmla="*/ 4446223 h 4495800"/>
+              <a:gd name="connsiteX121" fmla="*/ 885854 w 4495800"/>
+              <a:gd name="connsiteY121" fmla="*/ 4441108 h 4495800"/>
+              <a:gd name="connsiteX122" fmla="*/ 858498 w 4495800"/>
+              <a:gd name="connsiteY122" fmla="*/ 4435736 h 4495800"/>
+              <a:gd name="connsiteX123" fmla="*/ 831952 w 4495800"/>
+              <a:gd name="connsiteY123" fmla="*/ 4430106 h 4495800"/>
+              <a:gd name="connsiteX124" fmla="*/ 806167 w 4495800"/>
+              <a:gd name="connsiteY124" fmla="*/ 4424220 h 4495800"/>
+              <a:gd name="connsiteX125" fmla="*/ 781098 w 4495800"/>
+              <a:gd name="connsiteY125" fmla="*/ 4418076 h 4495800"/>
+              <a:gd name="connsiteX126" fmla="*/ 756704 w 4495800"/>
+              <a:gd name="connsiteY126" fmla="*/ 4411666 h 4495800"/>
+              <a:gd name="connsiteX127" fmla="*/ 732968 w 4495800"/>
+              <a:gd name="connsiteY127" fmla="*/ 4404999 h 4495800"/>
+              <a:gd name="connsiteX128" fmla="*/ 709851 w 4495800"/>
+              <a:gd name="connsiteY128" fmla="*/ 4398074 h 4495800"/>
+              <a:gd name="connsiteX129" fmla="*/ 687324 w 4495800"/>
+              <a:gd name="connsiteY129" fmla="*/ 4390873 h 4495800"/>
+              <a:gd name="connsiteX130" fmla="*/ 665369 w 4495800"/>
+              <a:gd name="connsiteY130" fmla="*/ 4383415 h 4495800"/>
+              <a:gd name="connsiteX131" fmla="*/ 643947 w 4495800"/>
+              <a:gd name="connsiteY131" fmla="*/ 4375681 h 4495800"/>
+              <a:gd name="connsiteX132" fmla="*/ 623059 w 4495800"/>
+              <a:gd name="connsiteY132" fmla="*/ 4367680 h 4495800"/>
+              <a:gd name="connsiteX133" fmla="*/ 602675 w 4495800"/>
+              <a:gd name="connsiteY133" fmla="*/ 4359412 h 4495800"/>
+              <a:gd name="connsiteX134" fmla="*/ 582778 w 4495800"/>
+              <a:gd name="connsiteY134" fmla="*/ 4350868 h 4495800"/>
+              <a:gd name="connsiteX135" fmla="*/ 563356 w 4495800"/>
+              <a:gd name="connsiteY135" fmla="*/ 4342038 h 4495800"/>
+              <a:gd name="connsiteX136" fmla="*/ 544392 w 4495800"/>
+              <a:gd name="connsiteY136" fmla="*/ 4332942 h 4495800"/>
+              <a:gd name="connsiteX137" fmla="*/ 525875 w 4495800"/>
+              <a:gd name="connsiteY137" fmla="*/ 4323569 h 4495800"/>
+              <a:gd name="connsiteX138" fmla="*/ 507787 w 4495800"/>
+              <a:gd name="connsiteY138" fmla="*/ 4313911 h 4495800"/>
+              <a:gd name="connsiteX139" fmla="*/ 490118 w 4495800"/>
+              <a:gd name="connsiteY139" fmla="*/ 4303957 h 4495800"/>
+              <a:gd name="connsiteX140" fmla="*/ 472859 w 4495800"/>
+              <a:gd name="connsiteY140" fmla="*/ 4293727 h 4495800"/>
+              <a:gd name="connsiteX141" fmla="*/ 456000 w 4495800"/>
+              <a:gd name="connsiteY141" fmla="*/ 4283202 h 4495800"/>
+              <a:gd name="connsiteX142" fmla="*/ 439541 w 4495800"/>
+              <a:gd name="connsiteY142" fmla="*/ 4272392 h 4495800"/>
+              <a:gd name="connsiteX143" fmla="*/ 423453 w 4495800"/>
+              <a:gd name="connsiteY143" fmla="*/ 4261276 h 4495800"/>
+              <a:gd name="connsiteX144" fmla="*/ 407737 w 4495800"/>
+              <a:gd name="connsiteY144" fmla="*/ 4249865 h 4495800"/>
+              <a:gd name="connsiteX145" fmla="*/ 392392 w 4495800"/>
+              <a:gd name="connsiteY145" fmla="*/ 4238149 h 4495800"/>
+              <a:gd name="connsiteX146" fmla="*/ 377400 w 4495800"/>
+              <a:gd name="connsiteY146" fmla="*/ 4226128 h 4495800"/>
+              <a:gd name="connsiteX147" fmla="*/ 362760 w 4495800"/>
+              <a:gd name="connsiteY147" fmla="*/ 4213803 h 4495800"/>
+              <a:gd name="connsiteX148" fmla="*/ 348472 w 4495800"/>
+              <a:gd name="connsiteY148" fmla="*/ 4201154 h 4495800"/>
+              <a:gd name="connsiteX149" fmla="*/ 334518 w 4495800"/>
+              <a:gd name="connsiteY149" fmla="*/ 4188190 h 4495800"/>
+              <a:gd name="connsiteX150" fmla="*/ 320897 w 4495800"/>
+              <a:gd name="connsiteY150" fmla="*/ 4174903 h 4495800"/>
+              <a:gd name="connsiteX151" fmla="*/ 307610 w 4495800"/>
+              <a:gd name="connsiteY151" fmla="*/ 4161282 h 4495800"/>
+              <a:gd name="connsiteX152" fmla="*/ 294646 w 4495800"/>
+              <a:gd name="connsiteY152" fmla="*/ 4147328 h 4495800"/>
+              <a:gd name="connsiteX153" fmla="*/ 281997 w 4495800"/>
+              <a:gd name="connsiteY153" fmla="*/ 4133041 h 4495800"/>
+              <a:gd name="connsiteX154" fmla="*/ 269672 w 4495800"/>
+              <a:gd name="connsiteY154" fmla="*/ 4118400 h 4495800"/>
+              <a:gd name="connsiteX155" fmla="*/ 257651 w 4495800"/>
+              <a:gd name="connsiteY155" fmla="*/ 4103408 h 4495800"/>
+              <a:gd name="connsiteX156" fmla="*/ 245936 w 4495800"/>
+              <a:gd name="connsiteY156" fmla="*/ 4088063 h 4495800"/>
+              <a:gd name="connsiteX157" fmla="*/ 234525 w 4495800"/>
+              <a:gd name="connsiteY157" fmla="*/ 4072347 h 4495800"/>
+              <a:gd name="connsiteX158" fmla="*/ 223409 w 4495800"/>
+              <a:gd name="connsiteY158" fmla="*/ 4056260 h 4495800"/>
+              <a:gd name="connsiteX159" fmla="*/ 212598 w 4495800"/>
+              <a:gd name="connsiteY159" fmla="*/ 4039800 h 4495800"/>
+              <a:gd name="connsiteX160" fmla="*/ 202073 w 4495800"/>
+              <a:gd name="connsiteY160" fmla="*/ 4022941 h 4495800"/>
+              <a:gd name="connsiteX161" fmla="*/ 191843 w 4495800"/>
+              <a:gd name="connsiteY161" fmla="*/ 4005682 h 4495800"/>
+              <a:gd name="connsiteX162" fmla="*/ 181889 w 4495800"/>
+              <a:gd name="connsiteY162" fmla="*/ 3988013 h 4495800"/>
+              <a:gd name="connsiteX163" fmla="*/ 172231 w 4495800"/>
+              <a:gd name="connsiteY163" fmla="*/ 3969925 h 4495800"/>
+              <a:gd name="connsiteX164" fmla="*/ 162858 w 4495800"/>
+              <a:gd name="connsiteY164" fmla="*/ 3951408 h 4495800"/>
+              <a:gd name="connsiteX165" fmla="*/ 153762 w 4495800"/>
+              <a:gd name="connsiteY165" fmla="*/ 3932444 h 4495800"/>
+              <a:gd name="connsiteX166" fmla="*/ 144932 w 4495800"/>
+              <a:gd name="connsiteY166" fmla="*/ 3913023 h 4495800"/>
+              <a:gd name="connsiteX167" fmla="*/ 136388 w 4495800"/>
+              <a:gd name="connsiteY167" fmla="*/ 3893125 h 4495800"/>
+              <a:gd name="connsiteX168" fmla="*/ 128121 w 4495800"/>
+              <a:gd name="connsiteY168" fmla="*/ 3872741 h 4495800"/>
+              <a:gd name="connsiteX169" fmla="*/ 120120 w 4495800"/>
+              <a:gd name="connsiteY169" fmla="*/ 3851853 h 4495800"/>
+              <a:gd name="connsiteX170" fmla="*/ 112385 w 4495800"/>
+              <a:gd name="connsiteY170" fmla="*/ 3830431 h 4495800"/>
+              <a:gd name="connsiteX171" fmla="*/ 104927 w 4495800"/>
+              <a:gd name="connsiteY171" fmla="*/ 3808476 h 4495800"/>
+              <a:gd name="connsiteX172" fmla="*/ 97727 w 4495800"/>
+              <a:gd name="connsiteY172" fmla="*/ 3785950 h 4495800"/>
+              <a:gd name="connsiteX173" fmla="*/ 90802 w 4495800"/>
+              <a:gd name="connsiteY173" fmla="*/ 3762832 h 4495800"/>
+              <a:gd name="connsiteX174" fmla="*/ 84134 w 4495800"/>
+              <a:gd name="connsiteY174" fmla="*/ 3739096 h 4495800"/>
+              <a:gd name="connsiteX175" fmla="*/ 77724 w 4495800"/>
+              <a:gd name="connsiteY175" fmla="*/ 3714702 h 4495800"/>
+              <a:gd name="connsiteX176" fmla="*/ 71580 w 4495800"/>
+              <a:gd name="connsiteY176" fmla="*/ 3689633 h 4495800"/>
+              <a:gd name="connsiteX177" fmla="*/ 65694 w 4495800"/>
+              <a:gd name="connsiteY177" fmla="*/ 3663849 h 4495800"/>
+              <a:gd name="connsiteX178" fmla="*/ 60065 w 4495800"/>
+              <a:gd name="connsiteY178" fmla="*/ 3637302 h 4495800"/>
+              <a:gd name="connsiteX179" fmla="*/ 54693 w 4495800"/>
+              <a:gd name="connsiteY179" fmla="*/ 3609947 h 4495800"/>
+              <a:gd name="connsiteX180" fmla="*/ 49578 w 4495800"/>
+              <a:gd name="connsiteY180" fmla="*/ 3581734 h 4495800"/>
+              <a:gd name="connsiteX181" fmla="*/ 44720 w 4495800"/>
+              <a:gd name="connsiteY181" fmla="*/ 3552606 h 4495800"/>
+              <a:gd name="connsiteX182" fmla="*/ 40119 w 4495800"/>
+              <a:gd name="connsiteY182" fmla="*/ 3522498 h 4495800"/>
+              <a:gd name="connsiteX183" fmla="*/ 35766 w 4495800"/>
+              <a:gd name="connsiteY183" fmla="*/ 3491322 h 4495800"/>
+              <a:gd name="connsiteX184" fmla="*/ 31671 w 4495800"/>
+              <a:gd name="connsiteY184" fmla="*/ 3459004 h 4495800"/>
+              <a:gd name="connsiteX185" fmla="*/ 27823 w 4495800"/>
+              <a:gd name="connsiteY185" fmla="*/ 3425428 h 4495800"/>
+              <a:gd name="connsiteX186" fmla="*/ 24222 w 4495800"/>
+              <a:gd name="connsiteY186" fmla="*/ 3390471 h 4495800"/>
+              <a:gd name="connsiteX187" fmla="*/ 20879 w 4495800"/>
+              <a:gd name="connsiteY187" fmla="*/ 3354000 h 4495800"/>
+              <a:gd name="connsiteX188" fmla="*/ 17783 w 4495800"/>
+              <a:gd name="connsiteY188" fmla="*/ 3315833 h 4495800"/>
+              <a:gd name="connsiteX189" fmla="*/ 14935 w 4495800"/>
+              <a:gd name="connsiteY189" fmla="*/ 3275753 h 4495800"/>
+              <a:gd name="connsiteX190" fmla="*/ 12344 w 4495800"/>
+              <a:gd name="connsiteY190" fmla="*/ 3233500 h 4495800"/>
+              <a:gd name="connsiteX191" fmla="*/ 9992 w 4495800"/>
+              <a:gd name="connsiteY191" fmla="*/ 3188742 h 4495800"/>
+              <a:gd name="connsiteX192" fmla="*/ 7896 w 4495800"/>
+              <a:gd name="connsiteY192" fmla="*/ 3141040 h 4495800"/>
+              <a:gd name="connsiteX193" fmla="*/ 6039 w 4495800"/>
+              <a:gd name="connsiteY193" fmla="*/ 3089805 h 4495800"/>
+              <a:gd name="connsiteX194" fmla="*/ 4439 w 4495800"/>
+              <a:gd name="connsiteY194" fmla="*/ 3034246 h 4495800"/>
+              <a:gd name="connsiteX195" fmla="*/ 3086 w 4495800"/>
+              <a:gd name="connsiteY195" fmla="*/ 2973181 h 4495800"/>
+              <a:gd name="connsiteX196" fmla="*/ 1972 w 4495800"/>
+              <a:gd name="connsiteY196" fmla="*/ 2904811 h 4495800"/>
+              <a:gd name="connsiteX197" fmla="*/ 1105 w 4495800"/>
+              <a:gd name="connsiteY197" fmla="*/ 2826039 h 4495800"/>
+              <a:gd name="connsiteX198" fmla="*/ 495 w 4495800"/>
+              <a:gd name="connsiteY198" fmla="*/ 2730751 h 4495800"/>
+              <a:gd name="connsiteX199" fmla="*/ 124 w 4495800"/>
+              <a:gd name="connsiteY199" fmla="*/ 2602754 h 4495800"/>
+              <a:gd name="connsiteX200" fmla="*/ 0 w 4495800"/>
+              <a:gd name="connsiteY200" fmla="*/ 2247900 h 4495800"/>
+              <a:gd name="connsiteX201" fmla="*/ 124 w 4495800"/>
+              <a:gd name="connsiteY201" fmla="*/ 1893046 h 4495800"/>
+              <a:gd name="connsiteX202" fmla="*/ 495 w 4495800"/>
+              <a:gd name="connsiteY202" fmla="*/ 1765049 h 4495800"/>
+              <a:gd name="connsiteX203" fmla="*/ 1105 w 4495800"/>
+              <a:gd name="connsiteY203" fmla="*/ 1669761 h 4495800"/>
+              <a:gd name="connsiteX204" fmla="*/ 1972 w 4495800"/>
+              <a:gd name="connsiteY204" fmla="*/ 1590989 h 4495800"/>
+              <a:gd name="connsiteX205" fmla="*/ 3086 w 4495800"/>
+              <a:gd name="connsiteY205" fmla="*/ 1522619 h 4495800"/>
+              <a:gd name="connsiteX206" fmla="*/ 4439 w 4495800"/>
+              <a:gd name="connsiteY206" fmla="*/ 1461554 h 4495800"/>
+              <a:gd name="connsiteX207" fmla="*/ 6039 w 4495800"/>
+              <a:gd name="connsiteY207" fmla="*/ 1405995 h 4495800"/>
+              <a:gd name="connsiteX208" fmla="*/ 7896 w 4495800"/>
+              <a:gd name="connsiteY208" fmla="*/ 1354760 h 4495800"/>
+              <a:gd name="connsiteX209" fmla="*/ 9992 w 4495800"/>
+              <a:gd name="connsiteY209" fmla="*/ 1307059 h 4495800"/>
+              <a:gd name="connsiteX210" fmla="*/ 12344 w 4495800"/>
+              <a:gd name="connsiteY210" fmla="*/ 1262301 h 4495800"/>
+              <a:gd name="connsiteX211" fmla="*/ 14935 w 4495800"/>
+              <a:gd name="connsiteY211" fmla="*/ 1220048 h 4495800"/>
+              <a:gd name="connsiteX212" fmla="*/ 17783 w 4495800"/>
+              <a:gd name="connsiteY212" fmla="*/ 1179967 h 4495800"/>
+              <a:gd name="connsiteX213" fmla="*/ 20879 w 4495800"/>
+              <a:gd name="connsiteY213" fmla="*/ 1141800 h 4495800"/>
+              <a:gd name="connsiteX214" fmla="*/ 24222 w 4495800"/>
+              <a:gd name="connsiteY214" fmla="*/ 1105329 h 4495800"/>
+              <a:gd name="connsiteX215" fmla="*/ 27823 w 4495800"/>
+              <a:gd name="connsiteY215" fmla="*/ 1070372 h 4495800"/>
+              <a:gd name="connsiteX216" fmla="*/ 31671 w 4495800"/>
+              <a:gd name="connsiteY216" fmla="*/ 1036796 h 4495800"/>
+              <a:gd name="connsiteX217" fmla="*/ 35766 w 4495800"/>
+              <a:gd name="connsiteY217" fmla="*/ 1004478 h 4495800"/>
+              <a:gd name="connsiteX218" fmla="*/ 40119 w 4495800"/>
+              <a:gd name="connsiteY218" fmla="*/ 973303 h 4495800"/>
+              <a:gd name="connsiteX219" fmla="*/ 44720 w 4495800"/>
+              <a:gd name="connsiteY219" fmla="*/ 943194 h 4495800"/>
+              <a:gd name="connsiteX220" fmla="*/ 49578 w 4495800"/>
+              <a:gd name="connsiteY220" fmla="*/ 914067 h 4495800"/>
+              <a:gd name="connsiteX221" fmla="*/ 54693 w 4495800"/>
+              <a:gd name="connsiteY221" fmla="*/ 885854 h 4495800"/>
+              <a:gd name="connsiteX222" fmla="*/ 60065 w 4495800"/>
+              <a:gd name="connsiteY222" fmla="*/ 858498 h 4495800"/>
+              <a:gd name="connsiteX223" fmla="*/ 65694 w 4495800"/>
+              <a:gd name="connsiteY223" fmla="*/ 831952 h 4495800"/>
+              <a:gd name="connsiteX224" fmla="*/ 71580 w 4495800"/>
+              <a:gd name="connsiteY224" fmla="*/ 806167 h 4495800"/>
+              <a:gd name="connsiteX225" fmla="*/ 77724 w 4495800"/>
+              <a:gd name="connsiteY225" fmla="*/ 781098 h 4495800"/>
+              <a:gd name="connsiteX226" fmla="*/ 84134 w 4495800"/>
+              <a:gd name="connsiteY226" fmla="*/ 756704 h 4495800"/>
+              <a:gd name="connsiteX227" fmla="*/ 90802 w 4495800"/>
+              <a:gd name="connsiteY227" fmla="*/ 732968 h 4495800"/>
+              <a:gd name="connsiteX228" fmla="*/ 97727 w 4495800"/>
+              <a:gd name="connsiteY228" fmla="*/ 709851 h 4495800"/>
+              <a:gd name="connsiteX229" fmla="*/ 104927 w 4495800"/>
+              <a:gd name="connsiteY229" fmla="*/ 687324 h 4495800"/>
+              <a:gd name="connsiteX230" fmla="*/ 112385 w 4495800"/>
+              <a:gd name="connsiteY230" fmla="*/ 665369 h 4495800"/>
+              <a:gd name="connsiteX231" fmla="*/ 120120 w 4495800"/>
+              <a:gd name="connsiteY231" fmla="*/ 643947 h 4495800"/>
+              <a:gd name="connsiteX232" fmla="*/ 128121 w 4495800"/>
+              <a:gd name="connsiteY232" fmla="*/ 623059 h 4495800"/>
+              <a:gd name="connsiteX233" fmla="*/ 136388 w 4495800"/>
+              <a:gd name="connsiteY233" fmla="*/ 602675 h 4495800"/>
+              <a:gd name="connsiteX234" fmla="*/ 144932 w 4495800"/>
+              <a:gd name="connsiteY234" fmla="*/ 582778 h 4495800"/>
+              <a:gd name="connsiteX235" fmla="*/ 153762 w 4495800"/>
+              <a:gd name="connsiteY235" fmla="*/ 563356 h 4495800"/>
+              <a:gd name="connsiteX236" fmla="*/ 162858 w 4495800"/>
+              <a:gd name="connsiteY236" fmla="*/ 544392 h 4495800"/>
+              <a:gd name="connsiteX237" fmla="*/ 172231 w 4495800"/>
+              <a:gd name="connsiteY237" fmla="*/ 525875 h 4495800"/>
+              <a:gd name="connsiteX238" fmla="*/ 181889 w 4495800"/>
+              <a:gd name="connsiteY238" fmla="*/ 507787 h 4495800"/>
+              <a:gd name="connsiteX239" fmla="*/ 191843 w 4495800"/>
+              <a:gd name="connsiteY239" fmla="*/ 490118 h 4495800"/>
+              <a:gd name="connsiteX240" fmla="*/ 202073 w 4495800"/>
+              <a:gd name="connsiteY240" fmla="*/ 472859 h 4495800"/>
+              <a:gd name="connsiteX241" fmla="*/ 212598 w 4495800"/>
+              <a:gd name="connsiteY241" fmla="*/ 456000 h 4495800"/>
+              <a:gd name="connsiteX242" fmla="*/ 223409 w 4495800"/>
+              <a:gd name="connsiteY242" fmla="*/ 439541 h 4495800"/>
+              <a:gd name="connsiteX243" fmla="*/ 234525 w 4495800"/>
+              <a:gd name="connsiteY243" fmla="*/ 423453 h 4495800"/>
+              <a:gd name="connsiteX244" fmla="*/ 245936 w 4495800"/>
+              <a:gd name="connsiteY244" fmla="*/ 407737 h 4495800"/>
+              <a:gd name="connsiteX245" fmla="*/ 257651 w 4495800"/>
+              <a:gd name="connsiteY245" fmla="*/ 392392 h 4495800"/>
+              <a:gd name="connsiteX246" fmla="*/ 269672 w 4495800"/>
+              <a:gd name="connsiteY246" fmla="*/ 377400 h 4495800"/>
+              <a:gd name="connsiteX247" fmla="*/ 281997 w 4495800"/>
+              <a:gd name="connsiteY247" fmla="*/ 362760 h 4495800"/>
+              <a:gd name="connsiteX248" fmla="*/ 294646 w 4495800"/>
+              <a:gd name="connsiteY248" fmla="*/ 348472 h 4495800"/>
+              <a:gd name="connsiteX249" fmla="*/ 307610 w 4495800"/>
+              <a:gd name="connsiteY249" fmla="*/ 334518 h 4495800"/>
+              <a:gd name="connsiteX250" fmla="*/ 320897 w 4495800"/>
+              <a:gd name="connsiteY250" fmla="*/ 320897 h 4495800"/>
+              <a:gd name="connsiteX251" fmla="*/ 334518 w 4495800"/>
+              <a:gd name="connsiteY251" fmla="*/ 307610 h 4495800"/>
+              <a:gd name="connsiteX252" fmla="*/ 348472 w 4495800"/>
+              <a:gd name="connsiteY252" fmla="*/ 294646 h 4495800"/>
+              <a:gd name="connsiteX253" fmla="*/ 362760 w 4495800"/>
+              <a:gd name="connsiteY253" fmla="*/ 281997 h 4495800"/>
+              <a:gd name="connsiteX254" fmla="*/ 377400 w 4495800"/>
+              <a:gd name="connsiteY254" fmla="*/ 269672 h 4495800"/>
+              <a:gd name="connsiteX255" fmla="*/ 392392 w 4495800"/>
+              <a:gd name="connsiteY255" fmla="*/ 257651 h 4495800"/>
+              <a:gd name="connsiteX256" fmla="*/ 407737 w 4495800"/>
+              <a:gd name="connsiteY256" fmla="*/ 245936 h 4495800"/>
+              <a:gd name="connsiteX257" fmla="*/ 423453 w 4495800"/>
+              <a:gd name="connsiteY257" fmla="*/ 234525 h 4495800"/>
+              <a:gd name="connsiteX258" fmla="*/ 439541 w 4495800"/>
+              <a:gd name="connsiteY258" fmla="*/ 223409 h 4495800"/>
+              <a:gd name="connsiteX259" fmla="*/ 456000 w 4495800"/>
+              <a:gd name="connsiteY259" fmla="*/ 212598 h 4495800"/>
+              <a:gd name="connsiteX260" fmla="*/ 472859 w 4495800"/>
+              <a:gd name="connsiteY260" fmla="*/ 202073 h 4495800"/>
+              <a:gd name="connsiteX261" fmla="*/ 490118 w 4495800"/>
+              <a:gd name="connsiteY261" fmla="*/ 191843 h 4495800"/>
+              <a:gd name="connsiteX262" fmla="*/ 507787 w 4495800"/>
+              <a:gd name="connsiteY262" fmla="*/ 181889 h 4495800"/>
+              <a:gd name="connsiteX263" fmla="*/ 525875 w 4495800"/>
+              <a:gd name="connsiteY263" fmla="*/ 172231 h 4495800"/>
+              <a:gd name="connsiteX264" fmla="*/ 544392 w 4495800"/>
+              <a:gd name="connsiteY264" fmla="*/ 162858 h 4495800"/>
+              <a:gd name="connsiteX265" fmla="*/ 563356 w 4495800"/>
+              <a:gd name="connsiteY265" fmla="*/ 153762 h 4495800"/>
+              <a:gd name="connsiteX266" fmla="*/ 582778 w 4495800"/>
+              <a:gd name="connsiteY266" fmla="*/ 144932 h 4495800"/>
+              <a:gd name="connsiteX267" fmla="*/ 602675 w 4495800"/>
+              <a:gd name="connsiteY267" fmla="*/ 136388 h 4495800"/>
+              <a:gd name="connsiteX268" fmla="*/ 623059 w 4495800"/>
+              <a:gd name="connsiteY268" fmla="*/ 128121 h 4495800"/>
+              <a:gd name="connsiteX269" fmla="*/ 643947 w 4495800"/>
+              <a:gd name="connsiteY269" fmla="*/ 120120 h 4495800"/>
+              <a:gd name="connsiteX270" fmla="*/ 665369 w 4495800"/>
+              <a:gd name="connsiteY270" fmla="*/ 112385 h 4495800"/>
+              <a:gd name="connsiteX271" fmla="*/ 687324 w 4495800"/>
+              <a:gd name="connsiteY271" fmla="*/ 104927 h 4495800"/>
+              <a:gd name="connsiteX272" fmla="*/ 709851 w 4495800"/>
+              <a:gd name="connsiteY272" fmla="*/ 97727 h 4495800"/>
+              <a:gd name="connsiteX273" fmla="*/ 732968 w 4495800"/>
+              <a:gd name="connsiteY273" fmla="*/ 90802 h 4495800"/>
+              <a:gd name="connsiteX274" fmla="*/ 756704 w 4495800"/>
+              <a:gd name="connsiteY274" fmla="*/ 84134 h 4495800"/>
+              <a:gd name="connsiteX275" fmla="*/ 781098 w 4495800"/>
+              <a:gd name="connsiteY275" fmla="*/ 77724 h 4495800"/>
+              <a:gd name="connsiteX276" fmla="*/ 806167 w 4495800"/>
+              <a:gd name="connsiteY276" fmla="*/ 71580 h 4495800"/>
+              <a:gd name="connsiteX277" fmla="*/ 831952 w 4495800"/>
+              <a:gd name="connsiteY277" fmla="*/ 65694 h 4495800"/>
+              <a:gd name="connsiteX278" fmla="*/ 858498 w 4495800"/>
+              <a:gd name="connsiteY278" fmla="*/ 60065 h 4495800"/>
+              <a:gd name="connsiteX279" fmla="*/ 885854 w 4495800"/>
+              <a:gd name="connsiteY279" fmla="*/ 54693 h 4495800"/>
+              <a:gd name="connsiteX280" fmla="*/ 914067 w 4495800"/>
+              <a:gd name="connsiteY280" fmla="*/ 49578 h 4495800"/>
+              <a:gd name="connsiteX281" fmla="*/ 943194 w 4495800"/>
+              <a:gd name="connsiteY281" fmla="*/ 44720 h 4495800"/>
+              <a:gd name="connsiteX282" fmla="*/ 973303 w 4495800"/>
+              <a:gd name="connsiteY282" fmla="*/ 40119 h 4495800"/>
+              <a:gd name="connsiteX283" fmla="*/ 1004478 w 4495800"/>
+              <a:gd name="connsiteY283" fmla="*/ 35766 h 4495800"/>
+              <a:gd name="connsiteX284" fmla="*/ 1036796 w 4495800"/>
+              <a:gd name="connsiteY284" fmla="*/ 31671 h 4495800"/>
+              <a:gd name="connsiteX285" fmla="*/ 1070372 w 4495800"/>
+              <a:gd name="connsiteY285" fmla="*/ 27823 h 4495800"/>
+              <a:gd name="connsiteX286" fmla="*/ 1105329 w 4495800"/>
+              <a:gd name="connsiteY286" fmla="*/ 24222 h 4495800"/>
+              <a:gd name="connsiteX287" fmla="*/ 1141800 w 4495800"/>
+              <a:gd name="connsiteY287" fmla="*/ 20879 h 4495800"/>
+              <a:gd name="connsiteX288" fmla="*/ 1179967 w 4495800"/>
+              <a:gd name="connsiteY288" fmla="*/ 17783 h 4495800"/>
+              <a:gd name="connsiteX289" fmla="*/ 1220048 w 4495800"/>
+              <a:gd name="connsiteY289" fmla="*/ 14935 h 4495800"/>
+              <a:gd name="connsiteX290" fmla="*/ 1262301 w 4495800"/>
+              <a:gd name="connsiteY290" fmla="*/ 12344 h 4495800"/>
+              <a:gd name="connsiteX291" fmla="*/ 1307059 w 4495800"/>
+              <a:gd name="connsiteY291" fmla="*/ 9992 h 4495800"/>
+              <a:gd name="connsiteX292" fmla="*/ 1354760 w 4495800"/>
+              <a:gd name="connsiteY292" fmla="*/ 7896 h 4495800"/>
+              <a:gd name="connsiteX293" fmla="*/ 1405995 w 4495800"/>
+              <a:gd name="connsiteY293" fmla="*/ 6039 h 4495800"/>
+              <a:gd name="connsiteX294" fmla="*/ 1461554 w 4495800"/>
+              <a:gd name="connsiteY294" fmla="*/ 4439 h 4495800"/>
+              <a:gd name="connsiteX295" fmla="*/ 1522619 w 4495800"/>
+              <a:gd name="connsiteY295" fmla="*/ 3086 h 4495800"/>
+              <a:gd name="connsiteX296" fmla="*/ 1590989 w 4495800"/>
+              <a:gd name="connsiteY296" fmla="*/ 1972 h 4495800"/>
+              <a:gd name="connsiteX297" fmla="*/ 1669761 w 4495800"/>
+              <a:gd name="connsiteY297" fmla="*/ 1105 h 4495800"/>
+              <a:gd name="connsiteX298" fmla="*/ 1765049 w 4495800"/>
+              <a:gd name="connsiteY298" fmla="*/ 495 h 4495800"/>
+              <a:gd name="connsiteX299" fmla="*/ 1893046 w 4495800"/>
+              <a:gd name="connsiteY299" fmla="*/ 124 h 4495800"/>
+              <a:gd name="connsiteX300" fmla="*/ 2247900 w 4495800"/>
+              <a:gd name="connsiteY300" fmla="*/ 0 h 4495800"/>
+              <a:gd name="connsiteX301" fmla="*/ 2602754 w 4495800"/>
+              <a:gd name="connsiteY301" fmla="*/ 124 h 4495800"/>
+              <a:gd name="connsiteX302" fmla="*/ 2730751 w 4495800"/>
+              <a:gd name="connsiteY302" fmla="*/ 495 h 4495800"/>
+              <a:gd name="connsiteX303" fmla="*/ 2826039 w 4495800"/>
+              <a:gd name="connsiteY303" fmla="*/ 1105 h 4495800"/>
+              <a:gd name="connsiteX304" fmla="*/ 2904811 w 4495800"/>
+              <a:gd name="connsiteY304" fmla="*/ 1972 h 4495800"/>
+              <a:gd name="connsiteX305" fmla="*/ 2973181 w 4495800"/>
+              <a:gd name="connsiteY305" fmla="*/ 3086 h 4495800"/>
+              <a:gd name="connsiteX306" fmla="*/ 3034246 w 4495800"/>
+              <a:gd name="connsiteY306" fmla="*/ 4439 h 4495800"/>
+              <a:gd name="connsiteX307" fmla="*/ 3089805 w 4495800"/>
+              <a:gd name="connsiteY307" fmla="*/ 6039 h 4495800"/>
+              <a:gd name="connsiteX308" fmla="*/ 3141040 w 4495800"/>
+              <a:gd name="connsiteY308" fmla="*/ 7896 h 4495800"/>
+              <a:gd name="connsiteX309" fmla="*/ 3188742 w 4495800"/>
+              <a:gd name="connsiteY309" fmla="*/ 9992 h 4495800"/>
+              <a:gd name="connsiteX310" fmla="*/ 3233500 w 4495800"/>
+              <a:gd name="connsiteY310" fmla="*/ 12344 h 4495800"/>
+              <a:gd name="connsiteX311" fmla="*/ 3275753 w 4495800"/>
+              <a:gd name="connsiteY311" fmla="*/ 14935 h 4495800"/>
+              <a:gd name="connsiteX312" fmla="*/ 3315833 w 4495800"/>
+              <a:gd name="connsiteY312" fmla="*/ 17783 h 4495800"/>
+              <a:gd name="connsiteX313" fmla="*/ 3354000 w 4495800"/>
+              <a:gd name="connsiteY313" fmla="*/ 20879 h 4495800"/>
+              <a:gd name="connsiteX314" fmla="*/ 3390471 w 4495800"/>
+              <a:gd name="connsiteY314" fmla="*/ 24222 h 4495800"/>
+              <a:gd name="connsiteX315" fmla="*/ 3425428 w 4495800"/>
+              <a:gd name="connsiteY315" fmla="*/ 27823 h 4495800"/>
+              <a:gd name="connsiteX316" fmla="*/ 3459004 w 4495800"/>
+              <a:gd name="connsiteY316" fmla="*/ 31671 h 4495800"/>
+              <a:gd name="connsiteX317" fmla="*/ 3491322 w 4495800"/>
+              <a:gd name="connsiteY317" fmla="*/ 35766 h 4495800"/>
+              <a:gd name="connsiteX318" fmla="*/ 3522498 w 4495800"/>
+              <a:gd name="connsiteY318" fmla="*/ 40119 h 4495800"/>
+              <a:gd name="connsiteX319" fmla="*/ 3552606 w 4495800"/>
+              <a:gd name="connsiteY319" fmla="*/ 44720 h 4495800"/>
+              <a:gd name="connsiteX320" fmla="*/ 3581734 w 4495800"/>
+              <a:gd name="connsiteY320" fmla="*/ 49578 h 4495800"/>
+              <a:gd name="connsiteX321" fmla="*/ 3609947 w 4495800"/>
+              <a:gd name="connsiteY321" fmla="*/ 54693 h 4495800"/>
+              <a:gd name="connsiteX322" fmla="*/ 3637302 w 4495800"/>
+              <a:gd name="connsiteY322" fmla="*/ 60065 h 4495800"/>
+              <a:gd name="connsiteX323" fmla="*/ 3663849 w 4495800"/>
+              <a:gd name="connsiteY323" fmla="*/ 65694 h 4495800"/>
+              <a:gd name="connsiteX324" fmla="*/ 3689633 w 4495800"/>
+              <a:gd name="connsiteY324" fmla="*/ 71580 h 4495800"/>
+              <a:gd name="connsiteX325" fmla="*/ 3714702 w 4495800"/>
+              <a:gd name="connsiteY325" fmla="*/ 77724 h 4495800"/>
+              <a:gd name="connsiteX326" fmla="*/ 3739096 w 4495800"/>
+              <a:gd name="connsiteY326" fmla="*/ 84134 h 4495800"/>
+              <a:gd name="connsiteX327" fmla="*/ 3762832 w 4495800"/>
+              <a:gd name="connsiteY327" fmla="*/ 90802 h 4495800"/>
+              <a:gd name="connsiteX328" fmla="*/ 3785950 w 4495800"/>
+              <a:gd name="connsiteY328" fmla="*/ 97727 h 4495800"/>
+              <a:gd name="connsiteX329" fmla="*/ 3808476 w 4495800"/>
+              <a:gd name="connsiteY329" fmla="*/ 104927 h 4495800"/>
+              <a:gd name="connsiteX330" fmla="*/ 3830431 w 4495800"/>
+              <a:gd name="connsiteY330" fmla="*/ 112385 h 4495800"/>
+              <a:gd name="connsiteX331" fmla="*/ 3851853 w 4495800"/>
+              <a:gd name="connsiteY331" fmla="*/ 120120 h 4495800"/>
+              <a:gd name="connsiteX332" fmla="*/ 3872741 w 4495800"/>
+              <a:gd name="connsiteY332" fmla="*/ 128121 h 4495800"/>
+              <a:gd name="connsiteX333" fmla="*/ 3893125 w 4495800"/>
+              <a:gd name="connsiteY333" fmla="*/ 136388 h 4495800"/>
+              <a:gd name="connsiteX334" fmla="*/ 3913023 w 4495800"/>
+              <a:gd name="connsiteY334" fmla="*/ 144932 h 4495800"/>
+              <a:gd name="connsiteX335" fmla="*/ 3932444 w 4495800"/>
+              <a:gd name="connsiteY335" fmla="*/ 153762 h 4495800"/>
+              <a:gd name="connsiteX336" fmla="*/ 3951408 w 4495800"/>
+              <a:gd name="connsiteY336" fmla="*/ 162858 h 4495800"/>
+              <a:gd name="connsiteX337" fmla="*/ 3969925 w 4495800"/>
+              <a:gd name="connsiteY337" fmla="*/ 172231 h 4495800"/>
+              <a:gd name="connsiteX338" fmla="*/ 3988013 w 4495800"/>
+              <a:gd name="connsiteY338" fmla="*/ 181889 h 4495800"/>
+              <a:gd name="connsiteX339" fmla="*/ 4005682 w 4495800"/>
+              <a:gd name="connsiteY339" fmla="*/ 191843 h 4495800"/>
+              <a:gd name="connsiteX340" fmla="*/ 4022941 w 4495800"/>
+              <a:gd name="connsiteY340" fmla="*/ 202073 h 4495800"/>
+              <a:gd name="connsiteX341" fmla="*/ 4039800 w 4495800"/>
+              <a:gd name="connsiteY341" fmla="*/ 212598 h 4495800"/>
+              <a:gd name="connsiteX342" fmla="*/ 4056260 w 4495800"/>
+              <a:gd name="connsiteY342" fmla="*/ 223409 h 4495800"/>
+              <a:gd name="connsiteX343" fmla="*/ 4072347 w 4495800"/>
+              <a:gd name="connsiteY343" fmla="*/ 234525 h 4495800"/>
+              <a:gd name="connsiteX344" fmla="*/ 4088063 w 4495800"/>
+              <a:gd name="connsiteY344" fmla="*/ 245936 h 4495800"/>
+              <a:gd name="connsiteX345" fmla="*/ 4103408 w 4495800"/>
+              <a:gd name="connsiteY345" fmla="*/ 257651 h 4495800"/>
+              <a:gd name="connsiteX346" fmla="*/ 4118400 w 4495800"/>
+              <a:gd name="connsiteY346" fmla="*/ 269672 h 4495800"/>
+              <a:gd name="connsiteX347" fmla="*/ 4133041 w 4495800"/>
+              <a:gd name="connsiteY347" fmla="*/ 281997 h 4495800"/>
+              <a:gd name="connsiteX348" fmla="*/ 4147328 w 4495800"/>
+              <a:gd name="connsiteY348" fmla="*/ 294646 h 4495800"/>
+              <a:gd name="connsiteX349" fmla="*/ 4161282 w 4495800"/>
+              <a:gd name="connsiteY349" fmla="*/ 307610 h 4495800"/>
+              <a:gd name="connsiteX350" fmla="*/ 4174903 w 4495800"/>
+              <a:gd name="connsiteY350" fmla="*/ 320897 h 4495800"/>
+              <a:gd name="connsiteX351" fmla="*/ 4188190 w 4495800"/>
+              <a:gd name="connsiteY351" fmla="*/ 334518 h 4495800"/>
+              <a:gd name="connsiteX352" fmla="*/ 4201154 w 4495800"/>
+              <a:gd name="connsiteY352" fmla="*/ 348472 h 4495800"/>
+              <a:gd name="connsiteX353" fmla="*/ 4213803 w 4495800"/>
+              <a:gd name="connsiteY353" fmla="*/ 362760 h 4495800"/>
+              <a:gd name="connsiteX354" fmla="*/ 4226128 w 4495800"/>
+              <a:gd name="connsiteY354" fmla="*/ 377400 h 4495800"/>
+              <a:gd name="connsiteX355" fmla="*/ 4238149 w 4495800"/>
+              <a:gd name="connsiteY355" fmla="*/ 392392 h 4495800"/>
+              <a:gd name="connsiteX356" fmla="*/ 4249865 w 4495800"/>
+              <a:gd name="connsiteY356" fmla="*/ 407737 h 4495800"/>
+              <a:gd name="connsiteX357" fmla="*/ 4261276 w 4495800"/>
+              <a:gd name="connsiteY357" fmla="*/ 423453 h 4495800"/>
+              <a:gd name="connsiteX358" fmla="*/ 4272392 w 4495800"/>
+              <a:gd name="connsiteY358" fmla="*/ 439541 h 4495800"/>
+              <a:gd name="connsiteX359" fmla="*/ 4283202 w 4495800"/>
+              <a:gd name="connsiteY359" fmla="*/ 456000 h 4495800"/>
+              <a:gd name="connsiteX360" fmla="*/ 4293727 w 4495800"/>
+              <a:gd name="connsiteY360" fmla="*/ 472859 h 4495800"/>
+              <a:gd name="connsiteX361" fmla="*/ 4303957 w 4495800"/>
+              <a:gd name="connsiteY361" fmla="*/ 490118 h 4495800"/>
+              <a:gd name="connsiteX362" fmla="*/ 4313911 w 4495800"/>
+              <a:gd name="connsiteY362" fmla="*/ 507787 h 4495800"/>
+              <a:gd name="connsiteX363" fmla="*/ 4323569 w 4495800"/>
+              <a:gd name="connsiteY363" fmla="*/ 525875 h 4495800"/>
+              <a:gd name="connsiteX364" fmla="*/ 4332942 w 4495800"/>
+              <a:gd name="connsiteY364" fmla="*/ 544392 h 4495800"/>
+              <a:gd name="connsiteX365" fmla="*/ 4342038 w 4495800"/>
+              <a:gd name="connsiteY365" fmla="*/ 563356 h 4495800"/>
+              <a:gd name="connsiteX366" fmla="*/ 4350868 w 4495800"/>
+              <a:gd name="connsiteY366" fmla="*/ 582778 h 4495800"/>
+              <a:gd name="connsiteX367" fmla="*/ 4359412 w 4495800"/>
+              <a:gd name="connsiteY367" fmla="*/ 602675 h 4495800"/>
+              <a:gd name="connsiteX368" fmla="*/ 4367680 w 4495800"/>
+              <a:gd name="connsiteY368" fmla="*/ 623059 h 4495800"/>
+              <a:gd name="connsiteX369" fmla="*/ 4375681 w 4495800"/>
+              <a:gd name="connsiteY369" fmla="*/ 643947 h 4495800"/>
+              <a:gd name="connsiteX370" fmla="*/ 4383415 w 4495800"/>
+              <a:gd name="connsiteY370" fmla="*/ 665369 h 4495800"/>
+              <a:gd name="connsiteX371" fmla="*/ 4390873 w 4495800"/>
+              <a:gd name="connsiteY371" fmla="*/ 687324 h 4495800"/>
+              <a:gd name="connsiteX372" fmla="*/ 4398074 w 4495800"/>
+              <a:gd name="connsiteY372" fmla="*/ 709851 h 4495800"/>
+              <a:gd name="connsiteX373" fmla="*/ 4404999 w 4495800"/>
+              <a:gd name="connsiteY373" fmla="*/ 732968 h 4495800"/>
+              <a:gd name="connsiteX374" fmla="*/ 4411666 w 4495800"/>
+              <a:gd name="connsiteY374" fmla="*/ 756704 h 4495800"/>
+              <a:gd name="connsiteX375" fmla="*/ 4418076 w 4495800"/>
+              <a:gd name="connsiteY375" fmla="*/ 781098 h 4495800"/>
+              <a:gd name="connsiteX376" fmla="*/ 4424220 w 4495800"/>
+              <a:gd name="connsiteY376" fmla="*/ 806167 h 4495800"/>
+              <a:gd name="connsiteX377" fmla="*/ 4430106 w 4495800"/>
+              <a:gd name="connsiteY377" fmla="*/ 831952 h 4495800"/>
+              <a:gd name="connsiteX378" fmla="*/ 4435736 w 4495800"/>
+              <a:gd name="connsiteY378" fmla="*/ 858498 h 4495800"/>
+              <a:gd name="connsiteX379" fmla="*/ 4441108 w 4495800"/>
+              <a:gd name="connsiteY379" fmla="*/ 885854 h 4495800"/>
+              <a:gd name="connsiteX380" fmla="*/ 4446223 w 4495800"/>
+              <a:gd name="connsiteY380" fmla="*/ 914067 h 4495800"/>
+              <a:gd name="connsiteX381" fmla="*/ 4451080 w 4495800"/>
+              <a:gd name="connsiteY381" fmla="*/ 943194 h 4495800"/>
+              <a:gd name="connsiteX382" fmla="*/ 4455681 w 4495800"/>
+              <a:gd name="connsiteY382" fmla="*/ 973303 h 4495800"/>
+              <a:gd name="connsiteX383" fmla="*/ 4460034 w 4495800"/>
+              <a:gd name="connsiteY383" fmla="*/ 1004478 h 4495800"/>
+              <a:gd name="connsiteX384" fmla="*/ 4464130 w 4495800"/>
+              <a:gd name="connsiteY384" fmla="*/ 1036796 h 4495800"/>
+              <a:gd name="connsiteX385" fmla="*/ 4467978 w 4495800"/>
+              <a:gd name="connsiteY385" fmla="*/ 1070372 h 4495800"/>
+              <a:gd name="connsiteX386" fmla="*/ 4471578 w 4495800"/>
+              <a:gd name="connsiteY386" fmla="*/ 1105329 h 4495800"/>
+              <a:gd name="connsiteX387" fmla="*/ 4474922 w 4495800"/>
+              <a:gd name="connsiteY387" fmla="*/ 1141800 h 4495800"/>
+              <a:gd name="connsiteX388" fmla="*/ 4478017 w 4495800"/>
+              <a:gd name="connsiteY388" fmla="*/ 1179967 h 4495800"/>
+              <a:gd name="connsiteX389" fmla="*/ 4480865 w 4495800"/>
+              <a:gd name="connsiteY389" fmla="*/ 1220048 h 4495800"/>
+              <a:gd name="connsiteX390" fmla="*/ 4483456 w 4495800"/>
+              <a:gd name="connsiteY390" fmla="*/ 1262301 h 4495800"/>
+              <a:gd name="connsiteX391" fmla="*/ 4485808 w 4495800"/>
+              <a:gd name="connsiteY391" fmla="*/ 1307059 h 4495800"/>
+              <a:gd name="connsiteX392" fmla="*/ 4487904 w 4495800"/>
+              <a:gd name="connsiteY392" fmla="*/ 1354760 h 4495800"/>
+              <a:gd name="connsiteX393" fmla="*/ 4489761 w 4495800"/>
+              <a:gd name="connsiteY393" fmla="*/ 1405995 h 4495800"/>
+              <a:gd name="connsiteX394" fmla="*/ 4491362 w 4495800"/>
+              <a:gd name="connsiteY394" fmla="*/ 1461554 h 4495800"/>
+              <a:gd name="connsiteX395" fmla="*/ 4492714 w 4495800"/>
+              <a:gd name="connsiteY395" fmla="*/ 1522619 h 4495800"/>
+              <a:gd name="connsiteX396" fmla="*/ 4493829 w 4495800"/>
+              <a:gd name="connsiteY396" fmla="*/ 1590989 h 4495800"/>
+              <a:gd name="connsiteX397" fmla="*/ 4494695 w 4495800"/>
+              <a:gd name="connsiteY397" fmla="*/ 1669761 h 4495800"/>
+              <a:gd name="connsiteX398" fmla="*/ 4495305 w 4495800"/>
+              <a:gd name="connsiteY398" fmla="*/ 1765049 h 4495800"/>
+              <a:gd name="connsiteX399" fmla="*/ 4495676 w 4495800"/>
+              <a:gd name="connsiteY399" fmla="*/ 1893046 h 4495800"/>
+            </a:gdLst>
+            <a:ahLst/>
+            <a:cxnLst>
+              <a:cxn ang="0">
+                <a:pos x="connsiteX0" y="connsiteY0"/>
+              </a:cxn>
+              <a:cxn ang="0">
+                <a:pos x="connsiteX1" y="connsiteY1"/>
+              </a:cxn>
+              <a:cxn ang="0">
+                <a:pos x="connsiteX2" y="connsiteY2"/>
+              </a:cxn>
+              <a:cxn ang="0">
+                <a:pos x="connsiteX3" y="connsiteY3"/>
+              </a:cxn>
+              <a:cxn ang="0">
+                <a:pos x="connsiteX4" y="connsiteY4"/>
+              </a:cxn>
+              <a:cxn ang="0">
+                <a:pos x="connsiteX5" y="connsiteY5"/>
+              </a:cxn>
+              <a:cxn ang="0">
+                <a:pos x="connsiteX6" y="connsiteY6"/>
+              </a:cxn>
+              <a:cxn ang="0">
+                <a:pos x="connsiteX7" y="connsiteY7"/>
+              </a:cxn>
+              <a:cxn ang="0">
+                <a:pos x="connsiteX8" y="connsiteY8"/>
+              </a:cxn>
+              <a:cxn ang="0">
+                <a:pos x="connsiteX9" y="connsiteY9"/>
+              </a:cxn>
+              <a:cxn ang="0">
+                <a:pos x="connsiteX10" y="connsiteY10"/>
+              </a:cxn>
+              <a:cxn ang="0">
+                <a:pos x="connsiteX11" y="connsiteY11"/>
+              </a:cxn>
+              <a:cxn ang="0">
+                <a:pos x="connsiteX12" y="connsiteY12"/>
+              </a:cxn>
+              <a:cxn ang="0">
+                <a:pos x="connsiteX13" y="connsiteY13"/>
+              </a:cxn>
+              <a:cxn ang="0">
+                <a:pos x="connsiteX14" y="connsiteY14"/>
+              </a:cxn>
+              <a:cxn ang="0">
+                <a:pos x="connsiteX15" y="connsiteY15"/>
+              </a:cxn>
+              <a:cxn ang="0">
+                <a:pos x="connsiteX16" y="connsiteY16"/>
+              </a:cxn>
+              <a:cxn ang="0">
+                <a:pos x="connsiteX17" y="connsiteY17"/>
+              </a:cxn>
+              <a:cxn ang="0">
+                <a:pos x="connsiteX18" y="connsiteY18"/>
+              </a:cxn>
+              <a:cxn ang="0">
+                <a:pos x="connsiteX19" y="connsiteY19"/>
+              </a:cxn>
+              <a:cxn ang="0">
+                <a:pos x="connsiteX20" y="connsiteY20"/>
+              </a:cxn>
+              <a:cxn ang="0">
+                <a:pos x="connsiteX21" y="connsiteY21"/>
+              </a:cxn>
+              <a:cxn ang="0">
+                <a:pos x="connsiteX22" y="connsiteY22"/>
+              </a:cxn>
+              <a:cxn ang="0">
+                <a:pos x="connsiteX23" y="connsiteY23"/>
+              </a:cxn>
+              <a:cxn ang="0">
+                <a:pos x="connsiteX24" y="connsiteY24"/>
+              </a:cxn>
+              <a:cxn ang="0">
+                <a:pos x="connsiteX25" y="connsiteY25"/>
+              </a:cxn>
+              <a:cxn ang="0">
+                <a:pos x="connsiteX26" y="connsiteY26"/>
+              </a:cxn>
+              <a:cxn ang="0">
+                <a:pos x="connsiteX27" y="connsiteY27"/>
+              </a:cxn>
+              <a:cxn ang="0">
+                <a:pos x="connsiteX28" y="connsiteY28"/>
+              </a:cxn>
+              <a:cxn ang="0">
+                <a:pos x="connsiteX29" y="connsiteY29"/>
+              </a:cxn>
+              <a:cxn ang="0">
+                <a:pos x="connsiteX30" y="connsiteY30"/>
+              </a:cxn>
+              <a:cxn ang="0">
+                <a:pos x="connsiteX31" y="connsiteY31"/>
+              </a:cxn>
+              <a:cxn ang="0">
+                <a:pos x="connsiteX32" y="connsiteY32"/>
+              </a:cxn>
+              <a:cxn ang="0">
+                <a:pos x="connsiteX33" y="connsiteY33"/>
+              </a:cxn>
+              <a:cxn ang="0">
+                <a:pos x="connsiteX34" y="connsiteY34"/>
+              </a:cxn>
+              <a:cxn ang="0">
+                <a:pos x="connsiteX35" y="connsiteY35"/>
+              </a:cxn>
+              <a:cxn ang="0">
+                <a:pos x="connsiteX36" y="connsiteY36"/>
+              </a:cxn>
+              <a:cxn ang="0">
+                <a:pos x="connsiteX37" y="connsiteY37"/>
+              </a:cxn>
+              <a:cxn ang="0">
+                <a:pos x="connsiteX38" y="connsiteY38"/>
+              </a:cxn>
+              <a:cxn ang="0">
+                <a:pos x="connsiteX39" y="connsiteY39"/>
+              </a:cxn>
+              <a:cxn ang="0">
+                <a:pos x="connsiteX40" y="connsiteY40"/>
+              </a:cxn>
+              <a:cxn ang="0">
+                <a:pos x="connsiteX41" y="connsiteY41"/>
+              </a:cxn>
+              <a:cxn ang="0">
+                <a:pos x="connsiteX42" y="connsiteY42"/>
+              </a:cxn>
+              <a:cxn ang="0">
+                <a:pos x="connsiteX43" y="connsiteY43"/>
+              </a:cxn>
+              <a:cxn ang="0">
+                <a:pos x="connsiteX44" y="connsiteY44"/>
+              </a:cxn>
+              <a:cxn ang="0">
+                <a:pos x="connsiteX45" y="connsiteY45"/>
+              </a:cxn>
+              <a:cxn ang="0">
+                <a:pos x="connsiteX46" y="connsiteY46"/>
+              </a:cxn>
+              <a:cxn ang="0">
+                <a:pos x="connsiteX47" y="connsiteY47"/>
+              </a:cxn>
+              <a:cxn ang="0">
+                <a:pos x="connsiteX48" y="connsiteY48"/>
+              </a:cxn>
+              <a:cxn ang="0">
+                <a:pos x="connsiteX49" y="connsiteY49"/>
+              </a:cxn>
+              <a:cxn ang="0">
+                <a:pos x="connsiteX50" y="connsiteY50"/>
+              </a:cxn>
+              <a:cxn ang="0">
+                <a:pos x="connsiteX51" y="connsiteY51"/>
+              </a:cxn>
+              <a:cxn ang="0">
+                <a:pos x="connsiteX52" y="connsiteY52"/>
+              </a:cxn>
+              <a:cxn ang="0">
+                <a:pos x="connsiteX53" y="connsiteY53"/>
+              </a:cxn>
+              <a:cxn ang="0">
+                <a:pos x="connsiteX54" y="connsiteY54"/>
+              </a:cxn>
+              <a:cxn ang="0">
+                <a:pos x="connsiteX55" y="connsiteY55"/>
+              </a:cxn>
+              <a:cxn ang="0">
+                <a:pos x="connsiteX56" y="connsiteY56"/>
+              </a:cxn>
+              <a:cxn ang="0">
+                <a:pos x="connsiteX57" y="connsiteY57"/>
+              </a:cxn>
+              <a:cxn ang="0">
+                <a:pos x="connsiteX58" y="connsiteY58"/>
+              </a:cxn>
+              <a:cxn ang="0">
+                <a:pos x="connsiteX59" y="connsiteY59"/>
+              </a:cxn>
+              <a:cxn ang="0">
+                <a:pos x="connsiteX60" y="connsiteY60"/>
+              </a:cxn>
+              <a:cxn ang="0">
+                <a:pos x="connsiteX61" y="connsiteY61"/>
+              </a:cxn>
+              <a:cxn ang="0">
+                <a:pos x="connsiteX62" y="connsiteY62"/>
+              </a:cxn>
+              <a:cxn ang="0">
+                <a:pos x="connsiteX63" y="connsiteY63"/>
+              </a:cxn>
+              <a:cxn ang="0">
+                <a:pos x="connsiteX64" y="connsiteY64"/>
+              </a:cxn>
+              <a:cxn ang="0">
+                <a:pos x="connsiteX65" y="connsiteY65"/>
+              </a:cxn>
+              <a:cxn ang="0">
+                <a:pos x="connsiteX66" y="connsiteY66"/>
+              </a:cxn>
+              <a:cxn ang="0">
+                <a:pos x="connsiteX67" y="connsiteY67"/>
+              </a:cxn>
+              <a:cxn ang="0">
+                <a:pos x="connsiteX68" y="connsiteY68"/>
+              </a:cxn>
+              <a:cxn ang="0">
+                <a:pos x="connsiteX69" y="connsiteY69"/>
+              </a:cxn>
+              <a:cxn ang="0">
+                <a:pos x="connsiteX70" y="connsiteY70"/>
+              </a:cxn>
+              <a:cxn ang="0">
+                <a:pos x="connsiteX71" y="connsiteY71"/>
+              </a:cxn>
+              <a:cxn ang="0">
+                <a:pos x="connsiteX72" y="connsiteY72"/>
+              </a:cxn>
+              <a:cxn ang="0">
+                <a:pos x="connsiteX73" y="connsiteY73"/>
+              </a:cxn>
+              <a:cxn ang="0">
+                <a:pos x="connsiteX74" y="connsiteY74"/>
+              </a:cxn>
+              <a:cxn ang="0">
+                <a:pos x="connsiteX75" y="connsiteY75"/>
+              </a:cxn>
+              <a:cxn ang="0">
+                <a:pos x="connsiteX76" y="connsiteY76"/>
+              </a:cxn>
+              <a:cxn ang="0">
+                <a:pos x="connsiteX77" y="connsiteY77"/>
+              </a:cxn>
+              <a:cxn ang="0">
+                <a:pos x="connsiteX78" y="connsiteY78"/>
+              </a:cxn>
+              <a:cxn ang="0">
+                <a:pos x="connsiteX79" y="connsiteY79"/>
+              </a:cxn>
+              <a:cxn ang="0">
+                <a:pos x="connsiteX80" y="connsiteY80"/>
+              </a:cxn>
+              <a:cxn ang="0">
+                <a:pos x="connsiteX81" y="connsiteY81"/>
+              </a:cxn>
+              <a:cxn ang="0">
+                <a:pos x="connsiteX82" y="connsiteY82"/>
+              </a:cxn>
+              <a:cxn ang="0">
+                <a:pos x="connsiteX83" y="connsiteY83"/>
+              </a:cxn>
+              <a:cxn ang="0">
+                <a:pos x="connsiteX84" y="connsiteY84"/>
+              </a:cxn>
+              <a:cxn ang="0">
+                <a:pos x="connsiteX85" y="connsiteY85"/>
+              </a:cxn>
+              <a:cxn ang="0">
+                <a:pos x="connsiteX86" y="connsiteY86"/>
+              </a:cxn>
+              <a:cxn ang="0">
+                <a:pos x="connsiteX87" y="connsiteY87"/>
+              </a:cxn>
+              <a:cxn ang="0">
+                <a:pos x="connsiteX88" y="connsiteY88"/>
+              </a:cxn>
+              <a:cxn ang="0">
+                <a:pos x="connsiteX89" y="connsiteY89"/>
+              </a:cxn>
+              <a:cxn ang="0">
+                <a:pos x="connsiteX90" y="connsiteY90"/>
+              </a:cxn>
+              <a:cxn ang="0">
+                <a:pos x="connsiteX91" y="connsiteY91"/>
+              </a:cxn>
+              <a:cxn ang="0">
+                <a:pos x="connsiteX92" y="connsiteY92"/>
+              </a:cxn>
+              <a:cxn ang="0">
+                <a:pos x="connsiteX93" y="connsiteY93"/>
+              </a:cxn>
+              <a:cxn ang="0">
+                <a:pos x="connsiteX94" y="connsiteY94"/>
+              </a:cxn>
+              <a:cxn ang="0">
+                <a:pos x="connsiteX95" y="connsiteY95"/>
+              </a:cxn>
+              <a:cxn ang="0">
+                <a:pos x="connsiteX96" y="connsiteY96"/>
+              </a:cxn>
+              <a:cxn ang="0">
+                <a:pos x="connsiteX97" y="connsiteY97"/>
+              </a:cxn>
+              <a:cxn ang="0">
+                <a:pos x="connsiteX98" y="connsiteY98"/>
+              </a:cxn>
+              <a:cxn ang="0">
+                <a:pos x="connsiteX99" y="connsiteY99"/>
+              </a:cxn>
+              <a:cxn ang="0">
+                <a:pos x="connsiteX100" y="connsiteY100"/>
+              </a:cxn>
+              <a:cxn ang="0">
+                <a:pos x="connsiteX101" y="connsiteY101"/>
+              </a:cxn>
+              <a:cxn ang="0">
+                <a:pos x="connsiteX102" y="connsiteY102"/>
+              </a:cxn>
+              <a:cxn ang="0">
+                <a:pos x="connsiteX103" y="connsiteY103"/>
+              </a:cxn>
+              <a:cxn ang="0">
+                <a:pos x="connsiteX104" y="connsiteY104"/>
+              </a:cxn>
+              <a:cxn ang="0">
+                <a:pos x="connsiteX105" y="connsiteY105"/>
+              </a:cxn>
+              <a:cxn ang="0">
+                <a:pos x="connsiteX106" y="connsiteY106"/>
+              </a:cxn>
+              <a:cxn ang="0">
+                <a:pos x="connsiteX107" y="connsiteY107"/>
+              </a:cxn>
+              <a:cxn ang="0">
+                <a:pos x="connsiteX108" y="connsiteY108"/>
+              </a:cxn>
+              <a:cxn ang="0">
+                <a:pos x="connsiteX109" y="connsiteY109"/>
+              </a:cxn>
+              <a:cxn ang="0">
+                <a:pos x="connsiteX110" y="connsiteY110"/>
+              </a:cxn>
+              <a:cxn ang="0">
+                <a:pos x="connsiteX111" y="connsiteY111"/>
+              </a:cxn>
+              <a:cxn ang="0">
+                <a:pos x="connsiteX112" y="connsiteY112"/>
+              </a:cxn>
+              <a:cxn ang="0">
+                <a:pos x="connsiteX113" y="connsiteY113"/>
+              </a:cxn>
+              <a:cxn ang="0">
+                <a:pos x="connsiteX114" y="connsiteY114"/>
+              </a:cxn>
+              <a:cxn ang="0">
+                <a:pos x="connsiteX115" y="connsiteY115"/>
+              </a:cxn>
+              <a:cxn ang="0">
+                <a:pos x="connsiteX116" y="connsiteY116"/>
+              </a:cxn>
+              <a:cxn ang="0">
+                <a:pos x="connsiteX117" y="connsiteY117"/>
+              </a:cxn>
+              <a:cxn ang="0">
+                <a:pos x="connsiteX118" y="connsiteY118"/>
+              </a:cxn>
+              <a:cxn ang="0">
+                <a:pos x="connsiteX119" y="connsiteY119"/>
+              </a:cxn>
+              <a:cxn ang="0">
+                <a:pos x="connsiteX120" y="connsiteY120"/>
+              </a:cxn>
+              <a:cxn ang="0">
+                <a:pos x="connsiteX121" y="connsiteY121"/>
+              </a:cxn>
+              <a:cxn ang="0">
+                <a:pos x="connsiteX122" y="connsiteY122"/>
+              </a:cxn>
+              <a:cxn ang="0">
+                <a:pos x="connsiteX123" y="connsiteY123"/>
+              </a:cxn>
+              <a:cxn ang="0">
+                <a:pos x="connsiteX124" y="connsiteY124"/>
+              </a:cxn>
+              <a:cxn ang="0">
+                <a:pos x="connsiteX125" y="connsiteY125"/>
+              </a:cxn>
+              <a:cxn ang="0">
+                <a:pos x="connsiteX126" y="connsiteY126"/>
+              </a:cxn>
+              <a:cxn ang="0">
+                <a:pos x="connsiteX127" y="connsiteY127"/>
+              </a:cxn>
+              <a:cxn ang="0">
+                <a:pos x="connsiteX128" y="connsiteY128"/>
+              </a:cxn>
+              <a:cxn ang="0">
+                <a:pos x="connsiteX129" y="connsiteY129"/>
+              </a:cxn>
+              <a:cxn ang="0">
+                <a:pos x="connsiteX130" y="connsiteY130"/>
+              </a:cxn>
+              <a:cxn ang="0">
+                <a:pos x="connsiteX131" y="connsiteY131"/>
+              </a:cxn>
+              <a:cxn ang="0">
+                <a:pos x="connsiteX132" y="connsiteY132"/>
+              </a:cxn>
+              <a:cxn ang="0">
+                <a:pos x="connsiteX133" y="connsiteY133"/>
+              </a:cxn>
+              <a:cxn ang="0">
+                <a:pos x="connsiteX134" y="connsiteY134"/>
+              </a:cxn>
+              <a:cxn ang="0">
+                <a:pos x="connsiteX135" y="connsiteY135"/>
+              </a:cxn>
+              <a:cxn ang="0">
+                <a:pos x="connsiteX136" y="connsiteY136"/>
+              </a:cxn>
+              <a:cxn ang="0">
+                <a:pos x="connsiteX137" y="connsiteY137"/>
+              </a:cxn>
+              <a:cxn ang="0">
+                <a:pos x="connsiteX138" y="connsiteY138"/>
+              </a:cxn>
+              <a:cxn ang="0">
+                <a:pos x="connsiteX139" y="connsiteY139"/>
+              </a:cxn>
+              <a:cxn ang="0">
+                <a:pos x="connsiteX140" y="connsiteY140"/>
+              </a:cxn>
+              <a:cxn ang="0">
+                <a:pos x="connsiteX141" y="connsiteY141"/>
+              </a:cxn>
+              <a:cxn ang="0">
+                <a:pos x="connsiteX142" y="connsiteY142"/>
+              </a:cxn>
+              <a:cxn ang="0">
+                <a:pos x="connsiteX143" y="connsiteY143"/>
+              </a:cxn>
+              <a:cxn ang="0">
+                <a:pos x="connsiteX144" y="connsiteY144"/>
+              </a:cxn>
+              <a:cxn ang="0">
+                <a:pos x="connsiteX145" y="connsiteY145"/>
+              </a:cxn>
+              <a:cxn ang="0">
+                <a:pos x="connsiteX146" y="connsiteY146"/>
+              </a:cxn>
+              <a:cxn ang="0">
+                <a:pos x="connsiteX147" y="connsiteY147"/>
+              </a:cxn>
+              <a:cxn ang="0">
+                <a:pos x="connsiteX148" y="connsiteY148"/>
+              </a:cxn>
+              <a:cxn ang="0">
+                <a:pos x="connsiteX149" y="connsiteY149"/>
+              </a:cxn>
+              <a:cxn ang="0">
+                <a:pos x="connsiteX150" y="connsiteY150"/>
+              </a:cxn>
+              <a:cxn ang="0">
+                <a:pos x="connsiteX151" y="connsiteY151"/>
+              </a:cxn>
+              <a:cxn ang="0">
+                <a:pos x="connsiteX152" y="connsiteY152"/>
+              </a:cxn>
+              <a:cxn ang="0">
+                <a:pos x="connsiteX153" y="connsiteY153"/>
+              </a:cxn>
+              <a:cxn ang="0">
+                <a:pos x="connsiteX154" y="connsiteY154"/>
+              </a:cxn>
+              <a:cxn ang="0">
+                <a:pos x="connsiteX155" y="connsiteY155"/>
+              </a:cxn>
+              <a:cxn ang="0">
+                <a:pos x="connsiteX156" y="connsiteY156"/>
+              </a:cxn>
+              <a:cxn ang="0">
+                <a:pos x="connsiteX157" y="connsiteY157"/>
+              </a:cxn>
+              <a:cxn ang="0">
+                <a:pos x="connsiteX158" y="connsiteY158"/>
+              </a:cxn>
+              <a:cxn ang="0">
+                <a:pos x="connsiteX159" y="connsiteY159"/>
+              </a:cxn>
+              <a:cxn ang="0">
+                <a:pos x="connsiteX160" y="connsiteY160"/>
+              </a:cxn>
+              <a:cxn ang="0">
+                <a:pos x="connsiteX161" y="connsiteY161"/>
+              </a:cxn>
+              <a:cxn ang="0">
+                <a:pos x="connsiteX162" y="connsiteY162"/>
+              </a:cxn>
+              <a:cxn ang="0">
+                <a:pos x="connsiteX163" y="connsiteY163"/>
+              </a:cxn>
+              <a:cxn ang="0">
+                <a:pos x="connsiteX164" y="connsiteY164"/>
+              </a:cxn>
+              <a:cxn ang="0">
+                <a:pos x="connsiteX165" y="connsiteY165"/>
+              </a:cxn>
+              <a:cxn ang="0">
+                <a:pos x="connsiteX166" y="connsiteY166"/>
+              </a:cxn>
+              <a:cxn ang="0">
+                <a:pos x="connsiteX167" y="connsiteY167"/>
+              </a:cxn>
+              <a:cxn ang="0">
+                <a:pos x="connsiteX168" y="connsiteY168"/>
+              </a:cxn>
+              <a:cxn ang="0">
+                <a:pos x="connsiteX169" y="connsiteY169"/>
+              </a:cxn>
+              <a:cxn ang="0">
+                <a:pos x="connsiteX170" y="connsiteY170"/>
+              </a:cxn>
+              <a:cxn ang="0">
+                <a:pos x="connsiteX171" y="connsiteY171"/>
+              </a:cxn>
+              <a:cxn ang="0">
+                <a:pos x="connsiteX172" y="connsiteY172"/>
+              </a:cxn>
+              <a:cxn ang="0">
+                <a:pos x="connsiteX173" y="connsiteY173"/>
+              </a:cxn>
+              <a:cxn ang="0">
+                <a:pos x="connsiteX174" y="connsiteY174"/>
+              </a:cxn>
+              <a:cxn ang="0">
+                <a:pos x="connsiteX175" y="connsiteY175"/>
+              </a:cxn>
+              <a:cxn ang="0">
+                <a:pos x="connsiteX176" y="connsiteY176"/>
+              </a:cxn>
+              <a:cxn ang="0">
+                <a:pos x="connsiteX177" y="connsiteY177"/>
+              </a:cxn>
+              <a:cxn ang="0">
+                <a:pos x="connsiteX178" y="connsiteY178"/>
+              </a:cxn>
+              <a:cxn ang="0">
+                <a:pos x="connsiteX179" y="connsiteY179"/>
+              </a:cxn>
+              <a:cxn ang="0">
+                <a:pos x="connsiteX180" y="connsiteY180"/>
+              </a:cxn>
+              <a:cxn ang="0">
+                <a:pos x="connsiteX181" y="connsiteY181"/>
+              </a:cxn>
+              <a:cxn ang="0">
+                <a:pos x="connsiteX182" y="connsiteY182"/>
+              </a:cxn>
+              <a:cxn ang="0">
+                <a:pos x="connsiteX183" y="connsiteY183"/>
+              </a:cxn>
+              <a:cxn ang="0">
+                <a:pos x="connsiteX184" y="connsiteY184"/>
+              </a:cxn>
+              <a:cxn ang="0">
+                <a:pos x="connsiteX185" y="connsiteY185"/>
+              </a:cxn>
+              <a:cxn ang="0">
+                <a:pos x="connsiteX186" y="connsiteY186"/>
+              </a:cxn>
+              <a:cxn ang="0">
+                <a:pos x="connsiteX187" y="connsiteY187"/>
+              </a:cxn>
+              <a:cxn ang="0">
+                <a:pos x="connsiteX188" y="connsiteY188"/>
+              </a:cxn>
+              <a:cxn ang="0">
+                <a:pos x="connsiteX189" y="connsiteY189"/>
+              </a:cxn>
+              <a:cxn ang="0">
+                <a:pos x="connsiteX190" y="connsiteY190"/>
+              </a:cxn>
+              <a:cxn ang="0">
+                <a:pos x="connsiteX191" y="connsiteY191"/>
+              </a:cxn>
+              <a:cxn ang="0">
+                <a:pos x="connsiteX192" y="connsiteY192"/>
+              </a:cxn>
+              <a:cxn ang="0">
+                <a:pos x="connsiteX193" y="connsiteY193"/>
+              </a:cxn>
+              <a:cxn ang="0">
+                <a:pos x="connsiteX194" y="connsiteY194"/>
+              </a:cxn>
+              <a:cxn ang="0">
+                <a:pos x="connsiteX195" y="connsiteY195"/>
+              </a:cxn>
+              <a:cxn ang="0">
+                <a:pos x="connsiteX196" y="connsiteY196"/>
+              </a:cxn>
+              <a:cxn ang="0">
+                <a:pos x="connsiteX197" y="connsiteY197"/>
+              </a:cxn>
+              <a:cxn ang="0">
+                <a:pos x="connsiteX198" y="connsiteY198"/>
+              </a:cxn>
+              <a:cxn ang="0">
+                <a:pos x="connsiteX199" y="connsiteY199"/>
+              </a:cxn>
+              <a:cxn ang="0">
+                <a:pos x="connsiteX200" y="connsiteY200"/>
+              </a:cxn>
+              <a:cxn ang="0">
+                <a:pos x="connsiteX201" y="connsiteY201"/>
+              </a:cxn>
+              <a:cxn ang="0">
+                <a:pos x="connsiteX202" y="connsiteY202"/>
+              </a:cxn>
+              <a:cxn ang="0">
+                <a:pos x="connsiteX203" y="connsiteY203"/>
+              </a:cxn>
+              <a:cxn ang="0">
+                <a:pos x="connsiteX204" y="connsiteY204"/>
+              </a:cxn>
+              <a:cxn ang="0">
+                <a:pos x="connsiteX205" y="connsiteY205"/>
+              </a:cxn>
+              <a:cxn ang="0">
+                <a:pos x="connsiteX206" y="connsiteY206"/>
+              </a:cxn>
+              <a:cxn ang="0">
+                <a:pos x="connsiteX207" y="connsiteY207"/>
+              </a:cxn>
+              <a:cxn ang="0">
+                <a:pos x="connsiteX208" y="connsiteY208"/>
+              </a:cxn>
+              <a:cxn ang="0">
+                <a:pos x="connsiteX209" y="connsiteY209"/>
+              </a:cxn>
+              <a:cxn ang="0">
+                <a:pos x="connsiteX210" y="connsiteY210"/>
+              </a:cxn>
+              <a:cxn ang="0">
+                <a:pos x="connsiteX211" y="connsiteY211"/>
+              </a:cxn>
+              <a:cxn ang="0">
+                <a:pos x="connsiteX212" y="connsiteY212"/>
+              </a:cxn>
+              <a:cxn ang="0">
+                <a:pos x="connsiteX213" y="connsiteY213"/>
+              </a:cxn>
+              <a:cxn ang="0">
+                <a:pos x="connsiteX214" y="connsiteY214"/>
+              </a:cxn>
+              <a:cxn ang="0">
+                <a:pos x="connsiteX215" y="connsiteY215"/>
+              </a:cxn>
+              <a:cxn ang="0">
+                <a:pos x="connsiteX216" y="connsiteY216"/>
+              </a:cxn>
+              <a:cxn ang="0">
+                <a:pos x="connsiteX217" y="connsiteY217"/>
+              </a:cxn>
+              <a:cxn ang="0">
+                <a:pos x="connsiteX218" y="connsiteY218"/>
+              </a:cxn>
+              <a:cxn ang="0">
+                <a:pos x="connsiteX219" y="connsiteY219"/>
+              </a:cxn>
+              <a:cxn ang="0">
+                <a:pos x="connsiteX220" y="connsiteY220"/>
+              </a:cxn>
+              <a:cxn ang="0">
+                <a:pos x="connsiteX221" y="connsiteY221"/>
+              </a:cxn>
+              <a:cxn ang="0">
+                <a:pos x="connsiteX222" y="connsiteY222"/>
+              </a:cxn>
+              <a:cxn ang="0">
+                <a:pos x="connsiteX223" y="connsiteY223"/>
+              </a:cxn>
+              <a:cxn ang="0">
+                <a:pos x="connsiteX224" y="connsiteY224"/>
+              </a:cxn>
+              <a:cxn ang="0">
+                <a:pos x="connsiteX225" y="connsiteY225"/>
+              </a:cxn>
+              <a:cxn ang="0">
+                <a:pos x="connsiteX226" y="connsiteY226"/>
+              </a:cxn>
+              <a:cxn ang="0">
+                <a:pos x="connsiteX227" y="connsiteY227"/>
+              </a:cxn>
+              <a:cxn ang="0">
+                <a:pos x="connsiteX228" y="connsiteY228"/>
+              </a:cxn>
+              <a:cxn ang="0">
+                <a:pos x="connsiteX229" y="connsiteY229"/>
+              </a:cxn>
+              <a:cxn ang="0">
+                <a:pos x="connsiteX230" y="connsiteY230"/>
+              </a:cxn>
+              <a:cxn ang="0">
+                <a:pos x="connsiteX231" y="connsiteY231"/>
+              </a:cxn>
+              <a:cxn ang="0">
+                <a:pos x="connsiteX232" y="connsiteY232"/>
+              </a:cxn>
+              <a:cxn ang="0">
+                <a:pos x="connsiteX233" y="connsiteY233"/>
+              </a:cxn>
+              <a:cxn ang="0">
+                <a:pos x="connsiteX234" y="connsiteY234"/>
+              </a:cxn>
+              <a:cxn ang="0">
+                <a:pos x="connsiteX235" y="connsiteY235"/>
+              </a:cxn>
+              <a:cxn ang="0">
+                <a:pos x="connsiteX236" y="connsiteY236"/>
+              </a:cxn>
+              <a:cxn ang="0">
+                <a:pos x="connsiteX237" y="connsiteY237"/>
+              </a:cxn>
+              <a:cxn ang="0">
+                <a:pos x="connsiteX238" y="connsiteY238"/>
+              </a:cxn>
+              <a:cxn ang="0">
+                <a:pos x="connsiteX239" y="connsiteY239"/>
+              </a:cxn>
+              <a:cxn ang="0">
+                <a:pos x="connsiteX240" y="connsiteY240"/>
+              </a:cxn>
+              <a:cxn ang="0">
+                <a:pos x="connsiteX241" y="connsiteY241"/>
+              </a:cxn>
+              <a:cxn ang="0">
+                <a:pos x="connsiteX242" y="connsiteY242"/>
+              </a:cxn>
+              <a:cxn ang="0">
+                <a:pos x="connsiteX243" y="connsiteY243"/>
+              </a:cxn>
+              <a:cxn ang="0">
+                <a:pos x="connsiteX244" y="connsiteY244"/>
+              </a:cxn>
+              <a:cxn ang="0">
+                <a:pos x="connsiteX245" y="connsiteY245"/>
+              </a:cxn>
+              <a:cxn ang="0">
+                <a:pos x="connsiteX246" y="connsiteY246"/>
+              </a:cxn>
+              <a:cxn ang="0">
+                <a:pos x="connsiteX247" y="connsiteY247"/>
+              </a:cxn>
+              <a:cxn ang="0">
+                <a:pos x="connsiteX248" y="connsiteY248"/>
+              </a:cxn>
+              <a:cxn ang="0">
+                <a:pos x="connsiteX249" y="connsiteY249"/>
+              </a:cxn>
+              <a:cxn ang="0">
+                <a:pos x="connsiteX250" y="connsiteY250"/>
+              </a:cxn>
+              <a:cxn ang="0">
+                <a:pos x="connsiteX251" y="connsiteY251"/>
+              </a:cxn>
+              <a:cxn ang="0">
+                <a:pos x="connsiteX252" y="connsiteY252"/>
+              </a:cxn>
+              <a:cxn ang="0">
+                <a:pos x="connsiteX253" y="connsiteY253"/>
+              </a:cxn>
+              <a:cxn ang="0">
+                <a:pos x="connsiteX254" y="connsiteY254"/>
+              </a:cxn>
+              <a:cxn ang="0">
+                <a:pos x="connsiteX255" y="connsiteY255"/>
+              </a:cxn>
+              <a:cxn ang="0">
+                <a:pos x="connsiteX256" y="connsiteY256"/>
+              </a:cxn>
+              <a:cxn ang="0">
+                <a:pos x="connsiteX257" y="connsiteY257"/>
+              </a:cxn>
+              <a:cxn ang="0">
+                <a:pos x="connsiteX258" y="connsiteY258"/>
+              </a:cxn>
+              <a:cxn ang="0">
+                <a:pos x="connsiteX259" y="connsiteY259"/>
+              </a:cxn>
+              <a:cxn ang="0">
+                <a:pos x="connsiteX260" y="connsiteY260"/>
+              </a:cxn>
+              <a:cxn ang="0">
+                <a:pos x="connsiteX261" y="connsiteY261"/>
+              </a:cxn>
+              <a:cxn ang="0">
+                <a:pos x="connsiteX262" y="connsiteY262"/>
+              </a:cxn>
+              <a:cxn ang="0">
+                <a:pos x="connsiteX263" y="connsiteY263"/>
+              </a:cxn>
+              <a:cxn ang="0">
+                <a:pos x="connsiteX264" y="connsiteY264"/>
+              </a:cxn>
+              <a:cxn ang="0">
+                <a:pos x="connsiteX265" y="connsiteY265"/>
+              </a:cxn>
+              <a:cxn ang="0">
+                <a:pos x="connsiteX266" y="connsiteY266"/>
+              </a:cxn>
+              <a:cxn ang="0">
+                <a:pos x="connsiteX267" y="connsiteY267"/>
+              </a:cxn>
+              <a:cxn ang="0">
+                <a:pos x="connsiteX268" y="connsiteY268"/>
+              </a:cxn>
+              <a:cxn ang="0">
+                <a:pos x="connsiteX269" y="connsiteY269"/>
+              </a:cxn>
+              <a:cxn ang="0">
+                <a:pos x="connsiteX270" y="connsiteY270"/>
+              </a:cxn>
+              <a:cxn ang="0">
+                <a:pos x="connsiteX271" y="connsiteY271"/>
+              </a:cxn>
+              <a:cxn ang="0">
+                <a:pos x="connsiteX272" y="connsiteY272"/>
+              </a:cxn>
+              <a:cxn ang="0">
+                <a:pos x="connsiteX273" y="connsiteY273"/>
+              </a:cxn>
+              <a:cxn ang="0">
+                <a:pos x="connsiteX274" y="connsiteY274"/>
+              </a:cxn>
+              <a:cxn ang="0">
+                <a:pos x="connsiteX275" y="connsiteY275"/>
+              </a:cxn>
+              <a:cxn ang="0">
+                <a:pos x="connsiteX276" y="connsiteY276"/>
+              </a:cxn>
+              <a:cxn ang="0">
+                <a:pos x="connsiteX277" y="connsiteY277"/>
+              </a:cxn>
+              <a:cxn ang="0">
+                <a:pos x="connsiteX278" y="connsiteY278"/>
+              </a:cxn>
+              <a:cxn ang="0">
+                <a:pos x="connsiteX279" y="connsiteY279"/>
+              </a:cxn>
+              <a:cxn ang="0">
+                <a:pos x="connsiteX280" y="connsiteY280"/>
+              </a:cxn>
+              <a:cxn ang="0">
+                <a:pos x="connsiteX281" y="connsiteY281"/>
+              </a:cxn>
+              <a:cxn ang="0">
+                <a:pos x="connsiteX282" y="connsiteY282"/>
+              </a:cxn>
+              <a:cxn ang="0">
+                <a:pos x="connsiteX283" y="connsiteY283"/>
+              </a:cxn>
+              <a:cxn ang="0">
+                <a:pos x="connsiteX284" y="connsiteY284"/>
+              </a:cxn>
+              <a:cxn ang="0">
+                <a:pos x="connsiteX285" y="connsiteY285"/>
+              </a:cxn>
+              <a:cxn ang="0">
+                <a:pos x="connsiteX286" y="connsiteY286"/>
+              </a:cxn>
+              <a:cxn ang="0">
+                <a:pos x="connsiteX287" y="connsiteY287"/>
+              </a:cxn>
+              <a:cxn ang="0">
+                <a:pos x="connsiteX288" y="connsiteY288"/>
+              </a:cxn>
+              <a:cxn ang="0">
+                <a:pos x="connsiteX289" y="connsiteY289"/>
+              </a:cxn>
+              <a:cxn ang="0">
+                <a:pos x="connsiteX290" y="connsiteY290"/>
+              </a:cxn>
+              <a:cxn ang="0">
+                <a:pos x="connsiteX291" y="connsiteY291"/>
+              </a:cxn>
+              <a:cxn ang="0">
+                <a:pos x="connsiteX292" y="connsiteY292"/>
+              </a:cxn>
+              <a:cxn ang="0">
+                <a:pos x="connsiteX293" y="connsiteY293"/>
+              </a:cxn>
+              <a:cxn ang="0">
+                <a:pos x="connsiteX294" y="connsiteY294"/>
+              </a:cxn>
+              <a:cxn ang="0">
+                <a:pos x="connsiteX295" y="connsiteY295"/>
+              </a:cxn>
+              <a:cxn ang="0">
+                <a:pos x="connsiteX296" y="connsiteY296"/>
+              </a:cxn>
+              <a:cxn ang="0">
+                <a:pos x="connsiteX297" y="connsiteY297"/>
+              </a:cxn>
+              <a:cxn ang="0">
+                <a:pos x="connsiteX298" y="connsiteY298"/>
+              </a:cxn>
+              <a:cxn ang="0">
+                <a:pos x="connsiteX299" y="connsiteY299"/>
+              </a:cxn>
+              <a:cxn ang="0">
+                <a:pos x="connsiteX300" y="connsiteY300"/>
+              </a:cxn>
+              <a:cxn ang="0">
+                <a:pos x="connsiteX301" y="connsiteY301"/>
+              </a:cxn>
+              <a:cxn ang="0">
+                <a:pos x="connsiteX302" y="connsiteY302"/>
+              </a:cxn>
+              <a:cxn ang="0">
+                <a:pos x="connsiteX303" y="connsiteY303"/>
+              </a:cxn>
+              <a:cxn ang="0">
+                <a:pos x="connsiteX304" y="connsiteY304"/>
+              </a:cxn>
+              <a:cxn ang="0">
+                <a:pos x="connsiteX305" y="connsiteY305"/>
+              </a:cxn>
+              <a:cxn ang="0">
+                <a:pos x="connsiteX306" y="connsiteY306"/>
+              </a:cxn>
+              <a:cxn ang="0">
+                <a:pos x="connsiteX307" y="connsiteY307"/>
+              </a:cxn>
+              <a:cxn ang="0">
+                <a:pos x="connsiteX308" y="connsiteY308"/>
+              </a:cxn>
+              <a:cxn ang="0">
+                <a:pos x="connsiteX309" y="connsiteY309"/>
+              </a:cxn>
+              <a:cxn ang="0">
+                <a:pos x="connsiteX310" y="connsiteY310"/>
+              </a:cxn>
+              <a:cxn ang="0">
+                <a:pos x="connsiteX311" y="connsiteY311"/>
+              </a:cxn>
+              <a:cxn ang="0">
+                <a:pos x="connsiteX312" y="connsiteY312"/>
+              </a:cxn>
+              <a:cxn ang="0">
+                <a:pos x="connsiteX313" y="connsiteY313"/>
+              </a:cxn>
+              <a:cxn ang="0">
+                <a:pos x="connsiteX314" y="connsiteY314"/>
+              </a:cxn>
+              <a:cxn ang="0">
+                <a:pos x="connsiteX315" y="connsiteY315"/>
+              </a:cxn>
+              <a:cxn ang="0">
+                <a:pos x="connsiteX316" y="connsiteY316"/>
+              </a:cxn>
+              <a:cxn ang="0">
+                <a:pos x="connsiteX317" y="connsiteY317"/>
+              </a:cxn>
+              <a:cxn ang="0">
+                <a:pos x="connsiteX318" y="connsiteY318"/>
+              </a:cxn>
+              <a:cxn ang="0">
+                <a:pos x="connsiteX319" y="connsiteY319"/>
+              </a:cxn>
+              <a:cxn ang="0">
+                <a:pos x="connsiteX320" y="connsiteY320"/>
+              </a:cxn>
+              <a:cxn ang="0">
+                <a:pos x="connsiteX321" y="connsiteY321"/>
+              </a:cxn>
+              <a:cxn ang="0">
+                <a:pos x="connsiteX322" y="connsiteY322"/>
+              </a:cxn>
+              <a:cxn ang="0">
+                <a:pos x="connsiteX323" y="connsiteY323"/>
+              </a:cxn>
+              <a:cxn ang="0">
+                <a:pos x="connsiteX324" y="connsiteY324"/>
+              </a:cxn>
+              <a:cxn ang="0">
+                <a:pos x="connsiteX325" y="connsiteY325"/>
+              </a:cxn>
+              <a:cxn ang="0">
+                <a:pos x="connsiteX326" y="connsiteY326"/>
+              </a:cxn>
+              <a:cxn ang="0">
+                <a:pos x="connsiteX327" y="connsiteY327"/>
+              </a:cxn>
+              <a:cxn ang="0">
+                <a:pos x="connsiteX328" y="connsiteY328"/>
+              </a:cxn>
+              <a:cxn ang="0">
+                <a:pos x="connsiteX329" y="connsiteY329"/>
+              </a:cxn>
+              <a:cxn ang="0">
+                <a:pos x="connsiteX330" y="connsiteY330"/>
+              </a:cxn>
+              <a:cxn ang="0">
+                <a:pos x="connsiteX331" y="connsiteY331"/>
+              </a:cxn>
+              <a:cxn ang="0">
+                <a:pos x="connsiteX332" y="connsiteY332"/>
+              </a:cxn>
+              <a:cxn ang="0">
+                <a:pos x="connsiteX333" y="connsiteY333"/>
+              </a:cxn>
+              <a:cxn ang="0">
+                <a:pos x="connsiteX334" y="connsiteY334"/>
+              </a:cxn>
+              <a:cxn ang="0">
+                <a:pos x="connsiteX335" y="connsiteY335"/>
+              </a:cxn>
+              <a:cxn ang="0">
+                <a:pos x="connsiteX336" y="connsiteY336"/>
+              </a:cxn>
+              <a:cxn ang="0">
+                <a:pos x="connsiteX337" y="connsiteY337"/>
+              </a:cxn>
+              <a:cxn ang="0">
+                <a:pos x="connsiteX338" y="connsiteY338"/>
+              </a:cxn>
+              <a:cxn ang="0">
+                <a:pos x="connsiteX339" y="connsiteY339"/>
+              </a:cxn>
+              <a:cxn ang="0">
+                <a:pos x="connsiteX340" y="connsiteY340"/>
+              </a:cxn>
+              <a:cxn ang="0">
+                <a:pos x="connsiteX341" y="connsiteY341"/>
+              </a:cxn>
+              <a:cxn ang="0">
+                <a:pos x="connsiteX342" y="connsiteY342"/>
+              </a:cxn>
+              <a:cxn ang="0">
+                <a:pos x="connsiteX343" y="connsiteY343"/>
+              </a:cxn>
+              <a:cxn ang="0">
+                <a:pos x="connsiteX344" y="connsiteY344"/>
+              </a:cxn>
+              <a:cxn ang="0">
+                <a:pos x="connsiteX345" y="connsiteY345"/>
+              </a:cxn>
+              <a:cxn ang="0">
+                <a:pos x="connsiteX346" y="connsiteY346"/>
+              </a:cxn>
+              <a:cxn ang="0">
+                <a:pos x="connsiteX347" y="connsiteY347"/>
+              </a:cxn>
+              <a:cxn ang="0">
+                <a:pos x="connsiteX348" y="connsiteY348"/>
+              </a:cxn>
+              <a:cxn ang="0">
+                <a:pos x="connsiteX349" y="connsiteY349"/>
+              </a:cxn>
+              <a:cxn ang="0">
+                <a:pos x="connsiteX350" y="connsiteY350"/>
+              </a:cxn>
+              <a:cxn ang="0">
+                <a:pos x="connsiteX351" y="connsiteY351"/>
+              </a:cxn>
+              <a:cxn ang="0">
+                <a:pos x="connsiteX352" y="connsiteY352"/>
+              </a:cxn>
+              <a:cxn ang="0">
+                <a:pos x="connsiteX353" y="connsiteY353"/>
+              </a:cxn>
+              <a:cxn ang="0">
+                <a:pos x="connsiteX354" y="connsiteY354"/>
+              </a:cxn>
+              <a:cxn ang="0">
+                <a:pos x="connsiteX355" y="connsiteY355"/>
+              </a:cxn>
+              <a:cxn ang="0">
+                <a:pos x="connsiteX356" y="connsiteY356"/>
+              </a:cxn>
+              <a:cxn ang="0">
+                <a:pos x="connsiteX357" y="connsiteY357"/>
+              </a:cxn>
+              <a:cxn ang="0">
+                <a:pos x="connsiteX358" y="connsiteY358"/>
+              </a:cxn>
+              <a:cxn ang="0">
+                <a:pos x="connsiteX359" y="connsiteY359"/>
+              </a:cxn>
+              <a:cxn ang="0">
+                <a:pos x="connsiteX360" y="connsiteY360"/>
+              </a:cxn>
+              <a:cxn ang="0">
+                <a:pos x="connsiteX361" y="connsiteY361"/>
+              </a:cxn>
+              <a:cxn ang="0">
+                <a:pos x="connsiteX362" y="connsiteY362"/>
+              </a:cxn>
+              <a:cxn ang="0">
+                <a:pos x="connsiteX363" y="connsiteY363"/>
+              </a:cxn>
+              <a:cxn ang="0">
+                <a:pos x="connsiteX364" y="connsiteY364"/>
+              </a:cxn>
+              <a:cxn ang="0">
+                <a:pos x="connsiteX365" y="connsiteY365"/>
+              </a:cxn>
+              <a:cxn ang="0">
+                <a:pos x="connsiteX366" y="connsiteY366"/>
+              </a:cxn>
+              <a:cxn ang="0">
+                <a:pos x="connsiteX367" y="connsiteY367"/>
+              </a:cxn>
+              <a:cxn ang="0">
+                <a:pos x="connsiteX368" y="connsiteY368"/>
+              </a:cxn>
+              <a:cxn ang="0">
+                <a:pos x="connsiteX369" y="connsiteY369"/>
+              </a:cxn>
+              <a:cxn ang="0">
+                <a:pos x="connsiteX370" y="connsiteY370"/>
+              </a:cxn>
+              <a:cxn ang="0">
+                <a:pos x="connsiteX371" y="connsiteY371"/>
+              </a:cxn>
+              <a:cxn ang="0">
+                <a:pos x="connsiteX372" y="connsiteY372"/>
+              </a:cxn>
+              <a:cxn ang="0">
+                <a:pos x="connsiteX373" y="connsiteY373"/>
+              </a:cxn>
+              <a:cxn ang="0">
+                <a:pos x="connsiteX374" y="connsiteY374"/>
+              </a:cxn>
+              <a:cxn ang="0">
+                <a:pos x="connsiteX375" y="connsiteY375"/>
+              </a:cxn>
+              <a:cxn ang="0">
+                <a:pos x="connsiteX376" y="connsiteY376"/>
+              </a:cxn>
+              <a:cxn ang="0">
+                <a:pos x="connsiteX377" y="connsiteY377"/>
+              </a:cxn>
+              <a:cxn ang="0">
+                <a:pos x="connsiteX378" y="connsiteY378"/>
+              </a:cxn>
+              <a:cxn ang="0">
+                <a:pos x="connsiteX379" y="connsiteY379"/>
+              </a:cxn>
+              <a:cxn ang="0">
+                <a:pos x="connsiteX380" y="connsiteY380"/>
+              </a:cxn>
+              <a:cxn ang="0">
+                <a:pos x="connsiteX381" y="connsiteY381"/>
+              </a:cxn>
+              <a:cxn ang="0">
+                <a:pos x="connsiteX382" y="connsiteY382"/>
+              </a:cxn>
+              <a:cxn ang="0">
+                <a:pos x="connsiteX383" y="connsiteY383"/>
+              </a:cxn>
+              <a:cxn ang="0">
+                <a:pos x="connsiteX384" y="connsiteY384"/>
+              </a:cxn>
+              <a:cxn ang="0">
+                <a:pos x="connsiteX385" y="connsiteY385"/>
+              </a:cxn>
+              <a:cxn ang="0">
+                <a:pos x="connsiteX386" y="connsiteY386"/>
+              </a:cxn>
+              <a:cxn ang="0">
+                <a:pos x="connsiteX387" y="connsiteY387"/>
+              </a:cxn>
+              <a:cxn ang="0">
+                <a:pos x="connsiteX388" y="connsiteY388"/>
+              </a:cxn>
+              <a:cxn ang="0">
+                <a:pos x="connsiteX389" y="connsiteY389"/>
+              </a:cxn>
+              <a:cxn ang="0">
+                <a:pos x="connsiteX390" y="connsiteY390"/>
+              </a:cxn>
+              <a:cxn ang="0">
+                <a:pos x="connsiteX391" y="connsiteY391"/>
+              </a:cxn>
+              <a:cxn ang="0">
+                <a:pos x="connsiteX392" y="connsiteY392"/>
+              </a:cxn>
+              <a:cxn ang="0">
+                <a:pos x="connsiteX393" y="connsiteY393"/>
+              </a:cxn>
+              <a:cxn ang="0">
+                <a:pos x="connsiteX394" y="connsiteY394"/>
+              </a:cxn>
+              <a:cxn ang="0">
+                <a:pos x="connsiteX395" y="connsiteY395"/>
+              </a:cxn>
+              <a:cxn ang="0">
+                <a:pos x="connsiteX396" y="connsiteY396"/>
+              </a:cxn>
+              <a:cxn ang="0">
+                <a:pos x="connsiteX397" y="connsiteY397"/>
+              </a:cxn>
+              <a:cxn ang="0">
+                <a:pos x="connsiteX398" y="connsiteY398"/>
+              </a:cxn>
+              <a:cxn ang="0">
+                <a:pos x="connsiteX399" y="connsiteY399"/>
+              </a:cxn>
+            </a:cxnLst>
+            <a:rect l="l" t="t" r="r" b="b"/>
+            <a:pathLst>
+              <a:path w="4495800" h="4495800">
+                <a:moveTo>
+                  <a:pt x="4495800" y="2247900"/>
+                </a:moveTo>
+                <a:lnTo>
+                  <a:pt x="4495676" y="2602754"/>
+                </a:lnTo>
+                <a:lnTo>
+                  <a:pt x="4495305" y="2730751"/>
+                </a:lnTo>
+                <a:lnTo>
+                  <a:pt x="4494695" y="2826039"/>
+                </a:lnTo>
+                <a:lnTo>
+                  <a:pt x="4493829" y="2904811"/>
+                </a:lnTo>
+                <a:lnTo>
+                  <a:pt x="4492714" y="2973181"/>
+                </a:lnTo>
+                <a:lnTo>
+                  <a:pt x="4491362" y="3034246"/>
+                </a:lnTo>
+                <a:lnTo>
+                  <a:pt x="4489761" y="3089805"/>
+                </a:lnTo>
+                <a:lnTo>
+                  <a:pt x="4487904" y="3141040"/>
+                </a:lnTo>
+                <a:lnTo>
+                  <a:pt x="4485808" y="3188742"/>
+                </a:lnTo>
+                <a:lnTo>
+                  <a:pt x="4483456" y="3233500"/>
+                </a:lnTo>
+                <a:lnTo>
+                  <a:pt x="4480865" y="3275753"/>
+                </a:lnTo>
+                <a:lnTo>
+                  <a:pt x="4478017" y="3315833"/>
+                </a:lnTo>
+                <a:lnTo>
+                  <a:pt x="4474922" y="3354000"/>
+                </a:lnTo>
+                <a:lnTo>
+                  <a:pt x="4471578" y="3390471"/>
+                </a:lnTo>
+                <a:lnTo>
+                  <a:pt x="4467978" y="3425428"/>
+                </a:lnTo>
+                <a:lnTo>
+                  <a:pt x="4464130" y="3459004"/>
+                </a:lnTo>
+                <a:lnTo>
+                  <a:pt x="4460034" y="3491322"/>
+                </a:lnTo>
+                <a:lnTo>
+                  <a:pt x="4455681" y="3522498"/>
+                </a:lnTo>
+                <a:lnTo>
+                  <a:pt x="4451080" y="3552606"/>
+                </a:lnTo>
+                <a:lnTo>
+                  <a:pt x="4446223" y="3581734"/>
+                </a:lnTo>
+                <a:lnTo>
+                  <a:pt x="4441108" y="3609947"/>
+                </a:lnTo>
+                <a:lnTo>
+                  <a:pt x="4435736" y="3637302"/>
+                </a:lnTo>
+                <a:lnTo>
+                  <a:pt x="4430106" y="3663849"/>
+                </a:lnTo>
+                <a:lnTo>
+                  <a:pt x="4424220" y="3689633"/>
+                </a:lnTo>
+                <a:lnTo>
+                  <a:pt x="4418076" y="3714702"/>
+                </a:lnTo>
+                <a:lnTo>
+                  <a:pt x="4411666" y="3739096"/>
+                </a:lnTo>
+                <a:lnTo>
+                  <a:pt x="4404999" y="3762832"/>
+                </a:lnTo>
+                <a:lnTo>
+                  <a:pt x="4398074" y="3785950"/>
+                </a:lnTo>
+                <a:lnTo>
+                  <a:pt x="4390873" y="3808476"/>
+                </a:lnTo>
+                <a:lnTo>
+                  <a:pt x="4383415" y="3830431"/>
+                </a:lnTo>
+                <a:lnTo>
+                  <a:pt x="4375681" y="3851853"/>
+                </a:lnTo>
+                <a:lnTo>
+                  <a:pt x="4367680" y="3872741"/>
+                </a:lnTo>
+                <a:lnTo>
+                  <a:pt x="4359412" y="3893125"/>
+                </a:lnTo>
+                <a:lnTo>
+                  <a:pt x="4350868" y="3913023"/>
+                </a:lnTo>
+                <a:lnTo>
+                  <a:pt x="4342038" y="3932444"/>
+                </a:lnTo>
+                <a:lnTo>
+                  <a:pt x="4332942" y="3951408"/>
+                </a:lnTo>
+                <a:lnTo>
+                  <a:pt x="4323569" y="3969925"/>
+                </a:lnTo>
+                <a:lnTo>
+                  <a:pt x="4313911" y="3988013"/>
+                </a:lnTo>
+                <a:lnTo>
+                  <a:pt x="4303957" y="4005682"/>
+                </a:lnTo>
+                <a:lnTo>
+                  <a:pt x="4293727" y="4022941"/>
+                </a:lnTo>
+                <a:lnTo>
+                  <a:pt x="4283202" y="4039800"/>
+                </a:lnTo>
+                <a:lnTo>
+                  <a:pt x="4272392" y="4056260"/>
+                </a:lnTo>
+                <a:lnTo>
+                  <a:pt x="4261276" y="4072347"/>
+                </a:lnTo>
+                <a:lnTo>
+                  <a:pt x="4249865" y="4088063"/>
+                </a:lnTo>
+                <a:lnTo>
+                  <a:pt x="4238149" y="4103408"/>
+                </a:lnTo>
+                <a:lnTo>
+                  <a:pt x="4226128" y="4118400"/>
+                </a:lnTo>
+                <a:lnTo>
+                  <a:pt x="4213803" y="4133041"/>
+                </a:lnTo>
+                <a:lnTo>
+                  <a:pt x="4201154" y="4147328"/>
+                </a:lnTo>
+                <a:lnTo>
+                  <a:pt x="4188190" y="4161282"/>
+                </a:lnTo>
+                <a:lnTo>
+                  <a:pt x="4174903" y="4174903"/>
+                </a:lnTo>
+                <a:lnTo>
+                  <a:pt x="4161282" y="4188190"/>
+                </a:lnTo>
+                <a:lnTo>
+                  <a:pt x="4147328" y="4201154"/>
+                </a:lnTo>
+                <a:lnTo>
+                  <a:pt x="4133041" y="4213803"/>
+                </a:lnTo>
+                <a:lnTo>
+                  <a:pt x="4118400" y="4226128"/>
+                </a:lnTo>
+                <a:lnTo>
+                  <a:pt x="4103408" y="4238149"/>
+                </a:lnTo>
+                <a:lnTo>
+                  <a:pt x="4088063" y="4249865"/>
+                </a:lnTo>
+                <a:lnTo>
+                  <a:pt x="4072347" y="4261276"/>
+                </a:lnTo>
+                <a:lnTo>
+                  <a:pt x="4056260" y="4272392"/>
+                </a:lnTo>
+                <a:lnTo>
+                  <a:pt x="4039800" y="4283202"/>
+                </a:lnTo>
+                <a:lnTo>
+                  <a:pt x="4022941" y="4293727"/>
+                </a:lnTo>
+                <a:lnTo>
+                  <a:pt x="4005682" y="4303957"/>
+                </a:lnTo>
+                <a:lnTo>
+                  <a:pt x="3988013" y="4313911"/>
+                </a:lnTo>
+                <a:lnTo>
+                  <a:pt x="3969925" y="4323569"/>
+                </a:lnTo>
+                <a:lnTo>
+                  <a:pt x="3951408" y="4332942"/>
+                </a:lnTo>
+                <a:lnTo>
+                  <a:pt x="3932444" y="4342038"/>
+                </a:lnTo>
+                <a:lnTo>
+                  <a:pt x="3913023" y="4350868"/>
+                </a:lnTo>
+                <a:lnTo>
+                  <a:pt x="3893125" y="4359412"/>
+                </a:lnTo>
+                <a:lnTo>
+                  <a:pt x="3872741" y="4367680"/>
+                </a:lnTo>
+                <a:lnTo>
+                  <a:pt x="3851853" y="4375681"/>
+                </a:lnTo>
+                <a:lnTo>
+                  <a:pt x="3830431" y="4383415"/>
+                </a:lnTo>
+                <a:lnTo>
+                  <a:pt x="3808476" y="4390873"/>
+                </a:lnTo>
+                <a:lnTo>
+                  <a:pt x="3785950" y="4398074"/>
+                </a:lnTo>
+                <a:lnTo>
+                  <a:pt x="3762832" y="4404999"/>
+                </a:lnTo>
+                <a:lnTo>
+                  <a:pt x="3739096" y="4411666"/>
+                </a:lnTo>
+                <a:lnTo>
+                  <a:pt x="3714702" y="4418076"/>
+                </a:lnTo>
+                <a:lnTo>
+                  <a:pt x="3689633" y="4424220"/>
+                </a:lnTo>
+                <a:lnTo>
+                  <a:pt x="3663849" y="4430106"/>
+                </a:lnTo>
+                <a:lnTo>
+                  <a:pt x="3637302" y="4435736"/>
+                </a:lnTo>
+                <a:lnTo>
+                  <a:pt x="3609947" y="4441108"/>
+                </a:lnTo>
+                <a:lnTo>
+                  <a:pt x="3581734" y="4446223"/>
+                </a:lnTo>
+                <a:lnTo>
+                  <a:pt x="3552606" y="4451080"/>
+                </a:lnTo>
+                <a:lnTo>
+                  <a:pt x="3522498" y="4455681"/>
+                </a:lnTo>
+                <a:lnTo>
+                  <a:pt x="3491322" y="4460034"/>
+                </a:lnTo>
+                <a:lnTo>
+                  <a:pt x="3459004" y="4464130"/>
+                </a:lnTo>
+                <a:lnTo>
+                  <a:pt x="3425428" y="4467978"/>
+                </a:lnTo>
+                <a:lnTo>
+                  <a:pt x="3390471" y="4471578"/>
+                </a:lnTo>
+                <a:lnTo>
+                  <a:pt x="3354000" y="4474922"/>
+                </a:lnTo>
+                <a:lnTo>
+                  <a:pt x="3315833" y="4478017"/>
+                </a:lnTo>
+                <a:lnTo>
+                  <a:pt x="3275753" y="4480865"/>
+                </a:lnTo>
+                <a:lnTo>
+                  <a:pt x="3233500" y="4483456"/>
+                </a:lnTo>
+                <a:lnTo>
+                  <a:pt x="3188742" y="4485808"/>
+                </a:lnTo>
+                <a:lnTo>
+                  <a:pt x="3141040" y="4487904"/>
+                </a:lnTo>
+                <a:lnTo>
+                  <a:pt x="3089805" y="4489761"/>
+                </a:lnTo>
+                <a:lnTo>
+                  <a:pt x="3034246" y="4491362"/>
+                </a:lnTo>
+                <a:lnTo>
+                  <a:pt x="2973181" y="4492714"/>
+                </a:lnTo>
+                <a:lnTo>
+                  <a:pt x="2904811" y="4493829"/>
+                </a:lnTo>
+                <a:lnTo>
+                  <a:pt x="2826039" y="4494695"/>
+                </a:lnTo>
+                <a:lnTo>
+                  <a:pt x="2730751" y="4495305"/>
+                </a:lnTo>
+                <a:lnTo>
+                  <a:pt x="2602754" y="4495676"/>
+                </a:lnTo>
+                <a:lnTo>
+                  <a:pt x="2247900" y="4495800"/>
+                </a:lnTo>
+                <a:lnTo>
+                  <a:pt x="1893046" y="4495676"/>
+                </a:lnTo>
+                <a:lnTo>
+                  <a:pt x="1765049" y="4495305"/>
+                </a:lnTo>
+                <a:lnTo>
+                  <a:pt x="1669761" y="4494695"/>
+                </a:lnTo>
+                <a:lnTo>
+                  <a:pt x="1590989" y="4493829"/>
+                </a:lnTo>
+                <a:lnTo>
+                  <a:pt x="1522619" y="4492714"/>
+                </a:lnTo>
+                <a:lnTo>
+                  <a:pt x="1461554" y="4491362"/>
+                </a:lnTo>
+                <a:lnTo>
+                  <a:pt x="1405995" y="4489761"/>
+                </a:lnTo>
+                <a:lnTo>
+                  <a:pt x="1354760" y="4487904"/>
+                </a:lnTo>
+                <a:lnTo>
+                  <a:pt x="1307059" y="4485808"/>
+                </a:lnTo>
+                <a:lnTo>
+                  <a:pt x="1262301" y="4483456"/>
+                </a:lnTo>
+                <a:lnTo>
+                  <a:pt x="1220048" y="4480865"/>
+                </a:lnTo>
+                <a:lnTo>
+                  <a:pt x="1179967" y="4478017"/>
+                </a:lnTo>
+                <a:lnTo>
+                  <a:pt x="1141800" y="4474922"/>
+                </a:lnTo>
+                <a:lnTo>
+                  <a:pt x="1105329" y="4471578"/>
+                </a:lnTo>
+                <a:lnTo>
+                  <a:pt x="1070372" y="4467978"/>
+                </a:lnTo>
+                <a:lnTo>
+                  <a:pt x="1036796" y="4464130"/>
+                </a:lnTo>
+                <a:lnTo>
+                  <a:pt x="1004478" y="4460034"/>
+                </a:lnTo>
+                <a:lnTo>
+                  <a:pt x="973303" y="4455681"/>
+                </a:lnTo>
+                <a:lnTo>
+                  <a:pt x="943194" y="4451080"/>
+                </a:lnTo>
+                <a:lnTo>
+                  <a:pt x="914067" y="4446223"/>
+                </a:lnTo>
+                <a:lnTo>
+                  <a:pt x="885854" y="4441108"/>
+                </a:lnTo>
+                <a:lnTo>
+                  <a:pt x="858498" y="4435736"/>
+                </a:lnTo>
+                <a:lnTo>
+                  <a:pt x="831952" y="4430106"/>
+                </a:lnTo>
+                <a:lnTo>
+                  <a:pt x="806167" y="4424220"/>
+                </a:lnTo>
+                <a:lnTo>
+                  <a:pt x="781098" y="4418076"/>
+                </a:lnTo>
+                <a:lnTo>
+                  <a:pt x="756704" y="4411666"/>
+                </a:lnTo>
+                <a:lnTo>
+                  <a:pt x="732968" y="4404999"/>
+                </a:lnTo>
+                <a:lnTo>
+                  <a:pt x="709851" y="4398074"/>
+                </a:lnTo>
+                <a:lnTo>
+                  <a:pt x="687324" y="4390873"/>
+                </a:lnTo>
+                <a:lnTo>
+                  <a:pt x="665369" y="4383415"/>
+                </a:lnTo>
+                <a:lnTo>
+                  <a:pt x="643947" y="4375681"/>
+                </a:lnTo>
+                <a:lnTo>
+                  <a:pt x="623059" y="4367680"/>
+                </a:lnTo>
+                <a:lnTo>
+                  <a:pt x="602675" y="4359412"/>
+                </a:lnTo>
+                <a:lnTo>
+                  <a:pt x="582778" y="4350868"/>
+                </a:lnTo>
+                <a:lnTo>
+                  <a:pt x="563356" y="4342038"/>
+                </a:lnTo>
+                <a:lnTo>
+                  <a:pt x="544392" y="4332942"/>
+                </a:lnTo>
+                <a:lnTo>
+                  <a:pt x="525875" y="4323569"/>
+                </a:lnTo>
+                <a:lnTo>
+                  <a:pt x="507787" y="4313911"/>
+                </a:lnTo>
+                <a:lnTo>
+                  <a:pt x="490118" y="4303957"/>
+                </a:lnTo>
+                <a:lnTo>
+                  <a:pt x="472859" y="4293727"/>
+                </a:lnTo>
+                <a:lnTo>
+                  <a:pt x="456000" y="4283202"/>
+                </a:lnTo>
+                <a:lnTo>
+                  <a:pt x="439541" y="4272392"/>
+                </a:lnTo>
+                <a:lnTo>
+                  <a:pt x="423453" y="4261276"/>
+                </a:lnTo>
+                <a:lnTo>
+                  <a:pt x="407737" y="4249865"/>
+                </a:lnTo>
+                <a:lnTo>
+                  <a:pt x="392392" y="4238149"/>
+                </a:lnTo>
+                <a:lnTo>
+                  <a:pt x="377400" y="4226128"/>
+                </a:lnTo>
+                <a:lnTo>
+                  <a:pt x="362760" y="4213803"/>
+                </a:lnTo>
+                <a:lnTo>
+                  <a:pt x="348472" y="4201154"/>
+                </a:lnTo>
+                <a:lnTo>
+                  <a:pt x="334518" y="4188190"/>
+                </a:lnTo>
+                <a:lnTo>
+                  <a:pt x="320897" y="4174903"/>
+                </a:lnTo>
+                <a:lnTo>
+                  <a:pt x="307610" y="4161282"/>
+                </a:lnTo>
+                <a:lnTo>
+                  <a:pt x="294646" y="4147328"/>
+                </a:lnTo>
+                <a:lnTo>
+                  <a:pt x="281997" y="4133041"/>
+                </a:lnTo>
+                <a:lnTo>
+                  <a:pt x="269672" y="4118400"/>
+                </a:lnTo>
+                <a:lnTo>
+                  <a:pt x="257651" y="4103408"/>
+                </a:lnTo>
+                <a:lnTo>
+                  <a:pt x="245936" y="4088063"/>
+                </a:lnTo>
+                <a:lnTo>
+                  <a:pt x="234525" y="4072347"/>
+                </a:lnTo>
+                <a:lnTo>
+                  <a:pt x="223409" y="4056260"/>
+                </a:lnTo>
+                <a:lnTo>
+                  <a:pt x="212598" y="4039800"/>
+                </a:lnTo>
+                <a:lnTo>
+                  <a:pt x="202073" y="4022941"/>
+                </a:lnTo>
+                <a:lnTo>
+                  <a:pt x="191843" y="4005682"/>
+                </a:lnTo>
+                <a:lnTo>
+                  <a:pt x="181889" y="3988013"/>
+                </a:lnTo>
+                <a:lnTo>
+                  <a:pt x="172231" y="3969925"/>
+                </a:lnTo>
+                <a:lnTo>
+                  <a:pt x="162858" y="3951408"/>
+                </a:lnTo>
+                <a:lnTo>
+                  <a:pt x="153762" y="3932444"/>
+                </a:lnTo>
+                <a:lnTo>
+                  <a:pt x="144932" y="3913023"/>
+                </a:lnTo>
+                <a:lnTo>
+                  <a:pt x="136388" y="3893125"/>
+                </a:lnTo>
+                <a:lnTo>
+                  <a:pt x="128121" y="3872741"/>
+                </a:lnTo>
+                <a:lnTo>
+                  <a:pt x="120120" y="3851853"/>
+                </a:lnTo>
+                <a:lnTo>
+                  <a:pt x="112385" y="3830431"/>
+                </a:lnTo>
+                <a:lnTo>
+                  <a:pt x="104927" y="3808476"/>
+                </a:lnTo>
+                <a:lnTo>
+                  <a:pt x="97727" y="3785950"/>
+                </a:lnTo>
+                <a:lnTo>
+                  <a:pt x="90802" y="3762832"/>
+                </a:lnTo>
+                <a:lnTo>
+                  <a:pt x="84134" y="3739096"/>
+                </a:lnTo>
+                <a:lnTo>
+                  <a:pt x="77724" y="3714702"/>
+                </a:lnTo>
+                <a:lnTo>
+                  <a:pt x="71580" y="3689633"/>
+                </a:lnTo>
+                <a:lnTo>
+                  <a:pt x="65694" y="3663849"/>
+                </a:lnTo>
+                <a:lnTo>
+                  <a:pt x="60065" y="3637302"/>
+                </a:lnTo>
+                <a:lnTo>
+                  <a:pt x="54693" y="3609947"/>
+                </a:lnTo>
+                <a:lnTo>
+                  <a:pt x="49578" y="3581734"/>
+                </a:lnTo>
+                <a:lnTo>
+                  <a:pt x="44720" y="3552606"/>
+                </a:lnTo>
+                <a:lnTo>
+                  <a:pt x="40119" y="3522498"/>
+                </a:lnTo>
+                <a:lnTo>
+                  <a:pt x="35766" y="3491322"/>
+                </a:lnTo>
+                <a:lnTo>
+                  <a:pt x="31671" y="3459004"/>
+                </a:lnTo>
+                <a:lnTo>
+                  <a:pt x="27823" y="3425428"/>
+                </a:lnTo>
+                <a:lnTo>
+                  <a:pt x="24222" y="3390471"/>
+                </a:lnTo>
+                <a:lnTo>
+                  <a:pt x="20879" y="3354000"/>
+                </a:lnTo>
+                <a:lnTo>
+                  <a:pt x="17783" y="3315833"/>
+                </a:lnTo>
+                <a:lnTo>
+                  <a:pt x="14935" y="3275753"/>
+                </a:lnTo>
+                <a:lnTo>
+                  <a:pt x="12344" y="3233500"/>
+                </a:lnTo>
+                <a:lnTo>
+                  <a:pt x="9992" y="3188742"/>
+                </a:lnTo>
+                <a:lnTo>
+                  <a:pt x="7896" y="3141040"/>
+                </a:lnTo>
+                <a:lnTo>
+                  <a:pt x="6039" y="3089805"/>
+                </a:lnTo>
+                <a:lnTo>
+                  <a:pt x="4439" y="3034246"/>
+                </a:lnTo>
+                <a:lnTo>
+                  <a:pt x="3086" y="2973181"/>
+                </a:lnTo>
+                <a:lnTo>
+                  <a:pt x="1972" y="2904811"/>
+                </a:lnTo>
+                <a:lnTo>
+                  <a:pt x="1105" y="2826039"/>
+                </a:lnTo>
+                <a:lnTo>
+                  <a:pt x="495" y="2730751"/>
+                </a:lnTo>
+                <a:lnTo>
+                  <a:pt x="124" y="2602754"/>
+                </a:lnTo>
+                <a:lnTo>
+                  <a:pt x="0" y="2247900"/>
+                </a:lnTo>
+                <a:lnTo>
+                  <a:pt x="124" y="1893046"/>
+                </a:lnTo>
+                <a:lnTo>
+                  <a:pt x="495" y="1765049"/>
+                </a:lnTo>
+                <a:lnTo>
+                  <a:pt x="1105" y="1669761"/>
+                </a:lnTo>
+                <a:lnTo>
+                  <a:pt x="1972" y="1590989"/>
+                </a:lnTo>
+                <a:lnTo>
+                  <a:pt x="3086" y="1522619"/>
+                </a:lnTo>
+                <a:lnTo>
+                  <a:pt x="4439" y="1461554"/>
+                </a:lnTo>
+                <a:lnTo>
+                  <a:pt x="6039" y="1405995"/>
+                </a:lnTo>
+                <a:lnTo>
+                  <a:pt x="7896" y="1354760"/>
+                </a:lnTo>
+                <a:lnTo>
+                  <a:pt x="9992" y="1307059"/>
+                </a:lnTo>
+                <a:lnTo>
+                  <a:pt x="12344" y="1262301"/>
+                </a:lnTo>
+                <a:lnTo>
+                  <a:pt x="14935" y="1220048"/>
+                </a:lnTo>
+                <a:lnTo>
+                  <a:pt x="17783" y="1179967"/>
+                </a:lnTo>
+                <a:lnTo>
+                  <a:pt x="20879" y="1141800"/>
+                </a:lnTo>
+                <a:lnTo>
+                  <a:pt x="24222" y="1105329"/>
+                </a:lnTo>
+                <a:lnTo>
+                  <a:pt x="27823" y="1070372"/>
+                </a:lnTo>
+                <a:lnTo>
+                  <a:pt x="31671" y="1036796"/>
+                </a:lnTo>
+                <a:lnTo>
+                  <a:pt x="35766" y="1004478"/>
+                </a:lnTo>
+                <a:lnTo>
+                  <a:pt x="40119" y="973303"/>
+                </a:lnTo>
+                <a:lnTo>
+                  <a:pt x="44720" y="943194"/>
+                </a:lnTo>
+                <a:lnTo>
+                  <a:pt x="49578" y="914067"/>
+                </a:lnTo>
+                <a:lnTo>
+                  <a:pt x="54693" y="885854"/>
+                </a:lnTo>
+                <a:lnTo>
+                  <a:pt x="60065" y="858498"/>
+                </a:lnTo>
+                <a:lnTo>
+                  <a:pt x="65694" y="831952"/>
+                </a:lnTo>
+                <a:lnTo>
+                  <a:pt x="71580" y="806167"/>
+                </a:lnTo>
+                <a:lnTo>
+                  <a:pt x="77724" y="781098"/>
+                </a:lnTo>
+                <a:lnTo>
+                  <a:pt x="84134" y="756704"/>
+                </a:lnTo>
+                <a:lnTo>
+                  <a:pt x="90802" y="732968"/>
+                </a:lnTo>
+                <a:lnTo>
+                  <a:pt x="97727" y="709851"/>
+                </a:lnTo>
+                <a:lnTo>
+                  <a:pt x="104927" y="687324"/>
+                </a:lnTo>
+                <a:lnTo>
+                  <a:pt x="112385" y="665369"/>
+                </a:lnTo>
+                <a:lnTo>
+                  <a:pt x="120120" y="643947"/>
+                </a:lnTo>
+                <a:lnTo>
+                  <a:pt x="128121" y="623059"/>
+                </a:lnTo>
+                <a:lnTo>
+                  <a:pt x="136388" y="602675"/>
+                </a:lnTo>
+                <a:lnTo>
+                  <a:pt x="144932" y="582778"/>
+                </a:lnTo>
+                <a:lnTo>
+                  <a:pt x="153762" y="563356"/>
+                </a:lnTo>
+                <a:lnTo>
+                  <a:pt x="162858" y="544392"/>
+                </a:lnTo>
+                <a:lnTo>
+                  <a:pt x="172231" y="525875"/>
+                </a:lnTo>
+                <a:lnTo>
+                  <a:pt x="181889" y="507787"/>
+                </a:lnTo>
+                <a:lnTo>
+                  <a:pt x="191843" y="490118"/>
+                </a:lnTo>
+                <a:lnTo>
+                  <a:pt x="202073" y="472859"/>
+                </a:lnTo>
+                <a:lnTo>
+                  <a:pt x="212598" y="456000"/>
+                </a:lnTo>
+                <a:lnTo>
+                  <a:pt x="223409" y="439541"/>
+                </a:lnTo>
+                <a:lnTo>
+                  <a:pt x="234525" y="423453"/>
+                </a:lnTo>
+                <a:lnTo>
+                  <a:pt x="245936" y="407737"/>
+                </a:lnTo>
+                <a:lnTo>
+                  <a:pt x="257651" y="392392"/>
+                </a:lnTo>
+                <a:lnTo>
+                  <a:pt x="269672" y="377400"/>
+                </a:lnTo>
+                <a:lnTo>
+                  <a:pt x="281997" y="362760"/>
+                </a:lnTo>
+                <a:lnTo>
+                  <a:pt x="294646" y="348472"/>
+                </a:lnTo>
+                <a:lnTo>
+                  <a:pt x="307610" y="334518"/>
+                </a:lnTo>
+                <a:lnTo>
+                  <a:pt x="320897" y="320897"/>
+                </a:lnTo>
+                <a:lnTo>
+                  <a:pt x="334518" y="307610"/>
+                </a:lnTo>
+                <a:lnTo>
+                  <a:pt x="348472" y="294646"/>
+                </a:lnTo>
+                <a:lnTo>
+                  <a:pt x="362760" y="281997"/>
+                </a:lnTo>
+                <a:lnTo>
+                  <a:pt x="377400" y="269672"/>
+                </a:lnTo>
+                <a:lnTo>
+                  <a:pt x="392392" y="257651"/>
+                </a:lnTo>
+                <a:lnTo>
+                  <a:pt x="407737" y="245936"/>
+                </a:lnTo>
+                <a:lnTo>
+                  <a:pt x="423453" y="234525"/>
+                </a:lnTo>
+                <a:lnTo>
+                  <a:pt x="439541" y="223409"/>
+                </a:lnTo>
+                <a:lnTo>
+                  <a:pt x="456000" y="212598"/>
+                </a:lnTo>
+                <a:lnTo>
+                  <a:pt x="472859" y="202073"/>
+                </a:lnTo>
+                <a:lnTo>
+                  <a:pt x="490118" y="191843"/>
+                </a:lnTo>
+                <a:lnTo>
+                  <a:pt x="507787" y="181889"/>
+                </a:lnTo>
+                <a:lnTo>
+                  <a:pt x="525875" y="172231"/>
+                </a:lnTo>
+                <a:lnTo>
+                  <a:pt x="544392" y="162858"/>
+                </a:lnTo>
+                <a:lnTo>
+                  <a:pt x="563356" y="153762"/>
+                </a:lnTo>
+                <a:lnTo>
+                  <a:pt x="582778" y="144932"/>
+                </a:lnTo>
+                <a:lnTo>
+                  <a:pt x="602675" y="136388"/>
+                </a:lnTo>
+                <a:lnTo>
+                  <a:pt x="623059" y="128121"/>
+                </a:lnTo>
+                <a:lnTo>
+                  <a:pt x="643947" y="120120"/>
+                </a:lnTo>
+                <a:lnTo>
+                  <a:pt x="665369" y="112385"/>
+                </a:lnTo>
+                <a:lnTo>
+                  <a:pt x="687324" y="104927"/>
+                </a:lnTo>
+                <a:lnTo>
+                  <a:pt x="709851" y="97727"/>
+                </a:lnTo>
+                <a:lnTo>
+                  <a:pt x="732968" y="90802"/>
+                </a:lnTo>
+                <a:lnTo>
+                  <a:pt x="756704" y="84134"/>
+                </a:lnTo>
+                <a:lnTo>
+                  <a:pt x="781098" y="77724"/>
+                </a:lnTo>
+                <a:lnTo>
+                  <a:pt x="806167" y="71580"/>
+                </a:lnTo>
+                <a:lnTo>
+                  <a:pt x="831952" y="65694"/>
+                </a:lnTo>
+                <a:lnTo>
+                  <a:pt x="858498" y="60065"/>
+                </a:lnTo>
+                <a:lnTo>
+                  <a:pt x="885854" y="54693"/>
+                </a:lnTo>
+                <a:lnTo>
+                  <a:pt x="914067" y="49578"/>
+                </a:lnTo>
+                <a:lnTo>
+                  <a:pt x="943194" y="44720"/>
+                </a:lnTo>
+                <a:lnTo>
+                  <a:pt x="973303" y="40119"/>
+                </a:lnTo>
+                <a:lnTo>
+                  <a:pt x="1004478" y="35766"/>
+                </a:lnTo>
+                <a:lnTo>
+                  <a:pt x="1036796" y="31671"/>
+                </a:lnTo>
+                <a:lnTo>
+                  <a:pt x="1070372" y="27823"/>
+                </a:lnTo>
+                <a:lnTo>
+                  <a:pt x="1105329" y="24222"/>
+                </a:lnTo>
+                <a:lnTo>
+                  <a:pt x="1141800" y="20879"/>
+                </a:lnTo>
+                <a:lnTo>
+                  <a:pt x="1179967" y="17783"/>
+                </a:lnTo>
+                <a:lnTo>
+                  <a:pt x="1220048" y="14935"/>
+                </a:lnTo>
+                <a:lnTo>
+                  <a:pt x="1262301" y="12344"/>
+                </a:lnTo>
+                <a:lnTo>
+                  <a:pt x="1307059" y="9992"/>
+                </a:lnTo>
+                <a:lnTo>
+                  <a:pt x="1354760" y="7896"/>
+                </a:lnTo>
+                <a:lnTo>
+                  <a:pt x="1405995" y="6039"/>
+                </a:lnTo>
+                <a:lnTo>
+                  <a:pt x="1461554" y="4439"/>
+                </a:lnTo>
+                <a:lnTo>
+                  <a:pt x="1522619" y="3086"/>
+                </a:lnTo>
+                <a:lnTo>
+                  <a:pt x="1590989" y="1972"/>
+                </a:lnTo>
+                <a:lnTo>
+                  <a:pt x="1669761" y="1105"/>
+                </a:lnTo>
+                <a:lnTo>
+                  <a:pt x="1765049" y="495"/>
+                </a:lnTo>
+                <a:lnTo>
+                  <a:pt x="1893046" y="124"/>
+                </a:lnTo>
+                <a:lnTo>
+                  <a:pt x="2247900" y="0"/>
+                </a:lnTo>
+                <a:lnTo>
+                  <a:pt x="2602754" y="124"/>
+                </a:lnTo>
+                <a:lnTo>
+                  <a:pt x="2730751" y="495"/>
+                </a:lnTo>
+                <a:lnTo>
+                  <a:pt x="2826039" y="1105"/>
+                </a:lnTo>
+                <a:lnTo>
+                  <a:pt x="2904811" y="1972"/>
+                </a:lnTo>
+                <a:lnTo>
+                  <a:pt x="2973181" y="3086"/>
+                </a:lnTo>
+                <a:lnTo>
+                  <a:pt x="3034246" y="4439"/>
+                </a:lnTo>
+                <a:lnTo>
+                  <a:pt x="3089805" y="6039"/>
+                </a:lnTo>
+                <a:lnTo>
+                  <a:pt x="3141040" y="7896"/>
+                </a:lnTo>
+                <a:lnTo>
+                  <a:pt x="3188742" y="9992"/>
+                </a:lnTo>
+                <a:lnTo>
+                  <a:pt x="3233500" y="12344"/>
+                </a:lnTo>
+                <a:lnTo>
+                  <a:pt x="3275753" y="14935"/>
+                </a:lnTo>
+                <a:lnTo>
+                  <a:pt x="3315833" y="17783"/>
+                </a:lnTo>
+                <a:lnTo>
+                  <a:pt x="3354000" y="20879"/>
+                </a:lnTo>
+                <a:lnTo>
+                  <a:pt x="3390471" y="24222"/>
+                </a:lnTo>
+                <a:lnTo>
+                  <a:pt x="3425428" y="27823"/>
+                </a:lnTo>
+                <a:lnTo>
+                  <a:pt x="3459004" y="31671"/>
+                </a:lnTo>
+                <a:lnTo>
+                  <a:pt x="3491322" y="35766"/>
+                </a:lnTo>
+                <a:lnTo>
+                  <a:pt x="3522498" y="40119"/>
+                </a:lnTo>
+                <a:lnTo>
+                  <a:pt x="3552606" y="44720"/>
+                </a:lnTo>
+                <a:lnTo>
+                  <a:pt x="3581734" y="49578"/>
+                </a:lnTo>
+                <a:lnTo>
+                  <a:pt x="3609947" y="54693"/>
+                </a:lnTo>
+                <a:lnTo>
+                  <a:pt x="3637302" y="60065"/>
+                </a:lnTo>
+                <a:lnTo>
+                  <a:pt x="3663849" y="65694"/>
+                </a:lnTo>
+                <a:lnTo>
+                  <a:pt x="3689633" y="71580"/>
+                </a:lnTo>
+                <a:lnTo>
+                  <a:pt x="3714702" y="77724"/>
+                </a:lnTo>
+                <a:lnTo>
+                  <a:pt x="3739096" y="84134"/>
+                </a:lnTo>
+                <a:lnTo>
+                  <a:pt x="3762832" y="90802"/>
+                </a:lnTo>
+                <a:lnTo>
+                  <a:pt x="3785950" y="97727"/>
+                </a:lnTo>
+                <a:lnTo>
+                  <a:pt x="3808476" y="104927"/>
+                </a:lnTo>
+                <a:lnTo>
+                  <a:pt x="3830431" y="112385"/>
+                </a:lnTo>
+                <a:lnTo>
+                  <a:pt x="3851853" y="120120"/>
+                </a:lnTo>
+                <a:lnTo>
+                  <a:pt x="3872741" y="128121"/>
+                </a:lnTo>
+                <a:lnTo>
+                  <a:pt x="3893125" y="136388"/>
+                </a:lnTo>
+                <a:lnTo>
+                  <a:pt x="3913023" y="144932"/>
+                </a:lnTo>
+                <a:lnTo>
+                  <a:pt x="3932444" y="153762"/>
+                </a:lnTo>
+                <a:lnTo>
+                  <a:pt x="3951408" y="162858"/>
+                </a:lnTo>
+                <a:lnTo>
+                  <a:pt x="3969925" y="172231"/>
+                </a:lnTo>
+                <a:lnTo>
+                  <a:pt x="3988013" y="181889"/>
+                </a:lnTo>
+                <a:lnTo>
+                  <a:pt x="4005682" y="191843"/>
+                </a:lnTo>
+                <a:lnTo>
+                  <a:pt x="4022941" y="202073"/>
+                </a:lnTo>
+                <a:lnTo>
+                  <a:pt x="4039800" y="212598"/>
+                </a:lnTo>
+                <a:lnTo>
+                  <a:pt x="4056260" y="223409"/>
+                </a:lnTo>
+                <a:lnTo>
+                  <a:pt x="4072347" y="234525"/>
+                </a:lnTo>
+                <a:lnTo>
+                  <a:pt x="4088063" y="245936"/>
+                </a:lnTo>
+                <a:lnTo>
+                  <a:pt x="4103408" y="257651"/>
+                </a:lnTo>
+                <a:lnTo>
+                  <a:pt x="4118400" y="269672"/>
+                </a:lnTo>
+                <a:lnTo>
+                  <a:pt x="4133041" y="281997"/>
+                </a:lnTo>
+                <a:lnTo>
+                  <a:pt x="4147328" y="294646"/>
+                </a:lnTo>
+                <a:lnTo>
+                  <a:pt x="4161282" y="307610"/>
+                </a:lnTo>
+                <a:lnTo>
+                  <a:pt x="4174903" y="320897"/>
+                </a:lnTo>
+                <a:lnTo>
+                  <a:pt x="4188190" y="334518"/>
+                </a:lnTo>
+                <a:lnTo>
+                  <a:pt x="4201154" y="348472"/>
+                </a:lnTo>
+                <a:lnTo>
+                  <a:pt x="4213803" y="362760"/>
+                </a:lnTo>
+                <a:lnTo>
+                  <a:pt x="4226128" y="377400"/>
+                </a:lnTo>
+                <a:lnTo>
+                  <a:pt x="4238149" y="392392"/>
+                </a:lnTo>
+                <a:lnTo>
+                  <a:pt x="4249865" y="407737"/>
+                </a:lnTo>
+                <a:lnTo>
+                  <a:pt x="4261276" y="423453"/>
+                </a:lnTo>
+                <a:lnTo>
+                  <a:pt x="4272392" y="439541"/>
+                </a:lnTo>
+                <a:lnTo>
+                  <a:pt x="4283202" y="456000"/>
+                </a:lnTo>
+                <a:lnTo>
+                  <a:pt x="4293727" y="472859"/>
+                </a:lnTo>
+                <a:lnTo>
+                  <a:pt x="4303957" y="490118"/>
+                </a:lnTo>
+                <a:lnTo>
+                  <a:pt x="4313911" y="507787"/>
+                </a:lnTo>
+                <a:lnTo>
+                  <a:pt x="4323569" y="525875"/>
+                </a:lnTo>
+                <a:lnTo>
+                  <a:pt x="4332942" y="544392"/>
+                </a:lnTo>
+                <a:lnTo>
+                  <a:pt x="4342038" y="563356"/>
+                </a:lnTo>
+                <a:lnTo>
+                  <a:pt x="4350868" y="582778"/>
+                </a:lnTo>
+                <a:lnTo>
+                  <a:pt x="4359412" y="602675"/>
+                </a:lnTo>
+                <a:lnTo>
+                  <a:pt x="4367680" y="623059"/>
+                </a:lnTo>
+                <a:lnTo>
+                  <a:pt x="4375681" y="643947"/>
+                </a:lnTo>
+                <a:lnTo>
+                  <a:pt x="4383415" y="665369"/>
+                </a:lnTo>
+                <a:lnTo>
+                  <a:pt x="4390873" y="687324"/>
+                </a:lnTo>
+                <a:lnTo>
+                  <a:pt x="4398074" y="709851"/>
+                </a:lnTo>
+                <a:lnTo>
+                  <a:pt x="4404999" y="732968"/>
+                </a:lnTo>
+                <a:lnTo>
+                  <a:pt x="4411666" y="756704"/>
+                </a:lnTo>
+                <a:lnTo>
+                  <a:pt x="4418076" y="781098"/>
+                </a:lnTo>
+                <a:lnTo>
+                  <a:pt x="4424220" y="806167"/>
+                </a:lnTo>
+                <a:lnTo>
+                  <a:pt x="4430106" y="831952"/>
+                </a:lnTo>
+                <a:lnTo>
+                  <a:pt x="4435736" y="858498"/>
+                </a:lnTo>
+                <a:lnTo>
+                  <a:pt x="4441108" y="885854"/>
+                </a:lnTo>
+                <a:lnTo>
+                  <a:pt x="4446223" y="914067"/>
+                </a:lnTo>
+                <a:lnTo>
+                  <a:pt x="4451080" y="943194"/>
+                </a:lnTo>
+                <a:lnTo>
+                  <a:pt x="4455681" y="973303"/>
+                </a:lnTo>
+                <a:lnTo>
+                  <a:pt x="4460034" y="1004478"/>
+                </a:lnTo>
+                <a:lnTo>
+                  <a:pt x="4464130" y="1036796"/>
+                </a:lnTo>
+                <a:lnTo>
+                  <a:pt x="4467978" y="1070372"/>
+                </a:lnTo>
+                <a:lnTo>
+                  <a:pt x="4471578" y="1105329"/>
+                </a:lnTo>
+                <a:lnTo>
+                  <a:pt x="4474922" y="1141800"/>
+                </a:lnTo>
+                <a:lnTo>
+                  <a:pt x="4478017" y="1179967"/>
+                </a:lnTo>
+                <a:lnTo>
+                  <a:pt x="4480865" y="1220048"/>
+                </a:lnTo>
+                <a:lnTo>
+                  <a:pt x="4483456" y="1262301"/>
+                </a:lnTo>
+                <a:lnTo>
+                  <a:pt x="4485808" y="1307059"/>
+                </a:lnTo>
+                <a:lnTo>
+                  <a:pt x="4487904" y="1354760"/>
+                </a:lnTo>
+                <a:lnTo>
+                  <a:pt x="4489761" y="1405995"/>
+                </a:lnTo>
+                <a:lnTo>
+                  <a:pt x="4491362" y="1461554"/>
+                </a:lnTo>
+                <a:lnTo>
+                  <a:pt x="4492714" y="1522619"/>
+                </a:lnTo>
+                <a:lnTo>
+                  <a:pt x="4493829" y="1590989"/>
+                </a:lnTo>
+                <a:lnTo>
+                  <a:pt x="4494695" y="1669761"/>
+                </a:lnTo>
+                <a:lnTo>
+                  <a:pt x="4495305" y="1765049"/>
+                </a:lnTo>
+                <a:lnTo>
+                  <a:pt x="4495676" y="1893046"/>
+                </a:lnTo>
+                <a:close/>
+              </a:path>
+            </a:pathLst>
+          </a:custGeom>
+          <a:solidFill>
+            <a:schemeClr val="bg1"/>
+          </a:solidFill>
+          <a:ln w="6350" cap="flat">
+            <a:noFill/>
+            <a:prstDash val="solid"/>
+            <a:miter/>
+          </a:ln>
+        </p:spPr>
+        <p:txBody>
+          <a:bodyPr rtlCol="0" anchor="ctr"/>
+          <a:lstStyle/>
+          <a:p>
+            <a:endParaRPr lang="en-TW"/>
+          </a:p>
+        </p:txBody>
+      </p:sp>
+      <p:sp>
+        <p:nvSpPr>
+          <p:cNvPr id="10" name="Rounded Rectangle 9">
+            <a:extLst>
+              <a:ext uri="{FF2B5EF4-FFF2-40B4-BE49-F238E27FC236}">
+                <a16:creationId xmlns:a16="http://schemas.microsoft.com/office/drawing/2014/main" id="{CFA551BC-C2E0-8E9F-A2BB-716E537FDA1A}"/>
+              </a:ext>
+            </a:extLst>
+          </p:cNvPr>
+          <p:cNvSpPr>
+            <a:spLocks noChangeAspect="1"/>
+          </p:cNvSpPr>
+          <p:nvPr/>
+        </p:nvSpPr>
+        <p:spPr>
+          <a:xfrm>
+            <a:off x="7176000" y="1988998"/>
+            <a:ext cx="360000" cy="360000"/>
+          </a:xfrm>
+          <a:prstGeom prst="roundRect">
+            <a:avLst>
+              <a:gd name="adj" fmla="val 24123"/>
+            </a:avLst>
+          </a:prstGeom>
+          <a:gradFill>
+            <a:gsLst>
+              <a:gs pos="20000">
+                <a:srgbClr val="0099CC"/>
+              </a:gs>
+              <a:gs pos="80000">
+                <a:schemeClr val="bg1">
+                  <a:lumMod val="85000"/>
+                </a:schemeClr>
+              </a:gs>
+            </a:gsLst>
+            <a:lin ang="2700000" scaled="0"/>
+          </a:gradFill>
+          <a:ln w="6350">
+            <a:noFill/>
+          </a:ln>
+        </p:spPr>
+        <p:style>
+          <a:lnRef idx="2">
+            <a:schemeClr val="accent1">
+              <a:shade val="15000"/>
+            </a:schemeClr>
+          </a:lnRef>
+          <a:fillRef idx="1">
+            <a:schemeClr val="accent1"/>
+          </a:fillRef>
+          <a:effectRef idx="0">
+            <a:schemeClr val="accent1"/>
+          </a:effectRef>
+          <a:fontRef idx="minor">
+            <a:schemeClr val="lt1"/>
+          </a:fontRef>
+        </p:style>
+        <p:txBody>
+          <a:bodyPr rtlCol="0" anchor="ctr"/>
+          <a:lstStyle/>
+          <a:p>
+            <a:pPr algn="ctr"/>
+            <a:endParaRPr lang="en-TW" dirty="0"/>
+          </a:p>
+        </p:txBody>
+      </p:sp>
+      <p:sp>
+        <p:nvSpPr>
+          <p:cNvPr id="13" name="Rounded Rectangle 12">
+            <a:extLst>
+              <a:ext uri="{FF2B5EF4-FFF2-40B4-BE49-F238E27FC236}">
+                <a16:creationId xmlns:a16="http://schemas.microsoft.com/office/drawing/2014/main" id="{53D137B4-1A0F-2859-F1E7-549DA37A929F}"/>
+              </a:ext>
+            </a:extLst>
+          </p:cNvPr>
+          <p:cNvSpPr>
+            <a:spLocks noChangeAspect="1"/>
+          </p:cNvSpPr>
+          <p:nvPr/>
+        </p:nvSpPr>
+        <p:spPr>
+          <a:xfrm>
+            <a:off x="6756000" y="1988998"/>
+            <a:ext cx="360000" cy="360000"/>
+          </a:xfrm>
+          <a:prstGeom prst="roundRect">
+            <a:avLst>
+              <a:gd name="adj" fmla="val 24123"/>
+            </a:avLst>
+          </a:prstGeom>
+          <a:solidFill>
+            <a:srgbClr val="0099CC"/>
+          </a:solidFill>
+          <a:ln w="6350">
+            <a:noFill/>
+          </a:ln>
+        </p:spPr>
+        <p:style>
+          <a:lnRef idx="2">
+            <a:schemeClr val="accent1">
+              <a:shade val="15000"/>
+            </a:schemeClr>
+          </a:lnRef>
+          <a:fillRef idx="1">
+            <a:schemeClr val="accent1"/>
+          </a:fillRef>
+          <a:effectRef idx="0">
+            <a:schemeClr val="accent1"/>
+          </a:effectRef>
+          <a:fontRef idx="minor">
+            <a:schemeClr val="lt1"/>
+          </a:fontRef>
+        </p:style>
+        <p:txBody>
+          <a:bodyPr rtlCol="0" anchor="ctr"/>
+          <a:lstStyle/>
+          <a:p>
+            <a:pPr algn="ctr"/>
+            <a:endParaRPr lang="en-TW" dirty="0"/>
+          </a:p>
+        </p:txBody>
+      </p:sp>
+      <p:sp>
+        <p:nvSpPr>
+          <p:cNvPr id="14" name="Rounded Rectangle 13">
+            <a:extLst>
+              <a:ext uri="{FF2B5EF4-FFF2-40B4-BE49-F238E27FC236}">
+                <a16:creationId xmlns:a16="http://schemas.microsoft.com/office/drawing/2014/main" id="{D4A9BCB7-694E-5F92-0E2C-EDCC14D1E051}"/>
+              </a:ext>
+            </a:extLst>
+          </p:cNvPr>
+          <p:cNvSpPr>
+            <a:spLocks noChangeAspect="1"/>
+          </p:cNvSpPr>
+          <p:nvPr/>
+        </p:nvSpPr>
+        <p:spPr>
+          <a:xfrm>
+            <a:off x="6336000" y="1988998"/>
+            <a:ext cx="360000" cy="360000"/>
+          </a:xfrm>
+          <a:prstGeom prst="roundRect">
+            <a:avLst>
+              <a:gd name="adj" fmla="val 24123"/>
+            </a:avLst>
+          </a:prstGeom>
+          <a:solidFill>
+            <a:srgbClr val="0099CC"/>
+          </a:solidFill>
+          <a:ln w="6350">
+            <a:noFill/>
+          </a:ln>
+        </p:spPr>
+        <p:style>
+          <a:lnRef idx="2">
+            <a:schemeClr val="accent1">
+              <a:shade val="15000"/>
+            </a:schemeClr>
+          </a:lnRef>
+          <a:fillRef idx="1">
+            <a:schemeClr val="accent1"/>
+          </a:fillRef>
+          <a:effectRef idx="0">
+            <a:schemeClr val="accent1"/>
+          </a:effectRef>
+          <a:fontRef idx="minor">
+            <a:schemeClr val="lt1"/>
+          </a:fontRef>
+        </p:style>
+        <p:txBody>
+          <a:bodyPr rtlCol="0" anchor="ctr"/>
+          <a:lstStyle/>
+          <a:p>
+            <a:pPr algn="ctr"/>
+            <a:endParaRPr lang="en-TW" dirty="0"/>
+          </a:p>
+        </p:txBody>
+      </p:sp>
+      <p:sp>
+        <p:nvSpPr>
+          <p:cNvPr id="15" name="Rounded Rectangle 14">
+            <a:extLst>
+              <a:ext uri="{FF2B5EF4-FFF2-40B4-BE49-F238E27FC236}">
+                <a16:creationId xmlns:a16="http://schemas.microsoft.com/office/drawing/2014/main" id="{263AE332-1542-F544-DEBB-D4D63164BB59}"/>
+              </a:ext>
+            </a:extLst>
+          </p:cNvPr>
+          <p:cNvSpPr>
+            <a:spLocks noChangeAspect="1"/>
+          </p:cNvSpPr>
+          <p:nvPr/>
+        </p:nvSpPr>
+        <p:spPr>
+          <a:xfrm>
+            <a:off x="5916000" y="1988998"/>
+            <a:ext cx="360000" cy="360000"/>
+          </a:xfrm>
+          <a:prstGeom prst="roundRect">
+            <a:avLst>
+              <a:gd name="adj" fmla="val 24123"/>
+            </a:avLst>
+          </a:prstGeom>
+          <a:gradFill>
+            <a:gsLst>
+              <a:gs pos="80000">
+                <a:srgbClr val="0099CC"/>
+              </a:gs>
+              <a:gs pos="20000">
+                <a:schemeClr val="bg1">
+                  <a:lumMod val="85000"/>
+                </a:schemeClr>
+              </a:gs>
+            </a:gsLst>
+            <a:lin ang="2700000" scaled="0"/>
+          </a:gradFill>
+          <a:ln w="6350">
+            <a:noFill/>
+          </a:ln>
+        </p:spPr>
+        <p:style>
+          <a:lnRef idx="2">
+            <a:schemeClr val="accent1">
+              <a:shade val="15000"/>
+            </a:schemeClr>
+          </a:lnRef>
+          <a:fillRef idx="1">
+            <a:schemeClr val="accent1"/>
+          </a:fillRef>
+          <a:effectRef idx="0">
+            <a:schemeClr val="accent1"/>
+          </a:effectRef>
+          <a:fontRef idx="minor">
+            <a:schemeClr val="lt1"/>
+          </a:fontRef>
+        </p:style>
+        <p:txBody>
+          <a:bodyPr rtlCol="0" anchor="ctr"/>
+          <a:lstStyle/>
+          <a:p>
+            <a:pPr algn="ctr"/>
+            <a:endParaRPr lang="en-TW" dirty="0"/>
+          </a:p>
+        </p:txBody>
+      </p:sp>
+      <p:sp>
+        <p:nvSpPr>
+          <p:cNvPr id="16" name="Rounded Rectangle 15">
+            <a:extLst>
+              <a:ext uri="{FF2B5EF4-FFF2-40B4-BE49-F238E27FC236}">
+                <a16:creationId xmlns:a16="http://schemas.microsoft.com/office/drawing/2014/main" id="{C60249DE-D698-A312-CABC-1E8DF16242B7}"/>
+              </a:ext>
+            </a:extLst>
+          </p:cNvPr>
+          <p:cNvSpPr>
+            <a:spLocks noChangeAspect="1"/>
+          </p:cNvSpPr>
+          <p:nvPr/>
+        </p:nvSpPr>
+        <p:spPr>
+          <a:xfrm>
+            <a:off x="5496000" y="1988998"/>
+            <a:ext cx="360000" cy="360000"/>
+          </a:xfrm>
+          <a:prstGeom prst="roundRect">
+            <a:avLst>
+              <a:gd name="adj" fmla="val 24123"/>
+            </a:avLst>
+          </a:prstGeom>
+          <a:solidFill>
+            <a:schemeClr val="bg1">
+              <a:lumMod val="85000"/>
+            </a:schemeClr>
+          </a:solidFill>
+          <a:ln w="6350">
+            <a:noFill/>
+          </a:ln>
+        </p:spPr>
+        <p:style>
+          <a:lnRef idx="2">
+            <a:schemeClr val="accent1">
+              <a:shade val="15000"/>
+            </a:schemeClr>
+          </a:lnRef>
+          <a:fillRef idx="1">
+            <a:schemeClr val="accent1"/>
+          </a:fillRef>
+          <a:effectRef idx="0">
+            <a:schemeClr val="accent1"/>
+          </a:effectRef>
+          <a:fontRef idx="minor">
+            <a:schemeClr val="lt1"/>
+          </a:fontRef>
+        </p:style>
+        <p:txBody>
+          <a:bodyPr rtlCol="0" anchor="ctr"/>
+          <a:lstStyle/>
+          <a:p>
+            <a:pPr algn="ctr"/>
+            <a:endParaRPr lang="en-TW" dirty="0"/>
+          </a:p>
+        </p:txBody>
+      </p:sp>
+      <p:sp>
+        <p:nvSpPr>
+          <p:cNvPr id="17" name="Rounded Rectangle 16">
+            <a:extLst>
+              <a:ext uri="{FF2B5EF4-FFF2-40B4-BE49-F238E27FC236}">
+                <a16:creationId xmlns:a16="http://schemas.microsoft.com/office/drawing/2014/main" id="{CB73E2BB-2A73-7E47-C280-910E32EE9D0A}"/>
+              </a:ext>
+            </a:extLst>
+          </p:cNvPr>
+          <p:cNvSpPr>
+            <a:spLocks noChangeAspect="1"/>
+          </p:cNvSpPr>
+          <p:nvPr/>
+        </p:nvSpPr>
+        <p:spPr>
+          <a:xfrm>
+            <a:off x="4656000" y="1988998"/>
+            <a:ext cx="360000" cy="360000"/>
+          </a:xfrm>
+          <a:prstGeom prst="roundRect">
+            <a:avLst>
+              <a:gd name="adj" fmla="val 24123"/>
+            </a:avLst>
+          </a:prstGeom>
+          <a:gradFill>
+            <a:gsLst>
+              <a:gs pos="80000">
+                <a:srgbClr val="00BEFD"/>
+              </a:gs>
+              <a:gs pos="20000">
+                <a:schemeClr val="bg1">
+                  <a:lumMod val="85000"/>
+                </a:schemeClr>
+              </a:gs>
+            </a:gsLst>
+            <a:lin ang="2700000" scaled="0"/>
+          </a:gradFill>
+          <a:ln w="6350">
+            <a:noFill/>
+          </a:ln>
+        </p:spPr>
+        <p:style>
+          <a:lnRef idx="2">
+            <a:schemeClr val="accent1">
+              <a:shade val="15000"/>
+            </a:schemeClr>
+          </a:lnRef>
+          <a:fillRef idx="1">
+            <a:schemeClr val="accent1"/>
+          </a:fillRef>
+          <a:effectRef idx="0">
+            <a:schemeClr val="accent1"/>
+          </a:effectRef>
+          <a:fontRef idx="minor">
+            <a:schemeClr val="lt1"/>
+          </a:fontRef>
+        </p:style>
+        <p:txBody>
+          <a:bodyPr rtlCol="0" anchor="ctr"/>
+          <a:lstStyle/>
+          <a:p>
+            <a:pPr algn="ctr"/>
+            <a:endParaRPr lang="en-TW" dirty="0"/>
+          </a:p>
+        </p:txBody>
+      </p:sp>
+      <p:sp>
+        <p:nvSpPr>
+          <p:cNvPr id="20" name="Rounded Rectangle 19">
+            <a:extLst>
+              <a:ext uri="{FF2B5EF4-FFF2-40B4-BE49-F238E27FC236}">
+                <a16:creationId xmlns:a16="http://schemas.microsoft.com/office/drawing/2014/main" id="{476F4F0C-1B8E-F21E-B9D2-28A01D73BFD5}"/>
+              </a:ext>
+            </a:extLst>
+          </p:cNvPr>
+          <p:cNvSpPr>
+            <a:spLocks noChangeAspect="1"/>
+          </p:cNvSpPr>
+          <p:nvPr/>
+        </p:nvSpPr>
+        <p:spPr>
+          <a:xfrm>
+            <a:off x="5076000" y="1988998"/>
+            <a:ext cx="360000" cy="360000"/>
+          </a:xfrm>
+          <a:prstGeom prst="roundRect">
+            <a:avLst>
+              <a:gd name="adj" fmla="val 24123"/>
+            </a:avLst>
+          </a:prstGeom>
+          <a:solidFill>
+            <a:schemeClr val="bg1">
+              <a:lumMod val="85000"/>
+            </a:schemeClr>
+          </a:solidFill>
+          <a:ln w="6350">
+            <a:noFill/>
+          </a:ln>
+        </p:spPr>
+        <p:style>
+          <a:lnRef idx="2">
+            <a:schemeClr val="accent1">
+              <a:shade val="15000"/>
+            </a:schemeClr>
+          </a:lnRef>
+          <a:fillRef idx="1">
+            <a:schemeClr val="accent1"/>
+          </a:fillRef>
+          <a:effectRef idx="0">
+            <a:schemeClr val="accent1"/>
+          </a:effectRef>
+          <a:fontRef idx="minor">
+            <a:schemeClr val="lt1"/>
+          </a:fontRef>
+        </p:style>
+        <p:txBody>
+          <a:bodyPr rtlCol="0" anchor="ctr"/>
+          <a:lstStyle/>
+          <a:p>
+            <a:pPr algn="ctr"/>
+            <a:endParaRPr lang="en-TW" dirty="0"/>
+          </a:p>
+        </p:txBody>
+      </p:sp>
+      <p:sp>
+        <p:nvSpPr>
+          <p:cNvPr id="30" name="Rounded Rectangle 29">
+            <a:extLst>
+              <a:ext uri="{FF2B5EF4-FFF2-40B4-BE49-F238E27FC236}">
+                <a16:creationId xmlns:a16="http://schemas.microsoft.com/office/drawing/2014/main" id="{8B076306-EC32-C6FA-1D02-738E80214A80}"/>
+              </a:ext>
+            </a:extLst>
+          </p:cNvPr>
+          <p:cNvSpPr>
+            <a:spLocks noChangeAspect="1"/>
+          </p:cNvSpPr>
+          <p:nvPr/>
+        </p:nvSpPr>
+        <p:spPr>
+          <a:xfrm>
+            <a:off x="7176000" y="2408999"/>
+            <a:ext cx="360000" cy="360000"/>
+          </a:xfrm>
+          <a:prstGeom prst="roundRect">
+            <a:avLst>
+              <a:gd name="adj" fmla="val 24123"/>
+            </a:avLst>
+          </a:prstGeom>
+          <a:solidFill>
+            <a:schemeClr val="bg1">
+              <a:lumMod val="85000"/>
+            </a:schemeClr>
+          </a:solidFill>
+          <a:ln w="6350">
+            <a:noFill/>
+          </a:ln>
+        </p:spPr>
+        <p:style>
+          <a:lnRef idx="2">
+            <a:schemeClr val="accent1">
+              <a:shade val="15000"/>
+            </a:schemeClr>
+          </a:lnRef>
+          <a:fillRef idx="1">
+            <a:schemeClr val="accent1"/>
+          </a:fillRef>
+          <a:effectRef idx="0">
+            <a:schemeClr val="accent1"/>
+          </a:effectRef>
+          <a:fontRef idx="minor">
+            <a:schemeClr val="lt1"/>
+          </a:fontRef>
+        </p:style>
+        <p:txBody>
+          <a:bodyPr rtlCol="0" anchor="ctr"/>
+          <a:lstStyle/>
+          <a:p>
+            <a:pPr algn="ctr"/>
+            <a:endParaRPr lang="en-TW" dirty="0"/>
+          </a:p>
+        </p:txBody>
+      </p:sp>
+      <p:sp>
+        <p:nvSpPr>
+          <p:cNvPr id="31" name="Rounded Rectangle 30">
+            <a:extLst>
+              <a:ext uri="{FF2B5EF4-FFF2-40B4-BE49-F238E27FC236}">
+                <a16:creationId xmlns:a16="http://schemas.microsoft.com/office/drawing/2014/main" id="{E2ECF8F9-2B0B-324D-958D-F3100E177718}"/>
+              </a:ext>
+            </a:extLst>
+          </p:cNvPr>
+          <p:cNvSpPr>
+            <a:spLocks noChangeAspect="1"/>
+          </p:cNvSpPr>
+          <p:nvPr/>
+        </p:nvSpPr>
+        <p:spPr>
+          <a:xfrm>
+            <a:off x="6756000" y="2408999"/>
+            <a:ext cx="360000" cy="360000"/>
+          </a:xfrm>
+          <a:prstGeom prst="roundRect">
+            <a:avLst>
+              <a:gd name="adj" fmla="val 24123"/>
+            </a:avLst>
+          </a:prstGeom>
+          <a:solidFill>
+            <a:schemeClr val="bg1">
+              <a:lumMod val="85000"/>
+            </a:schemeClr>
+          </a:solidFill>
+          <a:ln w="6350">
+            <a:noFill/>
+          </a:ln>
+        </p:spPr>
+        <p:style>
+          <a:lnRef idx="2">
+            <a:schemeClr val="accent1">
+              <a:shade val="15000"/>
+            </a:schemeClr>
+          </a:lnRef>
+          <a:fillRef idx="1">
+            <a:schemeClr val="accent1"/>
+          </a:fillRef>
+          <a:effectRef idx="0">
+            <a:schemeClr val="accent1"/>
+          </a:effectRef>
+          <a:fontRef idx="minor">
+            <a:schemeClr val="lt1"/>
+          </a:fontRef>
+        </p:style>
+        <p:txBody>
+          <a:bodyPr rtlCol="0" anchor="ctr"/>
+          <a:lstStyle/>
+          <a:p>
+            <a:pPr algn="ctr"/>
+            <a:endParaRPr lang="en-TW" dirty="0"/>
+          </a:p>
+        </p:txBody>
+      </p:sp>
+      <p:sp>
+        <p:nvSpPr>
+          <p:cNvPr id="32" name="Rounded Rectangle 31">
+            <a:extLst>
+              <a:ext uri="{FF2B5EF4-FFF2-40B4-BE49-F238E27FC236}">
+                <a16:creationId xmlns:a16="http://schemas.microsoft.com/office/drawing/2014/main" id="{9E4F7047-D6BC-E41B-E530-7B14BAEA9E20}"/>
+              </a:ext>
+            </a:extLst>
+          </p:cNvPr>
+          <p:cNvSpPr>
+            <a:spLocks noChangeAspect="1"/>
+          </p:cNvSpPr>
+          <p:nvPr/>
+        </p:nvSpPr>
+        <p:spPr>
+          <a:xfrm>
+            <a:off x="6336000" y="2408999"/>
+            <a:ext cx="360000" cy="360000"/>
+          </a:xfrm>
+          <a:prstGeom prst="roundRect">
+            <a:avLst>
+              <a:gd name="adj" fmla="val 24123"/>
+            </a:avLst>
+          </a:prstGeom>
+          <a:gradFill>
+            <a:gsLst>
+              <a:gs pos="20000">
+                <a:srgbClr val="0099CC"/>
+              </a:gs>
+              <a:gs pos="80000">
+                <a:schemeClr val="bg1">
+                  <a:lumMod val="85000"/>
+                </a:schemeClr>
+              </a:gs>
+            </a:gsLst>
+            <a:lin ang="2700000" scaled="0"/>
+          </a:gradFill>
+          <a:ln w="6350">
+            <a:noFill/>
+          </a:ln>
+        </p:spPr>
+        <p:style>
+          <a:lnRef idx="2">
+            <a:schemeClr val="accent1">
+              <a:shade val="15000"/>
+            </a:schemeClr>
+          </a:lnRef>
+          <a:fillRef idx="1">
+            <a:schemeClr val="accent1"/>
+          </a:fillRef>
+          <a:effectRef idx="0">
+            <a:schemeClr val="accent1"/>
+          </a:effectRef>
+          <a:fontRef idx="minor">
+            <a:schemeClr val="lt1"/>
+          </a:fontRef>
+        </p:style>
+        <p:txBody>
+          <a:bodyPr rtlCol="0" anchor="ctr"/>
+          <a:lstStyle/>
+          <a:p>
+            <a:pPr algn="ctr"/>
+            <a:endParaRPr lang="en-TW" dirty="0"/>
+          </a:p>
+        </p:txBody>
+      </p:sp>
+      <p:sp>
+        <p:nvSpPr>
+          <p:cNvPr id="33" name="Rounded Rectangle 32">
+            <a:extLst>
+              <a:ext uri="{FF2B5EF4-FFF2-40B4-BE49-F238E27FC236}">
+                <a16:creationId xmlns:a16="http://schemas.microsoft.com/office/drawing/2014/main" id="{B25C5D50-BAE0-B99D-C488-FC876588A871}"/>
+              </a:ext>
+            </a:extLst>
+          </p:cNvPr>
+          <p:cNvSpPr>
+            <a:spLocks noChangeAspect="1"/>
+          </p:cNvSpPr>
+          <p:nvPr/>
+        </p:nvSpPr>
+        <p:spPr>
+          <a:xfrm>
+            <a:off x="5916000" y="2408999"/>
+            <a:ext cx="360000" cy="360000"/>
+          </a:xfrm>
+          <a:prstGeom prst="roundRect">
+            <a:avLst>
+              <a:gd name="adj" fmla="val 24123"/>
+            </a:avLst>
+          </a:prstGeom>
+          <a:solidFill>
+            <a:srgbClr val="0099CC"/>
+          </a:solidFill>
+          <a:ln w="6350">
+            <a:noFill/>
+          </a:ln>
+        </p:spPr>
+        <p:style>
+          <a:lnRef idx="2">
+            <a:schemeClr val="accent1">
+              <a:shade val="15000"/>
+            </a:schemeClr>
+          </a:lnRef>
+          <a:fillRef idx="1">
+            <a:schemeClr val="accent1"/>
+          </a:fillRef>
+          <a:effectRef idx="0">
+            <a:schemeClr val="accent1"/>
+          </a:effectRef>
+          <a:fontRef idx="minor">
+            <a:schemeClr val="lt1"/>
+          </a:fontRef>
+        </p:style>
+        <p:txBody>
+          <a:bodyPr rtlCol="0" anchor="ctr"/>
+          <a:lstStyle/>
+          <a:p>
+            <a:pPr algn="ctr"/>
+            <a:endParaRPr lang="en-TW" dirty="0"/>
+          </a:p>
+        </p:txBody>
+      </p:sp>
+      <p:sp>
+        <p:nvSpPr>
+          <p:cNvPr id="34" name="Rounded Rectangle 33">
+            <a:extLst>
+              <a:ext uri="{FF2B5EF4-FFF2-40B4-BE49-F238E27FC236}">
+                <a16:creationId xmlns:a16="http://schemas.microsoft.com/office/drawing/2014/main" id="{5018B3FF-7CEE-E2AD-A497-6B32E9D1415A}"/>
+              </a:ext>
+            </a:extLst>
+          </p:cNvPr>
+          <p:cNvSpPr>
+            <a:spLocks noChangeAspect="1"/>
+          </p:cNvSpPr>
+          <p:nvPr/>
+        </p:nvSpPr>
+        <p:spPr>
+          <a:xfrm>
+            <a:off x="5496000" y="2408999"/>
+            <a:ext cx="360000" cy="360000"/>
+          </a:xfrm>
+          <a:prstGeom prst="roundRect">
+            <a:avLst>
+              <a:gd name="adj" fmla="val 24123"/>
+            </a:avLst>
+          </a:prstGeom>
+          <a:solidFill>
+            <a:schemeClr val="bg1">
+              <a:lumMod val="85000"/>
+            </a:schemeClr>
+          </a:solidFill>
+          <a:ln w="6350">
+            <a:noFill/>
+          </a:ln>
+        </p:spPr>
+        <p:style>
+          <a:lnRef idx="2">
+            <a:schemeClr val="accent1">
+              <a:shade val="15000"/>
+            </a:schemeClr>
+          </a:lnRef>
+          <a:fillRef idx="1">
+            <a:schemeClr val="accent1"/>
+          </a:fillRef>
+          <a:effectRef idx="0">
+            <a:schemeClr val="accent1"/>
+          </a:effectRef>
+          <a:fontRef idx="minor">
+            <a:schemeClr val="lt1"/>
+          </a:fontRef>
+        </p:style>
+        <p:txBody>
+          <a:bodyPr rtlCol="0" anchor="ctr"/>
+          <a:lstStyle/>
+          <a:p>
+            <a:pPr algn="ctr"/>
+            <a:endParaRPr lang="en-TW" dirty="0"/>
+          </a:p>
+        </p:txBody>
+      </p:sp>
+      <p:sp>
+        <p:nvSpPr>
+          <p:cNvPr id="35" name="Rounded Rectangle 34">
+            <a:extLst>
+              <a:ext uri="{FF2B5EF4-FFF2-40B4-BE49-F238E27FC236}">
+                <a16:creationId xmlns:a16="http://schemas.microsoft.com/office/drawing/2014/main" id="{1C211335-2935-77DC-95FF-38A36BDDE743}"/>
+              </a:ext>
+            </a:extLst>
+          </p:cNvPr>
+          <p:cNvSpPr>
+            <a:spLocks noChangeAspect="1"/>
+          </p:cNvSpPr>
+          <p:nvPr/>
+        </p:nvSpPr>
+        <p:spPr>
+          <a:xfrm>
+            <a:off x="4656000" y="2408999"/>
+            <a:ext cx="360000" cy="360000"/>
+          </a:xfrm>
+          <a:prstGeom prst="roundRect">
+            <a:avLst>
+              <a:gd name="adj" fmla="val 24123"/>
+            </a:avLst>
+          </a:prstGeom>
+          <a:solidFill>
+            <a:srgbClr val="00BEFD"/>
+          </a:solidFill>
+          <a:ln w="6350">
+            <a:noFill/>
+          </a:ln>
+        </p:spPr>
+        <p:style>
+          <a:lnRef idx="2">
+            <a:schemeClr val="accent1">
+              <a:shade val="15000"/>
+            </a:schemeClr>
+          </a:lnRef>
+          <a:fillRef idx="1">
+            <a:schemeClr val="accent1"/>
+          </a:fillRef>
+          <a:effectRef idx="0">
+            <a:schemeClr val="accent1"/>
+          </a:effectRef>
+          <a:fontRef idx="minor">
+            <a:schemeClr val="lt1"/>
+          </a:fontRef>
+        </p:style>
+        <p:txBody>
+          <a:bodyPr rtlCol="0" anchor="ctr"/>
+          <a:lstStyle/>
+          <a:p>
+            <a:pPr algn="ctr"/>
+            <a:endParaRPr lang="en-TW" dirty="0"/>
+          </a:p>
+        </p:txBody>
+      </p:sp>
+      <p:sp>
+        <p:nvSpPr>
+          <p:cNvPr id="36" name="Rounded Rectangle 35">
+            <a:extLst>
+              <a:ext uri="{FF2B5EF4-FFF2-40B4-BE49-F238E27FC236}">
+                <a16:creationId xmlns:a16="http://schemas.microsoft.com/office/drawing/2014/main" id="{EAA90958-223C-BA13-781E-D6D846503F42}"/>
+              </a:ext>
+            </a:extLst>
+          </p:cNvPr>
+          <p:cNvSpPr>
+            <a:spLocks noChangeAspect="1"/>
+          </p:cNvSpPr>
+          <p:nvPr/>
+        </p:nvSpPr>
+        <p:spPr>
+          <a:xfrm>
+            <a:off x="5076000" y="2408999"/>
+            <a:ext cx="360000" cy="360000"/>
+          </a:xfrm>
+          <a:prstGeom prst="roundRect">
+            <a:avLst>
+              <a:gd name="adj" fmla="val 24123"/>
+            </a:avLst>
+          </a:prstGeom>
+          <a:solidFill>
+            <a:schemeClr val="bg1">
+              <a:lumMod val="85000"/>
+            </a:schemeClr>
+          </a:solidFill>
+          <a:ln w="6350">
+            <a:noFill/>
+          </a:ln>
+        </p:spPr>
+        <p:style>
+          <a:lnRef idx="2">
+            <a:schemeClr val="accent1">
+              <a:shade val="15000"/>
+            </a:schemeClr>
+          </a:lnRef>
+          <a:fillRef idx="1">
+            <a:schemeClr val="accent1"/>
+          </a:fillRef>
+          <a:effectRef idx="0">
+            <a:schemeClr val="accent1"/>
+          </a:effectRef>
+          <a:fontRef idx="minor">
+            <a:schemeClr val="lt1"/>
+          </a:fontRef>
+        </p:style>
+        <p:txBody>
+          <a:bodyPr rtlCol="0" anchor="ctr"/>
+          <a:lstStyle/>
+          <a:p>
+            <a:pPr algn="ctr"/>
+            <a:endParaRPr lang="en-TW" dirty="0"/>
+          </a:p>
+        </p:txBody>
+      </p:sp>
+      <p:sp>
+        <p:nvSpPr>
+          <p:cNvPr id="38" name="Rounded Rectangle 37">
+            <a:extLst>
+              <a:ext uri="{FF2B5EF4-FFF2-40B4-BE49-F238E27FC236}">
+                <a16:creationId xmlns:a16="http://schemas.microsoft.com/office/drawing/2014/main" id="{A791F307-4184-FD10-33F8-DAF335DCF4DD}"/>
+              </a:ext>
+            </a:extLst>
+          </p:cNvPr>
+          <p:cNvSpPr>
+            <a:spLocks noChangeAspect="1"/>
+          </p:cNvSpPr>
+          <p:nvPr/>
+        </p:nvSpPr>
+        <p:spPr>
+          <a:xfrm>
+            <a:off x="7176000" y="2829000"/>
+            <a:ext cx="360000" cy="360000"/>
+          </a:xfrm>
+          <a:prstGeom prst="roundRect">
+            <a:avLst>
+              <a:gd name="adj" fmla="val 24123"/>
+            </a:avLst>
+          </a:prstGeom>
+          <a:solidFill>
+            <a:schemeClr val="bg1">
+              <a:lumMod val="85000"/>
+            </a:schemeClr>
+          </a:solidFill>
+          <a:ln w="6350">
+            <a:noFill/>
+          </a:ln>
+        </p:spPr>
+        <p:style>
+          <a:lnRef idx="2">
+            <a:schemeClr val="accent1">
+              <a:shade val="15000"/>
+            </a:schemeClr>
+          </a:lnRef>
+          <a:fillRef idx="1">
+            <a:schemeClr val="accent1"/>
+          </a:fillRef>
+          <a:effectRef idx="0">
+            <a:schemeClr val="accent1"/>
+          </a:effectRef>
+          <a:fontRef idx="minor">
+            <a:schemeClr val="lt1"/>
+          </a:fontRef>
+        </p:style>
+        <p:txBody>
+          <a:bodyPr rtlCol="0" anchor="ctr"/>
+          <a:lstStyle/>
+          <a:p>
+            <a:pPr algn="ctr"/>
+            <a:endParaRPr lang="en-TW" dirty="0"/>
+          </a:p>
+        </p:txBody>
+      </p:sp>
+      <p:sp>
+        <p:nvSpPr>
+          <p:cNvPr id="39" name="Rounded Rectangle 38">
+            <a:extLst>
+              <a:ext uri="{FF2B5EF4-FFF2-40B4-BE49-F238E27FC236}">
+                <a16:creationId xmlns:a16="http://schemas.microsoft.com/office/drawing/2014/main" id="{7F7C805D-F214-F15E-F458-C1FCC259E470}"/>
+              </a:ext>
+            </a:extLst>
+          </p:cNvPr>
+          <p:cNvSpPr>
+            <a:spLocks noChangeAspect="1"/>
+          </p:cNvSpPr>
+          <p:nvPr/>
+        </p:nvSpPr>
+        <p:spPr>
+          <a:xfrm>
+            <a:off x="6756000" y="2829000"/>
+            <a:ext cx="360000" cy="360000"/>
+          </a:xfrm>
+          <a:prstGeom prst="roundRect">
+            <a:avLst>
+              <a:gd name="adj" fmla="val 24123"/>
+            </a:avLst>
+          </a:prstGeom>
+          <a:solidFill>
+            <a:schemeClr val="bg1">
+              <a:lumMod val="85000"/>
+            </a:schemeClr>
+          </a:solidFill>
+          <a:ln w="6350">
+            <a:noFill/>
+          </a:ln>
+        </p:spPr>
+        <p:style>
+          <a:lnRef idx="2">
+            <a:schemeClr val="accent1">
+              <a:shade val="15000"/>
+            </a:schemeClr>
+          </a:lnRef>
+          <a:fillRef idx="1">
+            <a:schemeClr val="accent1"/>
+          </a:fillRef>
+          <a:effectRef idx="0">
+            <a:schemeClr val="accent1"/>
+          </a:effectRef>
+          <a:fontRef idx="minor">
+            <a:schemeClr val="lt1"/>
+          </a:fontRef>
+        </p:style>
+        <p:txBody>
+          <a:bodyPr rtlCol="0" anchor="ctr"/>
+          <a:lstStyle/>
+          <a:p>
+            <a:pPr algn="ctr"/>
+            <a:endParaRPr lang="en-TW" dirty="0"/>
+          </a:p>
+        </p:txBody>
+      </p:sp>
+      <p:sp>
+        <p:nvSpPr>
+          <p:cNvPr id="40" name="Rounded Rectangle 39">
+            <a:extLst>
+              <a:ext uri="{FF2B5EF4-FFF2-40B4-BE49-F238E27FC236}">
+                <a16:creationId xmlns:a16="http://schemas.microsoft.com/office/drawing/2014/main" id="{44B42EB9-8FD5-F445-66BE-40F5E1639FDA}"/>
+              </a:ext>
+            </a:extLst>
+          </p:cNvPr>
+          <p:cNvSpPr>
+            <a:spLocks noChangeAspect="1"/>
+          </p:cNvSpPr>
+          <p:nvPr/>
+        </p:nvSpPr>
+        <p:spPr>
+          <a:xfrm>
+            <a:off x="6336000" y="2829000"/>
+            <a:ext cx="360000" cy="360000"/>
+          </a:xfrm>
+          <a:prstGeom prst="roundRect">
+            <a:avLst>
+              <a:gd name="adj" fmla="val 24123"/>
+            </a:avLst>
+          </a:prstGeom>
+          <a:solidFill>
+            <a:schemeClr val="bg1">
+              <a:lumMod val="85000"/>
+            </a:schemeClr>
+          </a:solidFill>
+          <a:ln w="6350">
+            <a:noFill/>
+          </a:ln>
+        </p:spPr>
+        <p:style>
+          <a:lnRef idx="2">
+            <a:schemeClr val="accent1">
+              <a:shade val="15000"/>
+            </a:schemeClr>
+          </a:lnRef>
+          <a:fillRef idx="1">
+            <a:schemeClr val="accent1"/>
+          </a:fillRef>
+          <a:effectRef idx="0">
+            <a:schemeClr val="accent1"/>
+          </a:effectRef>
+          <a:fontRef idx="minor">
+            <a:schemeClr val="lt1"/>
+          </a:fontRef>
+        </p:style>
+        <p:txBody>
+          <a:bodyPr rtlCol="0" anchor="ctr"/>
+          <a:lstStyle/>
+          <a:p>
+            <a:pPr algn="ctr"/>
+            <a:endParaRPr lang="en-TW" dirty="0"/>
+          </a:p>
+        </p:txBody>
+      </p:sp>
+      <p:sp>
+        <p:nvSpPr>
+          <p:cNvPr id="41" name="Rounded Rectangle 40">
+            <a:extLst>
+              <a:ext uri="{FF2B5EF4-FFF2-40B4-BE49-F238E27FC236}">
+                <a16:creationId xmlns:a16="http://schemas.microsoft.com/office/drawing/2014/main" id="{4C0E67B5-9E98-A270-E8C1-4CAE9E73E37D}"/>
+              </a:ext>
+            </a:extLst>
+          </p:cNvPr>
+          <p:cNvSpPr>
+            <a:spLocks noChangeAspect="1"/>
+          </p:cNvSpPr>
+          <p:nvPr/>
+        </p:nvSpPr>
+        <p:spPr>
+          <a:xfrm>
+            <a:off x="5916000" y="2829000"/>
+            <a:ext cx="360000" cy="360000"/>
+          </a:xfrm>
+          <a:prstGeom prst="roundRect">
+            <a:avLst>
+              <a:gd name="adj" fmla="val 24123"/>
+            </a:avLst>
+          </a:prstGeom>
+          <a:solidFill>
+            <a:srgbClr val="0099CC"/>
+          </a:solidFill>
+          <a:ln w="6350">
+            <a:noFill/>
+          </a:ln>
+        </p:spPr>
+        <p:style>
+          <a:lnRef idx="2">
+            <a:schemeClr val="accent1">
+              <a:shade val="15000"/>
+            </a:schemeClr>
+          </a:lnRef>
+          <a:fillRef idx="1">
+            <a:schemeClr val="accent1"/>
+          </a:fillRef>
+          <a:effectRef idx="0">
+            <a:schemeClr val="accent1"/>
+          </a:effectRef>
+          <a:fontRef idx="minor">
+            <a:schemeClr val="lt1"/>
+          </a:fontRef>
+        </p:style>
+        <p:txBody>
+          <a:bodyPr rtlCol="0" anchor="ctr"/>
+          <a:lstStyle/>
+          <a:p>
+            <a:pPr algn="ctr"/>
+            <a:endParaRPr lang="en-TW" dirty="0"/>
+          </a:p>
+        </p:txBody>
+      </p:sp>
+      <p:sp>
+        <p:nvSpPr>
+          <p:cNvPr id="42" name="Rounded Rectangle 41">
+            <a:extLst>
+              <a:ext uri="{FF2B5EF4-FFF2-40B4-BE49-F238E27FC236}">
+                <a16:creationId xmlns:a16="http://schemas.microsoft.com/office/drawing/2014/main" id="{2658F7DC-0586-FDB0-EFC4-55EAA7952183}"/>
+              </a:ext>
+            </a:extLst>
+          </p:cNvPr>
+          <p:cNvSpPr>
+            <a:spLocks noChangeAspect="1"/>
+          </p:cNvSpPr>
+          <p:nvPr/>
+        </p:nvSpPr>
+        <p:spPr>
+          <a:xfrm>
+            <a:off x="5496000" y="2829000"/>
+            <a:ext cx="360000" cy="360000"/>
+          </a:xfrm>
+          <a:prstGeom prst="roundRect">
+            <a:avLst>
+              <a:gd name="adj" fmla="val 24123"/>
+            </a:avLst>
+          </a:prstGeom>
+          <a:solidFill>
+            <a:schemeClr val="bg1">
+              <a:lumMod val="85000"/>
+            </a:schemeClr>
+          </a:solidFill>
+          <a:ln w="6350">
+            <a:noFill/>
+          </a:ln>
+        </p:spPr>
+        <p:style>
+          <a:lnRef idx="2">
+            <a:schemeClr val="accent1">
+              <a:shade val="15000"/>
+            </a:schemeClr>
+          </a:lnRef>
+          <a:fillRef idx="1">
+            <a:schemeClr val="accent1"/>
+          </a:fillRef>
+          <a:effectRef idx="0">
+            <a:schemeClr val="accent1"/>
+          </a:effectRef>
+          <a:fontRef idx="minor">
+            <a:schemeClr val="lt1"/>
+          </a:fontRef>
+        </p:style>
+        <p:txBody>
+          <a:bodyPr rtlCol="0" anchor="ctr"/>
+          <a:lstStyle/>
+          <a:p>
+            <a:pPr algn="ctr"/>
+            <a:endParaRPr lang="en-TW" dirty="0"/>
+          </a:p>
+        </p:txBody>
+      </p:sp>
+      <p:sp>
+        <p:nvSpPr>
+          <p:cNvPr id="43" name="Rounded Rectangle 42">
+            <a:extLst>
+              <a:ext uri="{FF2B5EF4-FFF2-40B4-BE49-F238E27FC236}">
+                <a16:creationId xmlns:a16="http://schemas.microsoft.com/office/drawing/2014/main" id="{AC60C6EA-AF21-27F0-6B97-E010B56FF9D3}"/>
+              </a:ext>
+            </a:extLst>
+          </p:cNvPr>
+          <p:cNvSpPr>
+            <a:spLocks noChangeAspect="1"/>
+          </p:cNvSpPr>
+          <p:nvPr/>
+        </p:nvSpPr>
+        <p:spPr>
+          <a:xfrm>
+            <a:off x="4656000" y="2829000"/>
+            <a:ext cx="360000" cy="360000"/>
+          </a:xfrm>
+          <a:prstGeom prst="roundRect">
+            <a:avLst>
+              <a:gd name="adj" fmla="val 24123"/>
+            </a:avLst>
+          </a:prstGeom>
+          <a:solidFill>
+            <a:srgbClr val="00BEFD"/>
+          </a:solidFill>
+          <a:ln w="6350">
+            <a:noFill/>
+          </a:ln>
+        </p:spPr>
+        <p:style>
+          <a:lnRef idx="2">
+            <a:schemeClr val="accent1">
+              <a:shade val="15000"/>
+            </a:schemeClr>
+          </a:lnRef>
+          <a:fillRef idx="1">
+            <a:schemeClr val="accent1"/>
+          </a:fillRef>
+          <a:effectRef idx="0">
+            <a:schemeClr val="accent1"/>
+          </a:effectRef>
+          <a:fontRef idx="minor">
+            <a:schemeClr val="lt1"/>
+          </a:fontRef>
+        </p:style>
+        <p:txBody>
+          <a:bodyPr rtlCol="0" anchor="ctr"/>
+          <a:lstStyle/>
+          <a:p>
+            <a:pPr algn="ctr"/>
+            <a:endParaRPr lang="en-TW" dirty="0"/>
+          </a:p>
+        </p:txBody>
+      </p:sp>
+      <p:sp>
+        <p:nvSpPr>
+          <p:cNvPr id="44" name="Rounded Rectangle 43">
+            <a:extLst>
+              <a:ext uri="{FF2B5EF4-FFF2-40B4-BE49-F238E27FC236}">
+                <a16:creationId xmlns:a16="http://schemas.microsoft.com/office/drawing/2014/main" id="{6FA86B63-D099-9921-FABC-2035659584CC}"/>
+              </a:ext>
+            </a:extLst>
+          </p:cNvPr>
+          <p:cNvSpPr>
+            <a:spLocks noChangeAspect="1"/>
+          </p:cNvSpPr>
+          <p:nvPr/>
+        </p:nvSpPr>
+        <p:spPr>
+          <a:xfrm>
+            <a:off x="5076000" y="2829000"/>
+            <a:ext cx="360000" cy="360000"/>
+          </a:xfrm>
+          <a:prstGeom prst="roundRect">
+            <a:avLst>
+              <a:gd name="adj" fmla="val 24123"/>
+            </a:avLst>
+          </a:prstGeom>
+          <a:solidFill>
+            <a:schemeClr val="bg1">
+              <a:lumMod val="85000"/>
+            </a:schemeClr>
+          </a:solidFill>
+          <a:ln w="6350">
+            <a:noFill/>
+          </a:ln>
+        </p:spPr>
+        <p:style>
+          <a:lnRef idx="2">
+            <a:schemeClr val="accent1">
+              <a:shade val="15000"/>
+            </a:schemeClr>
+          </a:lnRef>
+          <a:fillRef idx="1">
+            <a:schemeClr val="accent1"/>
+          </a:fillRef>
+          <a:effectRef idx="0">
+            <a:schemeClr val="accent1"/>
+          </a:effectRef>
+          <a:fontRef idx="minor">
+            <a:schemeClr val="lt1"/>
+          </a:fontRef>
+        </p:style>
+        <p:txBody>
+          <a:bodyPr rtlCol="0" anchor="ctr"/>
+          <a:lstStyle/>
+          <a:p>
+            <a:pPr algn="ctr"/>
+            <a:endParaRPr lang="en-TW" dirty="0"/>
+          </a:p>
+        </p:txBody>
+      </p:sp>
+      <p:sp>
+        <p:nvSpPr>
+          <p:cNvPr id="46" name="Rounded Rectangle 45">
+            <a:extLst>
+              <a:ext uri="{FF2B5EF4-FFF2-40B4-BE49-F238E27FC236}">
+                <a16:creationId xmlns:a16="http://schemas.microsoft.com/office/drawing/2014/main" id="{5EFF3092-4CD9-E2E2-E961-FB5B1B1E1A17}"/>
+              </a:ext>
+            </a:extLst>
+          </p:cNvPr>
+          <p:cNvSpPr>
+            <a:spLocks noChangeAspect="1"/>
+          </p:cNvSpPr>
+          <p:nvPr/>
+        </p:nvSpPr>
+        <p:spPr>
+          <a:xfrm>
+            <a:off x="7176000" y="3249001"/>
+            <a:ext cx="360000" cy="360000"/>
+          </a:xfrm>
+          <a:prstGeom prst="roundRect">
+            <a:avLst>
+              <a:gd name="adj" fmla="val 24123"/>
+            </a:avLst>
+          </a:prstGeom>
+          <a:gradFill>
+            <a:gsLst>
+              <a:gs pos="20000">
+                <a:srgbClr val="0099CC"/>
+              </a:gs>
+              <a:gs pos="80000">
+                <a:schemeClr val="bg1">
+                  <a:lumMod val="85000"/>
+                </a:schemeClr>
+              </a:gs>
+            </a:gsLst>
+            <a:lin ang="2700000" scaled="0"/>
+          </a:gradFill>
+          <a:ln w="6350">
+            <a:noFill/>
+          </a:ln>
+        </p:spPr>
+        <p:style>
+          <a:lnRef idx="2">
+            <a:schemeClr val="accent1">
+              <a:shade val="15000"/>
+            </a:schemeClr>
+          </a:lnRef>
+          <a:fillRef idx="1">
+            <a:schemeClr val="accent1"/>
+          </a:fillRef>
+          <a:effectRef idx="0">
+            <a:schemeClr val="accent1"/>
+          </a:effectRef>
+          <a:fontRef idx="minor">
+            <a:schemeClr val="lt1"/>
+          </a:fontRef>
+        </p:style>
+        <p:txBody>
+          <a:bodyPr rtlCol="0" anchor="ctr"/>
+          <a:lstStyle/>
+          <a:p>
+            <a:pPr algn="ctr"/>
+            <a:endParaRPr lang="en-TW" dirty="0"/>
+          </a:p>
+        </p:txBody>
+      </p:sp>
+      <p:sp>
+        <p:nvSpPr>
+          <p:cNvPr id="47" name="Rounded Rectangle 46">
+            <a:extLst>
+              <a:ext uri="{FF2B5EF4-FFF2-40B4-BE49-F238E27FC236}">
+                <a16:creationId xmlns:a16="http://schemas.microsoft.com/office/drawing/2014/main" id="{310B7F7D-1B81-2AA7-20EE-DC3B6A348750}"/>
+              </a:ext>
+            </a:extLst>
+          </p:cNvPr>
+          <p:cNvSpPr>
+            <a:spLocks noChangeAspect="1"/>
+          </p:cNvSpPr>
+          <p:nvPr/>
+        </p:nvSpPr>
+        <p:spPr>
+          <a:xfrm>
+            <a:off x="6756000" y="3249001"/>
+            <a:ext cx="360000" cy="360000"/>
+          </a:xfrm>
+          <a:prstGeom prst="roundRect">
+            <a:avLst>
+              <a:gd name="adj" fmla="val 24123"/>
+            </a:avLst>
+          </a:prstGeom>
+          <a:solidFill>
+            <a:srgbClr val="0099CC"/>
+          </a:solidFill>
+          <a:ln w="6350">
+            <a:noFill/>
+          </a:ln>
+        </p:spPr>
+        <p:style>
+          <a:lnRef idx="2">
+            <a:schemeClr val="accent1">
+              <a:shade val="15000"/>
+            </a:schemeClr>
+          </a:lnRef>
+          <a:fillRef idx="1">
+            <a:schemeClr val="accent1"/>
+          </a:fillRef>
+          <a:effectRef idx="0">
+            <a:schemeClr val="accent1"/>
+          </a:effectRef>
+          <a:fontRef idx="minor">
+            <a:schemeClr val="lt1"/>
+          </a:fontRef>
+        </p:style>
+        <p:txBody>
+          <a:bodyPr rtlCol="0" anchor="ctr"/>
+          <a:lstStyle/>
+          <a:p>
+            <a:pPr algn="ctr"/>
+            <a:endParaRPr lang="en-TW" dirty="0"/>
+          </a:p>
+        </p:txBody>
+      </p:sp>
+      <p:sp>
+        <p:nvSpPr>
+          <p:cNvPr id="48" name="Rounded Rectangle 47">
+            <a:extLst>
+              <a:ext uri="{FF2B5EF4-FFF2-40B4-BE49-F238E27FC236}">
+                <a16:creationId xmlns:a16="http://schemas.microsoft.com/office/drawing/2014/main" id="{584D1AA6-E9F6-E58F-95A2-F486E59800DE}"/>
+              </a:ext>
+            </a:extLst>
+          </p:cNvPr>
+          <p:cNvSpPr>
+            <a:spLocks noChangeAspect="1"/>
+          </p:cNvSpPr>
+          <p:nvPr/>
+        </p:nvSpPr>
+        <p:spPr>
+          <a:xfrm>
+            <a:off x="6336000" y="3249001"/>
+            <a:ext cx="360000" cy="360000"/>
+          </a:xfrm>
+          <a:prstGeom prst="roundRect">
+            <a:avLst>
+              <a:gd name="adj" fmla="val 24123"/>
+            </a:avLst>
+          </a:prstGeom>
+          <a:solidFill>
+            <a:srgbClr val="0099CC"/>
+          </a:solidFill>
+          <a:ln w="6350">
+            <a:noFill/>
+          </a:ln>
+        </p:spPr>
+        <p:style>
+          <a:lnRef idx="2">
+            <a:schemeClr val="accent1">
+              <a:shade val="15000"/>
+            </a:schemeClr>
+          </a:lnRef>
+          <a:fillRef idx="1">
+            <a:schemeClr val="accent1"/>
+          </a:fillRef>
+          <a:effectRef idx="0">
+            <a:schemeClr val="accent1"/>
+          </a:effectRef>
+          <a:fontRef idx="minor">
+            <a:schemeClr val="lt1"/>
+          </a:fontRef>
+        </p:style>
+        <p:txBody>
+          <a:bodyPr rtlCol="0" anchor="ctr"/>
+          <a:lstStyle/>
+          <a:p>
+            <a:pPr algn="ctr"/>
+            <a:endParaRPr lang="en-TW" dirty="0"/>
+          </a:p>
+        </p:txBody>
+      </p:sp>
+      <p:sp>
+        <p:nvSpPr>
+          <p:cNvPr id="49" name="Rounded Rectangle 48">
+            <a:extLst>
+              <a:ext uri="{FF2B5EF4-FFF2-40B4-BE49-F238E27FC236}">
+                <a16:creationId xmlns:a16="http://schemas.microsoft.com/office/drawing/2014/main" id="{3C1A859D-F4E0-36D1-D3D9-E36428896090}"/>
+              </a:ext>
+            </a:extLst>
+          </p:cNvPr>
+          <p:cNvSpPr>
+            <a:spLocks noChangeAspect="1"/>
+          </p:cNvSpPr>
+          <p:nvPr/>
+        </p:nvSpPr>
+        <p:spPr>
+          <a:xfrm>
+            <a:off x="5916000" y="3249001"/>
+            <a:ext cx="360000" cy="360000"/>
+          </a:xfrm>
+          <a:prstGeom prst="roundRect">
+            <a:avLst>
+              <a:gd name="adj" fmla="val 24123"/>
+            </a:avLst>
+          </a:prstGeom>
+          <a:solidFill>
+            <a:srgbClr val="0099CC"/>
+          </a:solidFill>
+          <a:ln w="6350">
+            <a:noFill/>
+          </a:ln>
+        </p:spPr>
+        <p:style>
+          <a:lnRef idx="2">
+            <a:schemeClr val="accent1">
+              <a:shade val="15000"/>
+            </a:schemeClr>
+          </a:lnRef>
+          <a:fillRef idx="1">
+            <a:schemeClr val="accent1"/>
+          </a:fillRef>
+          <a:effectRef idx="0">
+            <a:schemeClr val="accent1"/>
+          </a:effectRef>
+          <a:fontRef idx="minor">
+            <a:schemeClr val="lt1"/>
+          </a:fontRef>
+        </p:style>
+        <p:txBody>
+          <a:bodyPr rtlCol="0" anchor="ctr"/>
+          <a:lstStyle/>
+          <a:p>
+            <a:pPr algn="ctr"/>
+            <a:endParaRPr lang="en-TW" dirty="0"/>
+          </a:p>
+        </p:txBody>
+      </p:sp>
+      <p:sp>
+        <p:nvSpPr>
+          <p:cNvPr id="50" name="Rounded Rectangle 49">
+            <a:extLst>
+              <a:ext uri="{FF2B5EF4-FFF2-40B4-BE49-F238E27FC236}">
+                <a16:creationId xmlns:a16="http://schemas.microsoft.com/office/drawing/2014/main" id="{608E8E70-ACC1-C541-6589-D4B7FF2A869C}"/>
+              </a:ext>
+            </a:extLst>
+          </p:cNvPr>
+          <p:cNvSpPr>
+            <a:spLocks noChangeAspect="1"/>
+          </p:cNvSpPr>
+          <p:nvPr/>
+        </p:nvSpPr>
+        <p:spPr>
+          <a:xfrm>
+            <a:off x="5496000" y="3249001"/>
+            <a:ext cx="360000" cy="360000"/>
+          </a:xfrm>
+          <a:prstGeom prst="roundRect">
+            <a:avLst>
+              <a:gd name="adj" fmla="val 24123"/>
+            </a:avLst>
+          </a:prstGeom>
+          <a:solidFill>
+            <a:schemeClr val="bg1">
+              <a:lumMod val="85000"/>
+            </a:schemeClr>
+          </a:solidFill>
+          <a:ln w="6350">
+            <a:noFill/>
+          </a:ln>
+        </p:spPr>
+        <p:style>
+          <a:lnRef idx="2">
+            <a:schemeClr val="accent1">
+              <a:shade val="15000"/>
+            </a:schemeClr>
+          </a:lnRef>
+          <a:fillRef idx="1">
+            <a:schemeClr val="accent1"/>
+          </a:fillRef>
+          <a:effectRef idx="0">
+            <a:schemeClr val="accent1"/>
+          </a:effectRef>
+          <a:fontRef idx="minor">
+            <a:schemeClr val="lt1"/>
+          </a:fontRef>
+        </p:style>
+        <p:txBody>
+          <a:bodyPr rtlCol="0" anchor="ctr"/>
+          <a:lstStyle/>
+          <a:p>
+            <a:pPr algn="ctr"/>
+            <a:endParaRPr lang="en-TW" dirty="0"/>
+          </a:p>
+        </p:txBody>
+      </p:sp>
+      <p:sp>
+        <p:nvSpPr>
+          <p:cNvPr id="51" name="Rounded Rectangle 50">
+            <a:extLst>
+              <a:ext uri="{FF2B5EF4-FFF2-40B4-BE49-F238E27FC236}">
+                <a16:creationId xmlns:a16="http://schemas.microsoft.com/office/drawing/2014/main" id="{F96A9662-A7E9-C759-D269-46711DAB5470}"/>
+              </a:ext>
+            </a:extLst>
+          </p:cNvPr>
+          <p:cNvSpPr>
+            <a:spLocks noChangeAspect="1"/>
+          </p:cNvSpPr>
+          <p:nvPr/>
+        </p:nvSpPr>
+        <p:spPr>
+          <a:xfrm>
+            <a:off x="4656000" y="3249001"/>
+            <a:ext cx="360000" cy="360000"/>
+          </a:xfrm>
+          <a:prstGeom prst="roundRect">
+            <a:avLst>
+              <a:gd name="adj" fmla="val 24123"/>
+            </a:avLst>
+          </a:prstGeom>
+          <a:solidFill>
+            <a:srgbClr val="00BEFD"/>
+          </a:solidFill>
+          <a:ln w="6350">
+            <a:noFill/>
+          </a:ln>
+        </p:spPr>
+        <p:style>
+          <a:lnRef idx="2">
+            <a:schemeClr val="accent1">
+              <a:shade val="15000"/>
+            </a:schemeClr>
+          </a:lnRef>
+          <a:fillRef idx="1">
+            <a:schemeClr val="accent1"/>
+          </a:fillRef>
+          <a:effectRef idx="0">
+            <a:schemeClr val="accent1"/>
+          </a:effectRef>
+          <a:fontRef idx="minor">
+            <a:schemeClr val="lt1"/>
+          </a:fontRef>
+        </p:style>
+        <p:txBody>
+          <a:bodyPr rtlCol="0" anchor="ctr"/>
+          <a:lstStyle/>
+          <a:p>
+            <a:pPr algn="ctr"/>
+            <a:endParaRPr lang="en-TW" dirty="0"/>
+          </a:p>
+        </p:txBody>
+      </p:sp>
+      <p:sp>
+        <p:nvSpPr>
+          <p:cNvPr id="52" name="Rounded Rectangle 51">
+            <a:extLst>
+              <a:ext uri="{FF2B5EF4-FFF2-40B4-BE49-F238E27FC236}">
+                <a16:creationId xmlns:a16="http://schemas.microsoft.com/office/drawing/2014/main" id="{906026DC-390B-BF59-7B82-F0323470C3C7}"/>
+              </a:ext>
+            </a:extLst>
+          </p:cNvPr>
+          <p:cNvSpPr>
+            <a:spLocks noChangeAspect="1"/>
+          </p:cNvSpPr>
+          <p:nvPr/>
+        </p:nvSpPr>
+        <p:spPr>
+          <a:xfrm>
+            <a:off x="5076000" y="3249001"/>
+            <a:ext cx="360000" cy="360000"/>
+          </a:xfrm>
+          <a:prstGeom prst="roundRect">
+            <a:avLst>
+              <a:gd name="adj" fmla="val 24123"/>
+            </a:avLst>
+          </a:prstGeom>
+          <a:solidFill>
+            <a:schemeClr val="bg1">
+              <a:lumMod val="85000"/>
+            </a:schemeClr>
+          </a:solidFill>
+          <a:ln w="6350">
+            <a:noFill/>
+          </a:ln>
+        </p:spPr>
+        <p:style>
+          <a:lnRef idx="2">
+            <a:schemeClr val="accent1">
+              <a:shade val="15000"/>
+            </a:schemeClr>
+          </a:lnRef>
+          <a:fillRef idx="1">
+            <a:schemeClr val="accent1"/>
+          </a:fillRef>
+          <a:effectRef idx="0">
+            <a:schemeClr val="accent1"/>
+          </a:effectRef>
+          <a:fontRef idx="minor">
+            <a:schemeClr val="lt1"/>
+          </a:fontRef>
+        </p:style>
+        <p:txBody>
+          <a:bodyPr rtlCol="0" anchor="ctr"/>
+          <a:lstStyle/>
+          <a:p>
+            <a:pPr algn="ctr"/>
+            <a:endParaRPr lang="en-TW" dirty="0"/>
+          </a:p>
+        </p:txBody>
+      </p:sp>
+      <p:sp>
+        <p:nvSpPr>
+          <p:cNvPr id="54" name="Rounded Rectangle 53">
+            <a:extLst>
+              <a:ext uri="{FF2B5EF4-FFF2-40B4-BE49-F238E27FC236}">
+                <a16:creationId xmlns:a16="http://schemas.microsoft.com/office/drawing/2014/main" id="{16067211-6603-DDD4-5B83-4FEF4C6FAFF2}"/>
+              </a:ext>
+            </a:extLst>
+          </p:cNvPr>
+          <p:cNvSpPr>
+            <a:spLocks noChangeAspect="1"/>
+          </p:cNvSpPr>
+          <p:nvPr/>
+        </p:nvSpPr>
+        <p:spPr>
+          <a:xfrm>
+            <a:off x="7176000" y="3669002"/>
+            <a:ext cx="360000" cy="360000"/>
+          </a:xfrm>
+          <a:prstGeom prst="roundRect">
+            <a:avLst>
+              <a:gd name="adj" fmla="val 24123"/>
+            </a:avLst>
+          </a:prstGeom>
+          <a:solidFill>
+            <a:schemeClr val="bg1">
+              <a:lumMod val="85000"/>
+            </a:schemeClr>
+          </a:solidFill>
+          <a:ln w="6350">
+            <a:noFill/>
+          </a:ln>
+        </p:spPr>
+        <p:style>
+          <a:lnRef idx="2">
+            <a:schemeClr val="accent1">
+              <a:shade val="15000"/>
+            </a:schemeClr>
+          </a:lnRef>
+          <a:fillRef idx="1">
+            <a:schemeClr val="accent1"/>
+          </a:fillRef>
+          <a:effectRef idx="0">
+            <a:schemeClr val="accent1"/>
+          </a:effectRef>
+          <a:fontRef idx="minor">
+            <a:schemeClr val="lt1"/>
+          </a:fontRef>
+        </p:style>
+        <p:txBody>
+          <a:bodyPr rtlCol="0" anchor="ctr"/>
+          <a:lstStyle/>
+          <a:p>
+            <a:pPr algn="ctr"/>
+            <a:endParaRPr lang="en-TW" dirty="0"/>
+          </a:p>
+        </p:txBody>
+      </p:sp>
+      <p:sp>
+        <p:nvSpPr>
+          <p:cNvPr id="55" name="Rounded Rectangle 54">
+            <a:extLst>
+              <a:ext uri="{FF2B5EF4-FFF2-40B4-BE49-F238E27FC236}">
+                <a16:creationId xmlns:a16="http://schemas.microsoft.com/office/drawing/2014/main" id="{1679BB92-79D0-92EB-BAEB-B1291163DB3C}"/>
+              </a:ext>
+            </a:extLst>
+          </p:cNvPr>
+          <p:cNvSpPr>
+            <a:spLocks noChangeAspect="1"/>
+          </p:cNvSpPr>
+          <p:nvPr/>
+        </p:nvSpPr>
+        <p:spPr>
+          <a:xfrm>
+            <a:off x="6756000" y="3669002"/>
+            <a:ext cx="360000" cy="360000"/>
+          </a:xfrm>
+          <a:prstGeom prst="roundRect">
+            <a:avLst>
+              <a:gd name="adj" fmla="val 24123"/>
+            </a:avLst>
+          </a:prstGeom>
+          <a:solidFill>
+            <a:schemeClr val="bg1">
+              <a:lumMod val="85000"/>
+            </a:schemeClr>
+          </a:solidFill>
+          <a:ln w="6350">
+            <a:noFill/>
+          </a:ln>
+        </p:spPr>
+        <p:style>
+          <a:lnRef idx="2">
+            <a:schemeClr val="accent1">
+              <a:shade val="15000"/>
+            </a:schemeClr>
+          </a:lnRef>
+          <a:fillRef idx="1">
+            <a:schemeClr val="accent1"/>
+          </a:fillRef>
+          <a:effectRef idx="0">
+            <a:schemeClr val="accent1"/>
+          </a:effectRef>
+          <a:fontRef idx="minor">
+            <a:schemeClr val="lt1"/>
+          </a:fontRef>
+        </p:style>
+        <p:txBody>
+          <a:bodyPr rtlCol="0" anchor="ctr"/>
+          <a:lstStyle/>
+          <a:p>
+            <a:pPr algn="ctr"/>
+            <a:endParaRPr lang="en-TW" dirty="0"/>
+          </a:p>
+        </p:txBody>
+      </p:sp>
+      <p:sp>
+        <p:nvSpPr>
+          <p:cNvPr id="56" name="Rounded Rectangle 55">
+            <a:extLst>
+              <a:ext uri="{FF2B5EF4-FFF2-40B4-BE49-F238E27FC236}">
+                <a16:creationId xmlns:a16="http://schemas.microsoft.com/office/drawing/2014/main" id="{6D957DBB-11AF-B698-FA3E-26C48FF854A4}"/>
+              </a:ext>
+            </a:extLst>
+          </p:cNvPr>
+          <p:cNvSpPr>
+            <a:spLocks noChangeAspect="1"/>
+          </p:cNvSpPr>
+          <p:nvPr/>
+        </p:nvSpPr>
+        <p:spPr>
+          <a:xfrm>
+            <a:off x="6336000" y="3669002"/>
+            <a:ext cx="360000" cy="360000"/>
+          </a:xfrm>
+          <a:prstGeom prst="roundRect">
+            <a:avLst>
+              <a:gd name="adj" fmla="val 24123"/>
+            </a:avLst>
+          </a:prstGeom>
+          <a:solidFill>
+            <a:schemeClr val="bg1">
+              <a:lumMod val="85000"/>
+            </a:schemeClr>
+          </a:solidFill>
+          <a:ln w="6350">
+            <a:noFill/>
+          </a:ln>
+        </p:spPr>
+        <p:style>
+          <a:lnRef idx="2">
+            <a:schemeClr val="accent1">
+              <a:shade val="15000"/>
+            </a:schemeClr>
+          </a:lnRef>
+          <a:fillRef idx="1">
+            <a:schemeClr val="accent1"/>
+          </a:fillRef>
+          <a:effectRef idx="0">
+            <a:schemeClr val="accent1"/>
+          </a:effectRef>
+          <a:fontRef idx="minor">
+            <a:schemeClr val="lt1"/>
+          </a:fontRef>
+        </p:style>
+        <p:txBody>
+          <a:bodyPr rtlCol="0" anchor="ctr"/>
+          <a:lstStyle/>
+          <a:p>
+            <a:pPr algn="ctr"/>
+            <a:endParaRPr lang="en-TW" dirty="0"/>
+          </a:p>
+        </p:txBody>
+      </p:sp>
+      <p:sp>
+        <p:nvSpPr>
+          <p:cNvPr id="57" name="Rounded Rectangle 56">
+            <a:extLst>
+              <a:ext uri="{FF2B5EF4-FFF2-40B4-BE49-F238E27FC236}">
+                <a16:creationId xmlns:a16="http://schemas.microsoft.com/office/drawing/2014/main" id="{98936B67-4B05-3A11-79FA-CB5DCA44A8E0}"/>
+              </a:ext>
+            </a:extLst>
+          </p:cNvPr>
+          <p:cNvSpPr>
+            <a:spLocks noChangeAspect="1"/>
+          </p:cNvSpPr>
+          <p:nvPr/>
+        </p:nvSpPr>
+        <p:spPr>
+          <a:xfrm>
+            <a:off x="5916000" y="3669002"/>
+            <a:ext cx="360000" cy="360000"/>
+          </a:xfrm>
+          <a:prstGeom prst="roundRect">
+            <a:avLst>
+              <a:gd name="adj" fmla="val 24123"/>
+            </a:avLst>
+          </a:prstGeom>
+          <a:solidFill>
+            <a:srgbClr val="0099CC"/>
+          </a:solidFill>
+          <a:ln w="6350">
+            <a:noFill/>
+          </a:ln>
+        </p:spPr>
+        <p:style>
+          <a:lnRef idx="2">
+            <a:schemeClr val="accent1">
+              <a:shade val="15000"/>
+            </a:schemeClr>
+          </a:lnRef>
+          <a:fillRef idx="1">
+            <a:schemeClr val="accent1"/>
+          </a:fillRef>
+          <a:effectRef idx="0">
+            <a:schemeClr val="accent1"/>
+          </a:effectRef>
+          <a:fontRef idx="minor">
+            <a:schemeClr val="lt1"/>
+          </a:fontRef>
+        </p:style>
+        <p:txBody>
+          <a:bodyPr rtlCol="0" anchor="ctr"/>
+          <a:lstStyle/>
+          <a:p>
+            <a:pPr algn="ctr"/>
+            <a:endParaRPr lang="en-TW" dirty="0"/>
+          </a:p>
+        </p:txBody>
+      </p:sp>
+      <p:sp>
+        <p:nvSpPr>
+          <p:cNvPr id="58" name="Rounded Rectangle 57">
+            <a:extLst>
+              <a:ext uri="{FF2B5EF4-FFF2-40B4-BE49-F238E27FC236}">
+                <a16:creationId xmlns:a16="http://schemas.microsoft.com/office/drawing/2014/main" id="{723B9433-DC10-B544-188D-A12A3A1803EA}"/>
+              </a:ext>
+            </a:extLst>
+          </p:cNvPr>
+          <p:cNvSpPr>
+            <a:spLocks noChangeAspect="1"/>
+          </p:cNvSpPr>
+          <p:nvPr/>
+        </p:nvSpPr>
+        <p:spPr>
+          <a:xfrm>
+            <a:off x="5496000" y="3669002"/>
+            <a:ext cx="360000" cy="360000"/>
+          </a:xfrm>
+          <a:prstGeom prst="roundRect">
+            <a:avLst>
+              <a:gd name="adj" fmla="val 24123"/>
+            </a:avLst>
+          </a:prstGeom>
+          <a:solidFill>
+            <a:schemeClr val="bg1">
+              <a:lumMod val="85000"/>
+            </a:schemeClr>
+          </a:solidFill>
+          <a:ln w="6350">
+            <a:noFill/>
+          </a:ln>
+        </p:spPr>
+        <p:style>
+          <a:lnRef idx="2">
+            <a:schemeClr val="accent1">
+              <a:shade val="15000"/>
+            </a:schemeClr>
+          </a:lnRef>
+          <a:fillRef idx="1">
+            <a:schemeClr val="accent1"/>
+          </a:fillRef>
+          <a:effectRef idx="0">
+            <a:schemeClr val="accent1"/>
+          </a:effectRef>
+          <a:fontRef idx="minor">
+            <a:schemeClr val="lt1"/>
+          </a:fontRef>
+        </p:style>
+        <p:txBody>
+          <a:bodyPr rtlCol="0" anchor="ctr"/>
+          <a:lstStyle/>
+          <a:p>
+            <a:pPr algn="ctr"/>
+            <a:endParaRPr lang="en-TW" dirty="0"/>
+          </a:p>
+        </p:txBody>
+      </p:sp>
+      <p:sp>
+        <p:nvSpPr>
+          <p:cNvPr id="59" name="Rounded Rectangle 58">
+            <a:extLst>
+              <a:ext uri="{FF2B5EF4-FFF2-40B4-BE49-F238E27FC236}">
+                <a16:creationId xmlns:a16="http://schemas.microsoft.com/office/drawing/2014/main" id="{E057B0EF-531D-2549-AAA6-8BE859909BE3}"/>
+              </a:ext>
+            </a:extLst>
+          </p:cNvPr>
+          <p:cNvSpPr>
+            <a:spLocks noChangeAspect="1"/>
+          </p:cNvSpPr>
+          <p:nvPr/>
+        </p:nvSpPr>
+        <p:spPr>
+          <a:xfrm>
+            <a:off x="4656000" y="3669002"/>
+            <a:ext cx="360000" cy="360000"/>
+          </a:xfrm>
+          <a:prstGeom prst="roundRect">
+            <a:avLst>
+              <a:gd name="adj" fmla="val 24123"/>
+            </a:avLst>
+          </a:prstGeom>
+          <a:solidFill>
+            <a:srgbClr val="00BEFD"/>
+          </a:solidFill>
+          <a:ln w="6350">
+            <a:noFill/>
+          </a:ln>
+        </p:spPr>
+        <p:style>
+          <a:lnRef idx="2">
+            <a:schemeClr val="accent1">
+              <a:shade val="15000"/>
+            </a:schemeClr>
+          </a:lnRef>
+          <a:fillRef idx="1">
+            <a:schemeClr val="accent1"/>
+          </a:fillRef>
+          <a:effectRef idx="0">
+            <a:schemeClr val="accent1"/>
+          </a:effectRef>
+          <a:fontRef idx="minor">
+            <a:schemeClr val="lt1"/>
+          </a:fontRef>
+        </p:style>
+        <p:txBody>
+          <a:bodyPr rtlCol="0" anchor="ctr"/>
+          <a:lstStyle/>
+          <a:p>
+            <a:pPr algn="ctr"/>
+            <a:endParaRPr lang="en-TW" dirty="0"/>
+          </a:p>
+        </p:txBody>
+      </p:sp>
+      <p:sp>
+        <p:nvSpPr>
+          <p:cNvPr id="60" name="Rounded Rectangle 59">
+            <a:extLst>
+              <a:ext uri="{FF2B5EF4-FFF2-40B4-BE49-F238E27FC236}">
+                <a16:creationId xmlns:a16="http://schemas.microsoft.com/office/drawing/2014/main" id="{C1C4AADD-21E0-3DCF-EECF-733277848052}"/>
+              </a:ext>
+            </a:extLst>
+          </p:cNvPr>
+          <p:cNvSpPr>
+            <a:spLocks noChangeAspect="1"/>
+          </p:cNvSpPr>
+          <p:nvPr/>
+        </p:nvSpPr>
+        <p:spPr>
+          <a:xfrm>
+            <a:off x="5076000" y="3669002"/>
+            <a:ext cx="360000" cy="360000"/>
+          </a:xfrm>
+          <a:prstGeom prst="roundRect">
+            <a:avLst>
+              <a:gd name="adj" fmla="val 24123"/>
+            </a:avLst>
+          </a:prstGeom>
+          <a:solidFill>
+            <a:schemeClr val="bg1">
+              <a:lumMod val="85000"/>
+            </a:schemeClr>
+          </a:solidFill>
+          <a:ln w="6350">
+            <a:noFill/>
+          </a:ln>
+        </p:spPr>
+        <p:style>
+          <a:lnRef idx="2">
+            <a:schemeClr val="accent1">
+              <a:shade val="15000"/>
+            </a:schemeClr>
+          </a:lnRef>
+          <a:fillRef idx="1">
+            <a:schemeClr val="accent1"/>
+          </a:fillRef>
+          <a:effectRef idx="0">
+            <a:schemeClr val="accent1"/>
+          </a:effectRef>
+          <a:fontRef idx="minor">
+            <a:schemeClr val="lt1"/>
+          </a:fontRef>
+        </p:style>
+        <p:txBody>
+          <a:bodyPr rtlCol="0" anchor="ctr"/>
+          <a:lstStyle/>
+          <a:p>
+            <a:pPr algn="ctr"/>
+            <a:endParaRPr lang="en-TW" dirty="0"/>
+          </a:p>
+        </p:txBody>
+      </p:sp>
+      <p:sp>
+        <p:nvSpPr>
+          <p:cNvPr id="62" name="Rounded Rectangle 61">
+            <a:extLst>
+              <a:ext uri="{FF2B5EF4-FFF2-40B4-BE49-F238E27FC236}">
+                <a16:creationId xmlns:a16="http://schemas.microsoft.com/office/drawing/2014/main" id="{2F5E8BB5-3393-7CCF-D4E0-EE4A7521C8F6}"/>
+              </a:ext>
+            </a:extLst>
+          </p:cNvPr>
+          <p:cNvSpPr>
+            <a:spLocks noChangeAspect="1"/>
+          </p:cNvSpPr>
+          <p:nvPr/>
+        </p:nvSpPr>
+        <p:spPr>
+          <a:xfrm>
+            <a:off x="7176000" y="4089003"/>
+            <a:ext cx="360000" cy="360000"/>
+          </a:xfrm>
+          <a:prstGeom prst="roundRect">
+            <a:avLst>
+              <a:gd name="adj" fmla="val 24123"/>
+            </a:avLst>
+          </a:prstGeom>
+          <a:solidFill>
+            <a:schemeClr val="bg1">
+              <a:lumMod val="85000"/>
+            </a:schemeClr>
+          </a:solidFill>
+          <a:ln w="6350">
+            <a:noFill/>
+          </a:ln>
+        </p:spPr>
+        <p:style>
+          <a:lnRef idx="2">
+            <a:schemeClr val="accent1">
+              <a:shade val="15000"/>
+            </a:schemeClr>
+          </a:lnRef>
+          <a:fillRef idx="1">
+            <a:schemeClr val="accent1"/>
+          </a:fillRef>
+          <a:effectRef idx="0">
+            <a:schemeClr val="accent1"/>
+          </a:effectRef>
+          <a:fontRef idx="minor">
+            <a:schemeClr val="lt1"/>
+          </a:fontRef>
+        </p:style>
+        <p:txBody>
+          <a:bodyPr rtlCol="0" anchor="ctr"/>
+          <a:lstStyle/>
+          <a:p>
+            <a:pPr algn="ctr"/>
+            <a:endParaRPr lang="en-TW" dirty="0"/>
+          </a:p>
+        </p:txBody>
+      </p:sp>
+      <p:sp>
+        <p:nvSpPr>
+          <p:cNvPr id="63" name="Rounded Rectangle 62">
+            <a:extLst>
+              <a:ext uri="{FF2B5EF4-FFF2-40B4-BE49-F238E27FC236}">
+                <a16:creationId xmlns:a16="http://schemas.microsoft.com/office/drawing/2014/main" id="{A21A1130-6779-95E8-0239-23989AE04D21}"/>
+              </a:ext>
+            </a:extLst>
+          </p:cNvPr>
+          <p:cNvSpPr>
+            <a:spLocks noChangeAspect="1"/>
+          </p:cNvSpPr>
+          <p:nvPr/>
+        </p:nvSpPr>
+        <p:spPr>
+          <a:xfrm>
+            <a:off x="6756000" y="4089003"/>
+            <a:ext cx="360000" cy="360000"/>
+          </a:xfrm>
+          <a:prstGeom prst="roundRect">
+            <a:avLst>
+              <a:gd name="adj" fmla="val 24123"/>
+            </a:avLst>
+          </a:prstGeom>
+          <a:solidFill>
+            <a:schemeClr val="bg1">
+              <a:lumMod val="85000"/>
+            </a:schemeClr>
+          </a:solidFill>
+          <a:ln w="6350">
+            <a:noFill/>
+          </a:ln>
+        </p:spPr>
+        <p:style>
+          <a:lnRef idx="2">
+            <a:schemeClr val="accent1">
+              <a:shade val="15000"/>
+            </a:schemeClr>
+          </a:lnRef>
+          <a:fillRef idx="1">
+            <a:schemeClr val="accent1"/>
+          </a:fillRef>
+          <a:effectRef idx="0">
+            <a:schemeClr val="accent1"/>
+          </a:effectRef>
+          <a:fontRef idx="minor">
+            <a:schemeClr val="lt1"/>
+          </a:fontRef>
+        </p:style>
+        <p:txBody>
+          <a:bodyPr rtlCol="0" anchor="ctr"/>
+          <a:lstStyle/>
+          <a:p>
+            <a:pPr algn="ctr"/>
+            <a:endParaRPr lang="en-TW" dirty="0"/>
+          </a:p>
+        </p:txBody>
+      </p:sp>
+      <p:sp>
+        <p:nvSpPr>
+          <p:cNvPr id="64" name="Rounded Rectangle 63">
+            <a:extLst>
+              <a:ext uri="{FF2B5EF4-FFF2-40B4-BE49-F238E27FC236}">
+                <a16:creationId xmlns:a16="http://schemas.microsoft.com/office/drawing/2014/main" id="{90243470-EB57-CC41-EE2C-78047AEE6AAE}"/>
+              </a:ext>
+            </a:extLst>
+          </p:cNvPr>
+          <p:cNvSpPr>
+            <a:spLocks noChangeAspect="1"/>
+          </p:cNvSpPr>
+          <p:nvPr/>
+        </p:nvSpPr>
+        <p:spPr>
+          <a:xfrm>
+            <a:off x="6336000" y="4089003"/>
+            <a:ext cx="360000" cy="360000"/>
+          </a:xfrm>
+          <a:prstGeom prst="roundRect">
+            <a:avLst>
+              <a:gd name="adj" fmla="val 24123"/>
+            </a:avLst>
+          </a:prstGeom>
+          <a:solidFill>
+            <a:schemeClr val="bg1">
+              <a:lumMod val="85000"/>
+            </a:schemeClr>
+          </a:solidFill>
+          <a:ln w="6350">
+            <a:noFill/>
+          </a:ln>
+        </p:spPr>
+        <p:style>
+          <a:lnRef idx="2">
+            <a:schemeClr val="accent1">
+              <a:shade val="15000"/>
+            </a:schemeClr>
+          </a:lnRef>
+          <a:fillRef idx="1">
+            <a:schemeClr val="accent1"/>
+          </a:fillRef>
+          <a:effectRef idx="0">
+            <a:schemeClr val="accent1"/>
+          </a:effectRef>
+          <a:fontRef idx="minor">
+            <a:schemeClr val="lt1"/>
+          </a:fontRef>
+        </p:style>
+        <p:txBody>
+          <a:bodyPr rtlCol="0" anchor="ctr"/>
+          <a:lstStyle/>
+          <a:p>
+            <a:pPr algn="ctr"/>
+            <a:endParaRPr lang="en-TW" dirty="0"/>
+          </a:p>
+        </p:txBody>
+      </p:sp>
+      <p:sp>
+        <p:nvSpPr>
+          <p:cNvPr id="65" name="Rounded Rectangle 64">
+            <a:extLst>
+              <a:ext uri="{FF2B5EF4-FFF2-40B4-BE49-F238E27FC236}">
+                <a16:creationId xmlns:a16="http://schemas.microsoft.com/office/drawing/2014/main" id="{AA4D0BD7-19B5-6531-861C-D288C504D1BF}"/>
+              </a:ext>
+            </a:extLst>
+          </p:cNvPr>
+          <p:cNvSpPr>
+            <a:spLocks noChangeAspect="1"/>
+          </p:cNvSpPr>
+          <p:nvPr/>
+        </p:nvSpPr>
+        <p:spPr>
+          <a:xfrm>
+            <a:off x="5916000" y="4089003"/>
+            <a:ext cx="360000" cy="360000"/>
+          </a:xfrm>
+          <a:prstGeom prst="roundRect">
+            <a:avLst>
+              <a:gd name="adj" fmla="val 24123"/>
+            </a:avLst>
+          </a:prstGeom>
+          <a:gradFill>
+            <a:gsLst>
+              <a:gs pos="20000">
+                <a:srgbClr val="0099CC"/>
+              </a:gs>
+              <a:gs pos="80000">
+                <a:schemeClr val="bg1">
+                  <a:lumMod val="85000"/>
+                </a:schemeClr>
+              </a:gs>
+            </a:gsLst>
+            <a:lin ang="2700000" scaled="0"/>
+          </a:gradFill>
+          <a:ln w="6350">
+            <a:noFill/>
+          </a:ln>
+        </p:spPr>
+        <p:style>
+          <a:lnRef idx="2">
+            <a:schemeClr val="accent1">
+              <a:shade val="15000"/>
+            </a:schemeClr>
+          </a:lnRef>
+          <a:fillRef idx="1">
+            <a:schemeClr val="accent1"/>
+          </a:fillRef>
+          <a:effectRef idx="0">
+            <a:schemeClr val="accent1"/>
+          </a:effectRef>
+          <a:fontRef idx="minor">
+            <a:schemeClr val="lt1"/>
+          </a:fontRef>
+        </p:style>
+        <p:txBody>
+          <a:bodyPr rtlCol="0" anchor="ctr"/>
+          <a:lstStyle/>
+          <a:p>
+            <a:pPr algn="ctr"/>
+            <a:endParaRPr lang="en-TW" dirty="0"/>
+          </a:p>
+        </p:txBody>
+      </p:sp>
+      <p:sp>
+        <p:nvSpPr>
+          <p:cNvPr id="66" name="Rounded Rectangle 65">
+            <a:extLst>
+              <a:ext uri="{FF2B5EF4-FFF2-40B4-BE49-F238E27FC236}">
+                <a16:creationId xmlns:a16="http://schemas.microsoft.com/office/drawing/2014/main" id="{B482C644-8C73-E205-08D2-46FE8148F3B6}"/>
+              </a:ext>
+            </a:extLst>
+          </p:cNvPr>
+          <p:cNvSpPr>
+            <a:spLocks noChangeAspect="1"/>
+          </p:cNvSpPr>
+          <p:nvPr/>
+        </p:nvSpPr>
+        <p:spPr>
+          <a:xfrm>
+            <a:off x="5496000" y="4089003"/>
+            <a:ext cx="360000" cy="360000"/>
+          </a:xfrm>
+          <a:prstGeom prst="roundRect">
+            <a:avLst>
+              <a:gd name="adj" fmla="val 24123"/>
+            </a:avLst>
+          </a:prstGeom>
+          <a:solidFill>
+            <a:schemeClr val="bg1">
+              <a:lumMod val="85000"/>
+            </a:schemeClr>
+          </a:solidFill>
+          <a:ln w="6350">
+            <a:noFill/>
+          </a:ln>
+        </p:spPr>
+        <p:style>
+          <a:lnRef idx="2">
+            <a:schemeClr val="accent1">
+              <a:shade val="15000"/>
+            </a:schemeClr>
+          </a:lnRef>
+          <a:fillRef idx="1">
+            <a:schemeClr val="accent1"/>
+          </a:fillRef>
+          <a:effectRef idx="0">
+            <a:schemeClr val="accent1"/>
+          </a:effectRef>
+          <a:fontRef idx="minor">
+            <a:schemeClr val="lt1"/>
+          </a:fontRef>
+        </p:style>
+        <p:txBody>
+          <a:bodyPr rtlCol="0" anchor="ctr"/>
+          <a:lstStyle/>
+          <a:p>
+            <a:pPr algn="ctr"/>
+            <a:endParaRPr lang="en-TW" dirty="0"/>
+          </a:p>
+        </p:txBody>
+      </p:sp>
+      <p:sp>
+        <p:nvSpPr>
+          <p:cNvPr id="67" name="Rounded Rectangle 66">
+            <a:extLst>
+              <a:ext uri="{FF2B5EF4-FFF2-40B4-BE49-F238E27FC236}">
+                <a16:creationId xmlns:a16="http://schemas.microsoft.com/office/drawing/2014/main" id="{22D4FD09-8DDC-EF1F-89D9-E768C4390291}"/>
+              </a:ext>
+            </a:extLst>
+          </p:cNvPr>
+          <p:cNvSpPr>
+            <a:spLocks noChangeAspect="1"/>
+          </p:cNvSpPr>
+          <p:nvPr/>
+        </p:nvSpPr>
+        <p:spPr>
+          <a:xfrm>
+            <a:off x="4656000" y="4089003"/>
+            <a:ext cx="360000" cy="360000"/>
+          </a:xfrm>
+          <a:prstGeom prst="roundRect">
+            <a:avLst>
+              <a:gd name="adj" fmla="val 24123"/>
+            </a:avLst>
+          </a:prstGeom>
+          <a:solidFill>
+            <a:srgbClr val="00BEFD"/>
+          </a:solidFill>
+          <a:ln w="6350">
+            <a:noFill/>
+          </a:ln>
+        </p:spPr>
+        <p:style>
+          <a:lnRef idx="2">
+            <a:schemeClr val="accent1">
+              <a:shade val="15000"/>
+            </a:schemeClr>
+          </a:lnRef>
+          <a:fillRef idx="1">
+            <a:schemeClr val="accent1"/>
+          </a:fillRef>
+          <a:effectRef idx="0">
+            <a:schemeClr val="accent1"/>
+          </a:effectRef>
+          <a:fontRef idx="minor">
+            <a:schemeClr val="lt1"/>
+          </a:fontRef>
+        </p:style>
+        <p:txBody>
+          <a:bodyPr rtlCol="0" anchor="ctr"/>
+          <a:lstStyle/>
+          <a:p>
+            <a:pPr algn="ctr"/>
+            <a:endParaRPr lang="en-TW" dirty="0"/>
+          </a:p>
+        </p:txBody>
+      </p:sp>
+      <p:sp>
+        <p:nvSpPr>
+          <p:cNvPr id="68" name="Rounded Rectangle 67">
+            <a:extLst>
+              <a:ext uri="{FF2B5EF4-FFF2-40B4-BE49-F238E27FC236}">
+                <a16:creationId xmlns:a16="http://schemas.microsoft.com/office/drawing/2014/main" id="{D6F03334-0E9F-F468-D781-8C2C43577320}"/>
+              </a:ext>
+            </a:extLst>
+          </p:cNvPr>
+          <p:cNvSpPr>
+            <a:spLocks noChangeAspect="1"/>
+          </p:cNvSpPr>
+          <p:nvPr/>
+        </p:nvSpPr>
+        <p:spPr>
+          <a:xfrm>
+            <a:off x="5076000" y="4089003"/>
+            <a:ext cx="360000" cy="360000"/>
+          </a:xfrm>
+          <a:prstGeom prst="roundRect">
+            <a:avLst>
+              <a:gd name="adj" fmla="val 24123"/>
+            </a:avLst>
+          </a:prstGeom>
+          <a:solidFill>
+            <a:schemeClr val="bg1">
+              <a:lumMod val="85000"/>
+            </a:schemeClr>
+          </a:solidFill>
+          <a:ln w="6350">
+            <a:noFill/>
+          </a:ln>
+        </p:spPr>
+        <p:style>
+          <a:lnRef idx="2">
+            <a:schemeClr val="accent1">
+              <a:shade val="15000"/>
+            </a:schemeClr>
+          </a:lnRef>
+          <a:fillRef idx="1">
+            <a:schemeClr val="accent1"/>
+          </a:fillRef>
+          <a:effectRef idx="0">
+            <a:schemeClr val="accent1"/>
+          </a:effectRef>
+          <a:fontRef idx="minor">
+            <a:schemeClr val="lt1"/>
+          </a:fontRef>
+        </p:style>
+        <p:txBody>
+          <a:bodyPr rtlCol="0" anchor="ctr"/>
+          <a:lstStyle/>
+          <a:p>
+            <a:pPr algn="ctr"/>
+            <a:endParaRPr lang="en-TW" dirty="0"/>
+          </a:p>
+        </p:txBody>
+      </p:sp>
+      <p:sp>
+        <p:nvSpPr>
+          <p:cNvPr id="70" name="Rounded Rectangle 69">
+            <a:extLst>
+              <a:ext uri="{FF2B5EF4-FFF2-40B4-BE49-F238E27FC236}">
+                <a16:creationId xmlns:a16="http://schemas.microsoft.com/office/drawing/2014/main" id="{135C7568-F3DC-D1B4-3BC4-856835D2D5F4}"/>
+              </a:ext>
+            </a:extLst>
+          </p:cNvPr>
+          <p:cNvSpPr>
+            <a:spLocks noChangeAspect="1"/>
+          </p:cNvSpPr>
+          <p:nvPr/>
+        </p:nvSpPr>
+        <p:spPr>
+          <a:xfrm>
+            <a:off x="7176000" y="4509003"/>
+            <a:ext cx="360000" cy="360000"/>
+          </a:xfrm>
+          <a:prstGeom prst="roundRect">
+            <a:avLst>
+              <a:gd name="adj" fmla="val 24123"/>
+            </a:avLst>
+          </a:prstGeom>
+          <a:solidFill>
+            <a:schemeClr val="bg1">
+              <a:lumMod val="95000"/>
+            </a:schemeClr>
+          </a:solidFill>
+          <a:ln w="6350">
+            <a:noFill/>
+          </a:ln>
+        </p:spPr>
+        <p:style>
+          <a:lnRef idx="2">
+            <a:schemeClr val="accent1">
+              <a:shade val="15000"/>
+            </a:schemeClr>
+          </a:lnRef>
+          <a:fillRef idx="1">
+            <a:schemeClr val="accent1"/>
+          </a:fillRef>
+          <a:effectRef idx="0">
+            <a:schemeClr val="accent1"/>
+          </a:effectRef>
+          <a:fontRef idx="minor">
+            <a:schemeClr val="lt1"/>
+          </a:fontRef>
+        </p:style>
+        <p:txBody>
+          <a:bodyPr rtlCol="0" anchor="ctr"/>
+          <a:lstStyle/>
+          <a:p>
+            <a:pPr algn="ctr"/>
+            <a:endParaRPr lang="en-TW" dirty="0"/>
+          </a:p>
+        </p:txBody>
+      </p:sp>
+      <p:sp>
+        <p:nvSpPr>
+          <p:cNvPr id="71" name="Rounded Rectangle 70">
+            <a:extLst>
+              <a:ext uri="{FF2B5EF4-FFF2-40B4-BE49-F238E27FC236}">
+                <a16:creationId xmlns:a16="http://schemas.microsoft.com/office/drawing/2014/main" id="{5A275717-3EF5-9ED8-33BE-D1C676EAEEFA}"/>
+              </a:ext>
+            </a:extLst>
+          </p:cNvPr>
+          <p:cNvSpPr>
+            <a:spLocks noChangeAspect="1"/>
+          </p:cNvSpPr>
+          <p:nvPr/>
+        </p:nvSpPr>
+        <p:spPr>
+          <a:xfrm>
+            <a:off x="6756000" y="4509003"/>
+            <a:ext cx="360000" cy="360000"/>
+          </a:xfrm>
+          <a:prstGeom prst="roundRect">
+            <a:avLst>
+              <a:gd name="adj" fmla="val 24123"/>
+            </a:avLst>
+          </a:prstGeom>
+          <a:solidFill>
+            <a:schemeClr val="bg1">
+              <a:lumMod val="85000"/>
+            </a:schemeClr>
+          </a:solidFill>
+          <a:ln w="6350">
+            <a:noFill/>
+          </a:ln>
+        </p:spPr>
+        <p:style>
+          <a:lnRef idx="2">
+            <a:schemeClr val="accent1">
+              <a:shade val="15000"/>
+            </a:schemeClr>
+          </a:lnRef>
+          <a:fillRef idx="1">
+            <a:schemeClr val="accent1"/>
+          </a:fillRef>
+          <a:effectRef idx="0">
+            <a:schemeClr val="accent1"/>
+          </a:effectRef>
+          <a:fontRef idx="minor">
+            <a:schemeClr val="lt1"/>
+          </a:fontRef>
+        </p:style>
+        <p:txBody>
+          <a:bodyPr rtlCol="0" anchor="ctr"/>
+          <a:lstStyle/>
+          <a:p>
+            <a:pPr algn="ctr"/>
+            <a:endParaRPr lang="en-TW" dirty="0"/>
+          </a:p>
+        </p:txBody>
+      </p:sp>
+      <p:sp>
+        <p:nvSpPr>
+          <p:cNvPr id="72" name="Rounded Rectangle 71">
+            <a:extLst>
+              <a:ext uri="{FF2B5EF4-FFF2-40B4-BE49-F238E27FC236}">
+                <a16:creationId xmlns:a16="http://schemas.microsoft.com/office/drawing/2014/main" id="{238D356F-368A-0DB0-B487-7DEC9E169A0A}"/>
+              </a:ext>
+            </a:extLst>
+          </p:cNvPr>
+          <p:cNvSpPr>
+            <a:spLocks noChangeAspect="1"/>
+          </p:cNvSpPr>
+          <p:nvPr/>
+        </p:nvSpPr>
+        <p:spPr>
+          <a:xfrm>
+            <a:off x="6336000" y="4509003"/>
+            <a:ext cx="360000" cy="360000"/>
+          </a:xfrm>
+          <a:prstGeom prst="roundRect">
+            <a:avLst>
+              <a:gd name="adj" fmla="val 24123"/>
+            </a:avLst>
+          </a:prstGeom>
+          <a:solidFill>
+            <a:schemeClr val="bg1">
+              <a:lumMod val="85000"/>
+            </a:schemeClr>
+          </a:solidFill>
+          <a:ln w="6350">
+            <a:noFill/>
+          </a:ln>
+        </p:spPr>
+        <p:style>
+          <a:lnRef idx="2">
+            <a:schemeClr val="accent1">
+              <a:shade val="15000"/>
+            </a:schemeClr>
+          </a:lnRef>
+          <a:fillRef idx="1">
+            <a:schemeClr val="accent1"/>
+          </a:fillRef>
+          <a:effectRef idx="0">
+            <a:schemeClr val="accent1"/>
+          </a:effectRef>
+          <a:fontRef idx="minor">
+            <a:schemeClr val="lt1"/>
+          </a:fontRef>
+        </p:style>
+        <p:txBody>
+          <a:bodyPr rtlCol="0" anchor="ctr"/>
+          <a:lstStyle/>
+          <a:p>
+            <a:pPr algn="ctr"/>
+            <a:endParaRPr lang="en-TW" dirty="0"/>
+          </a:p>
+        </p:txBody>
+      </p:sp>
+      <p:sp>
+        <p:nvSpPr>
+          <p:cNvPr id="73" name="Rounded Rectangle 72">
+            <a:extLst>
+              <a:ext uri="{FF2B5EF4-FFF2-40B4-BE49-F238E27FC236}">
+                <a16:creationId xmlns:a16="http://schemas.microsoft.com/office/drawing/2014/main" id="{0502F149-05AB-73BA-037D-6C04369479DA}"/>
+              </a:ext>
+            </a:extLst>
+          </p:cNvPr>
+          <p:cNvSpPr>
+            <a:spLocks noChangeAspect="1"/>
+          </p:cNvSpPr>
+          <p:nvPr/>
+        </p:nvSpPr>
+        <p:spPr>
+          <a:xfrm>
+            <a:off x="5916000" y="4509003"/>
+            <a:ext cx="360000" cy="360000"/>
+          </a:xfrm>
+          <a:prstGeom prst="roundRect">
+            <a:avLst>
+              <a:gd name="adj" fmla="val 24123"/>
+            </a:avLst>
+          </a:prstGeom>
+          <a:gradFill>
+            <a:gsLst>
+              <a:gs pos="20000">
+                <a:srgbClr val="00BEFD"/>
+              </a:gs>
+              <a:gs pos="80000">
+                <a:schemeClr val="bg1">
+                  <a:lumMod val="85000"/>
+                </a:schemeClr>
+              </a:gs>
+            </a:gsLst>
+            <a:lin ang="2700000" scaled="0"/>
+          </a:gradFill>
+          <a:ln w="6350">
+            <a:noFill/>
+          </a:ln>
+        </p:spPr>
+        <p:style>
+          <a:lnRef idx="2">
+            <a:schemeClr val="accent1">
+              <a:shade val="15000"/>
+            </a:schemeClr>
+          </a:lnRef>
+          <a:fillRef idx="1">
+            <a:schemeClr val="accent1"/>
+          </a:fillRef>
+          <a:effectRef idx="0">
+            <a:schemeClr val="accent1"/>
+          </a:effectRef>
+          <a:fontRef idx="minor">
+            <a:schemeClr val="lt1"/>
+          </a:fontRef>
+        </p:style>
+        <p:txBody>
+          <a:bodyPr rtlCol="0" anchor="ctr"/>
+          <a:lstStyle/>
+          <a:p>
+            <a:pPr algn="ctr"/>
+            <a:endParaRPr lang="en-TW" dirty="0"/>
+          </a:p>
+        </p:txBody>
+      </p:sp>
+      <p:sp>
+        <p:nvSpPr>
+          <p:cNvPr id="74" name="Rounded Rectangle 73">
+            <a:extLst>
+              <a:ext uri="{FF2B5EF4-FFF2-40B4-BE49-F238E27FC236}">
+                <a16:creationId xmlns:a16="http://schemas.microsoft.com/office/drawing/2014/main" id="{D9EF64D7-472C-CD17-7624-9A5B2ACF9C64}"/>
+              </a:ext>
+            </a:extLst>
+          </p:cNvPr>
+          <p:cNvSpPr>
+            <a:spLocks noChangeAspect="1"/>
+          </p:cNvSpPr>
+          <p:nvPr/>
+        </p:nvSpPr>
+        <p:spPr>
+          <a:xfrm>
+            <a:off x="5496000" y="4509003"/>
+            <a:ext cx="360000" cy="360000"/>
+          </a:xfrm>
+          <a:prstGeom prst="roundRect">
+            <a:avLst>
+              <a:gd name="adj" fmla="val 24123"/>
+            </a:avLst>
+          </a:prstGeom>
+          <a:solidFill>
+            <a:srgbClr val="00BEFD"/>
+          </a:solidFill>
+          <a:ln w="6350">
+            <a:noFill/>
+          </a:ln>
+        </p:spPr>
+        <p:style>
+          <a:lnRef idx="2">
+            <a:schemeClr val="accent1">
+              <a:shade val="15000"/>
+            </a:schemeClr>
+          </a:lnRef>
+          <a:fillRef idx="1">
+            <a:schemeClr val="accent1"/>
+          </a:fillRef>
+          <a:effectRef idx="0">
+            <a:schemeClr val="accent1"/>
+          </a:effectRef>
+          <a:fontRef idx="minor">
+            <a:schemeClr val="lt1"/>
+          </a:fontRef>
+        </p:style>
+        <p:txBody>
+          <a:bodyPr rtlCol="0" anchor="ctr"/>
+          <a:lstStyle/>
+          <a:p>
+            <a:pPr algn="ctr"/>
+            <a:endParaRPr lang="en-TW" dirty="0"/>
+          </a:p>
+        </p:txBody>
+      </p:sp>
+      <p:sp>
+        <p:nvSpPr>
+          <p:cNvPr id="75" name="Rounded Rectangle 74">
+            <a:extLst>
+              <a:ext uri="{FF2B5EF4-FFF2-40B4-BE49-F238E27FC236}">
+                <a16:creationId xmlns:a16="http://schemas.microsoft.com/office/drawing/2014/main" id="{7AB1EA26-8FAF-2A28-D4CA-4661A8B5C8B1}"/>
+              </a:ext>
+            </a:extLst>
+          </p:cNvPr>
+          <p:cNvSpPr>
+            <a:spLocks noChangeAspect="1"/>
+          </p:cNvSpPr>
+          <p:nvPr/>
+        </p:nvSpPr>
+        <p:spPr>
+          <a:xfrm>
+            <a:off x="4656000" y="4509003"/>
+            <a:ext cx="360000" cy="360000"/>
+          </a:xfrm>
+          <a:prstGeom prst="roundRect">
+            <a:avLst>
+              <a:gd name="adj" fmla="val 24123"/>
+            </a:avLst>
+          </a:prstGeom>
+          <a:solidFill>
+            <a:srgbClr val="00BEFD"/>
+          </a:solidFill>
+          <a:ln w="6350">
+            <a:noFill/>
+          </a:ln>
+        </p:spPr>
+        <p:style>
+          <a:lnRef idx="2">
+            <a:schemeClr val="accent1">
+              <a:shade val="15000"/>
+            </a:schemeClr>
+          </a:lnRef>
+          <a:fillRef idx="1">
+            <a:schemeClr val="accent1"/>
+          </a:fillRef>
+          <a:effectRef idx="0">
+            <a:schemeClr val="accent1"/>
+          </a:effectRef>
+          <a:fontRef idx="minor">
+            <a:schemeClr val="lt1"/>
+          </a:fontRef>
+        </p:style>
+        <p:txBody>
+          <a:bodyPr rtlCol="0" anchor="ctr"/>
+          <a:lstStyle/>
+          <a:p>
+            <a:pPr algn="ctr"/>
+            <a:endParaRPr lang="en-TW" dirty="0"/>
+          </a:p>
+        </p:txBody>
+      </p:sp>
+      <p:sp>
+        <p:nvSpPr>
+          <p:cNvPr id="76" name="Rounded Rectangle 75">
+            <a:extLst>
+              <a:ext uri="{FF2B5EF4-FFF2-40B4-BE49-F238E27FC236}">
+                <a16:creationId xmlns:a16="http://schemas.microsoft.com/office/drawing/2014/main" id="{5A3330BF-0F33-752D-5283-E738FF3EAA68}"/>
+              </a:ext>
+            </a:extLst>
+          </p:cNvPr>
+          <p:cNvSpPr>
+            <a:spLocks noChangeAspect="1"/>
+          </p:cNvSpPr>
+          <p:nvPr/>
+        </p:nvSpPr>
+        <p:spPr>
+          <a:xfrm>
+            <a:off x="5076000" y="4509003"/>
+            <a:ext cx="360000" cy="360000"/>
+          </a:xfrm>
+          <a:prstGeom prst="roundRect">
+            <a:avLst>
+              <a:gd name="adj" fmla="val 24123"/>
+            </a:avLst>
+          </a:prstGeom>
+          <a:solidFill>
+            <a:srgbClr val="00BEFD"/>
+          </a:solidFill>
+          <a:ln w="6350">
+            <a:noFill/>
+          </a:ln>
+        </p:spPr>
+        <p:style>
+          <a:lnRef idx="2">
+            <a:schemeClr val="accent1">
+              <a:shade val="15000"/>
+            </a:schemeClr>
+          </a:lnRef>
+          <a:fillRef idx="1">
+            <a:schemeClr val="accent1"/>
+          </a:fillRef>
+          <a:effectRef idx="0">
+            <a:schemeClr val="accent1"/>
+          </a:effectRef>
+          <a:fontRef idx="minor">
+            <a:schemeClr val="lt1"/>
+          </a:fontRef>
+        </p:style>
+        <p:txBody>
+          <a:bodyPr rtlCol="0" anchor="ctr"/>
+          <a:lstStyle/>
+          <a:p>
+            <a:pPr algn="ctr"/>
+            <a:endParaRPr lang="en-TW" dirty="0"/>
+          </a:p>
+        </p:txBody>
+      </p:sp>
+    </p:spTree>
+    <p:extLst>
+      <p:ext uri="{BB962C8B-B14F-4D97-AF65-F5344CB8AC3E}">
+        <p14:creationId xmlns:p14="http://schemas.microsoft.com/office/powerpoint/2010/main" val="1880716244"/>
+      </p:ext>
+    </p:extLst>
+  </p:cSld>
+  <p:clrMapOvr>
+    <a:masterClrMapping/>
+  </p:clrMapOvr>
+</p:sld>
+</file>
+
 <file path=ppt/theme/theme1.xml><?xml version="1.0" encoding="utf-8"?>
 <a:theme xmlns:a="http://schemas.openxmlformats.org/drawingml/2006/main" name="Office Theme">
   <a:themeElements>

--- a/icon/design.pptx
+++ b/icon/design.pptx
@@ -154,7 +154,7 @@
           <a:p>
             <a:fld id="{CC7F0EFD-98CC-144B-86FC-2C31795ED826}" type="datetimeFigureOut">
               <a:rPr lang="en-TW" smtClean="0"/>
-              <a:t>2026/5/10</a:t>
+              <a:t>2026/5/14</a:t>
             </a:fld>
             <a:endParaRPr lang="en-TW"/>
           </a:p>
@@ -272,7 +272,7 @@
           <a:p>
             <a:fld id="{CC7F0EFD-98CC-144B-86FC-2C31795ED826}" type="datetimeFigureOut">
               <a:rPr lang="en-TW" smtClean="0"/>
-              <a:t>2026/5/10</a:t>
+              <a:t>2026/5/14</a:t>
             </a:fld>
             <a:endParaRPr lang="en-TW"/>
           </a:p>
@@ -515,7 +515,7 @@
           <a:p>
             <a:fld id="{CC7F0EFD-98CC-144B-86FC-2C31795ED826}" type="datetimeFigureOut">
               <a:rPr lang="en-TW" smtClean="0"/>
-              <a:t>2026/5/10</a:t>
+              <a:t>2026/5/14</a:t>
             </a:fld>
             <a:endParaRPr lang="en-TW"/>
           </a:p>
@@ -2681,60 +2681,6 @@
       </p:sp>
       <p:sp>
         <p:nvSpPr>
-          <p:cNvPr id="60" name="Rectangle 59">
-            <a:extLst>
-              <a:ext uri="{FF2B5EF4-FFF2-40B4-BE49-F238E27FC236}">
-                <a16:creationId xmlns:a16="http://schemas.microsoft.com/office/drawing/2014/main" id="{FCEAF35A-C0EC-3319-34BF-1A9736943AB2}"/>
-              </a:ext>
-            </a:extLst>
-          </p:cNvPr>
-          <p:cNvSpPr>
-            <a:spLocks noChangeAspect="1"/>
-          </p:cNvSpPr>
-          <p:nvPr/>
-        </p:nvSpPr>
-        <p:spPr>
-          <a:xfrm rot="5400000">
-            <a:off x="9511974" y="3618127"/>
-            <a:ext cx="360000" cy="360000"/>
-          </a:xfrm>
-          <a:prstGeom prst="rect">
-            <a:avLst/>
-          </a:prstGeom>
-          <a:solidFill>
-            <a:schemeClr val="bg1"/>
-          </a:solidFill>
-          <a:ln w="3175">
-            <a:noFill/>
-          </a:ln>
-        </p:spPr>
-        <p:style>
-          <a:lnRef idx="2">
-            <a:schemeClr val="accent1">
-              <a:shade val="15000"/>
-            </a:schemeClr>
-          </a:lnRef>
-          <a:fillRef idx="1">
-            <a:schemeClr val="accent1"/>
-          </a:fillRef>
-          <a:effectRef idx="0">
-            <a:schemeClr val="accent1"/>
-          </a:effectRef>
-          <a:fontRef idx="minor">
-            <a:schemeClr val="lt1"/>
-          </a:fontRef>
-        </p:style>
-        <p:txBody>
-          <a:bodyPr rtlCol="0" anchor="ctr"/>
-          <a:lstStyle/>
-          <a:p>
-            <a:pPr algn="ctr"/>
-            <a:endParaRPr lang="en-TW" dirty="0"/>
-          </a:p>
-        </p:txBody>
-      </p:sp>
-      <p:sp>
-        <p:nvSpPr>
           <p:cNvPr id="162" name="Rectangle 161">
             <a:extLst>
               <a:ext uri="{FF2B5EF4-FFF2-40B4-BE49-F238E27FC236}">
@@ -2804,60 +2750,6 @@
         <p:spPr>
           <a:xfrm>
             <a:off x="5197248" y="3615129"/>
-            <a:ext cx="360000" cy="360000"/>
-          </a:xfrm>
-          <a:prstGeom prst="rect">
-            <a:avLst/>
-          </a:prstGeom>
-          <a:solidFill>
-            <a:schemeClr val="bg1"/>
-          </a:solidFill>
-          <a:ln w="3175">
-            <a:noFill/>
-          </a:ln>
-        </p:spPr>
-        <p:style>
-          <a:lnRef idx="2">
-            <a:schemeClr val="accent1">
-              <a:shade val="15000"/>
-            </a:schemeClr>
-          </a:lnRef>
-          <a:fillRef idx="1">
-            <a:schemeClr val="accent1"/>
-          </a:fillRef>
-          <a:effectRef idx="0">
-            <a:schemeClr val="accent1"/>
-          </a:effectRef>
-          <a:fontRef idx="minor">
-            <a:schemeClr val="lt1"/>
-          </a:fontRef>
-        </p:style>
-        <p:txBody>
-          <a:bodyPr rtlCol="0" anchor="ctr"/>
-          <a:lstStyle/>
-          <a:p>
-            <a:pPr algn="ctr"/>
-            <a:endParaRPr lang="en-TW"/>
-          </a:p>
-        </p:txBody>
-      </p:sp>
-      <p:sp>
-        <p:nvSpPr>
-          <p:cNvPr id="4" name="Rectangle 3">
-            <a:extLst>
-              <a:ext uri="{FF2B5EF4-FFF2-40B4-BE49-F238E27FC236}">
-                <a16:creationId xmlns:a16="http://schemas.microsoft.com/office/drawing/2014/main" id="{791107DA-119A-744E-EA05-97D00EE1DAA6}"/>
-              </a:ext>
-            </a:extLst>
-          </p:cNvPr>
-          <p:cNvSpPr>
-            <a:spLocks noChangeAspect="1"/>
-          </p:cNvSpPr>
-          <p:nvPr/>
-        </p:nvSpPr>
-        <p:spPr>
-          <a:xfrm rot="5400000">
-            <a:off x="8074470" y="4347389"/>
             <a:ext cx="360000" cy="360000"/>
           </a:xfrm>
           <a:prstGeom prst="rect">
@@ -7765,6 +7657,60 @@
       </p:sp>
       <p:sp>
         <p:nvSpPr>
+          <p:cNvPr id="4" name="Rectangle 3">
+            <a:extLst>
+              <a:ext uri="{FF2B5EF4-FFF2-40B4-BE49-F238E27FC236}">
+                <a16:creationId xmlns:a16="http://schemas.microsoft.com/office/drawing/2014/main" id="{791107DA-119A-744E-EA05-97D00EE1DAA6}"/>
+              </a:ext>
+            </a:extLst>
+          </p:cNvPr>
+          <p:cNvSpPr>
+            <a:spLocks noChangeAspect="1"/>
+          </p:cNvSpPr>
+          <p:nvPr/>
+        </p:nvSpPr>
+        <p:spPr>
+          <a:xfrm rot="5400000">
+            <a:off x="6635859" y="4347389"/>
+            <a:ext cx="360000" cy="360000"/>
+          </a:xfrm>
+          <a:prstGeom prst="rect">
+            <a:avLst/>
+          </a:prstGeom>
+          <a:solidFill>
+            <a:schemeClr val="bg1"/>
+          </a:solidFill>
+          <a:ln w="3175">
+            <a:noFill/>
+          </a:ln>
+        </p:spPr>
+        <p:style>
+          <a:lnRef idx="2">
+            <a:schemeClr val="accent1">
+              <a:shade val="15000"/>
+            </a:schemeClr>
+          </a:lnRef>
+          <a:fillRef idx="1">
+            <a:schemeClr val="accent1"/>
+          </a:fillRef>
+          <a:effectRef idx="0">
+            <a:schemeClr val="accent1"/>
+          </a:effectRef>
+          <a:fontRef idx="minor">
+            <a:schemeClr val="lt1"/>
+          </a:fontRef>
+        </p:style>
+        <p:txBody>
+          <a:bodyPr rtlCol="0" anchor="ctr"/>
+          <a:lstStyle/>
+          <a:p>
+            <a:pPr algn="ctr"/>
+            <a:endParaRPr lang="en-TW"/>
+          </a:p>
+        </p:txBody>
+      </p:sp>
+      <p:sp>
+        <p:nvSpPr>
           <p:cNvPr id="235" name="Rounded Rectangle 234">
             <a:extLst>
               <a:ext uri="{FF2B5EF4-FFF2-40B4-BE49-F238E27FC236}">
@@ -7777,7 +7723,7 @@
         </p:nvSpPr>
         <p:spPr>
           <a:xfrm>
-            <a:off x="8113452" y="4514975"/>
+            <a:off x="6674841" y="4514975"/>
             <a:ext cx="180000" cy="180000"/>
           </a:xfrm>
           <a:prstGeom prst="roundRect">
@@ -7834,7 +7780,7 @@
         </p:nvSpPr>
         <p:spPr>
           <a:xfrm>
-            <a:off x="8074470" y="4351885"/>
+            <a:off x="6635859" y="4351885"/>
             <a:ext cx="360000" cy="308232"/>
           </a:xfrm>
           <a:custGeom>
@@ -7985,6 +7931,250 @@
         </p:nvSpPr>
         <p:spPr>
           <a:xfrm rot="5400000">
+            <a:off x="8074470" y="4347389"/>
+            <a:ext cx="360000" cy="360000"/>
+          </a:xfrm>
+          <a:prstGeom prst="rect">
+            <a:avLst/>
+          </a:prstGeom>
+          <a:solidFill>
+            <a:schemeClr val="bg1"/>
+          </a:solidFill>
+          <a:ln w="3175">
+            <a:noFill/>
+          </a:ln>
+        </p:spPr>
+        <p:style>
+          <a:lnRef idx="2">
+            <a:schemeClr val="accent1">
+              <a:shade val="15000"/>
+            </a:schemeClr>
+          </a:lnRef>
+          <a:fillRef idx="1">
+            <a:schemeClr val="accent1"/>
+          </a:fillRef>
+          <a:effectRef idx="0">
+            <a:schemeClr val="accent1"/>
+          </a:effectRef>
+          <a:fontRef idx="minor">
+            <a:schemeClr val="lt1"/>
+          </a:fontRef>
+        </p:style>
+        <p:txBody>
+          <a:bodyPr rtlCol="0" anchor="ctr"/>
+          <a:lstStyle/>
+          <a:p>
+            <a:pPr algn="ctr"/>
+            <a:endParaRPr lang="en-TW"/>
+          </a:p>
+        </p:txBody>
+      </p:sp>
+      <p:cxnSp>
+        <p:nvCxnSpPr>
+          <p:cNvPr id="23" name="Straight Connector 22">
+            <a:extLst>
+              <a:ext uri="{FF2B5EF4-FFF2-40B4-BE49-F238E27FC236}">
+                <a16:creationId xmlns:a16="http://schemas.microsoft.com/office/drawing/2014/main" id="{2F25CD03-21DF-0998-2BF9-2CD3D8D918B6}"/>
+              </a:ext>
+            </a:extLst>
+          </p:cNvPr>
+          <p:cNvCxnSpPr>
+            <a:cxnSpLocks/>
+          </p:cNvCxnSpPr>
+          <p:nvPr/>
+        </p:nvCxnSpPr>
+        <p:spPr>
+          <a:xfrm rot="5400000" flipH="1">
+            <a:off x="8077943" y="4527389"/>
+            <a:ext cx="216000" cy="0"/>
+          </a:xfrm>
+          <a:prstGeom prst="line">
+            <a:avLst/>
+          </a:prstGeom>
+          <a:ln w="38100" cap="rnd">
+            <a:solidFill>
+              <a:schemeClr val="bg1">
+                <a:lumMod val="65000"/>
+              </a:schemeClr>
+            </a:solidFill>
+          </a:ln>
+        </p:spPr>
+        <p:style>
+          <a:lnRef idx="1">
+            <a:schemeClr val="accent1"/>
+          </a:lnRef>
+          <a:fillRef idx="0">
+            <a:schemeClr val="accent1"/>
+          </a:fillRef>
+          <a:effectRef idx="0">
+            <a:schemeClr val="accent1"/>
+          </a:effectRef>
+          <a:fontRef idx="minor">
+            <a:schemeClr val="tx1"/>
+          </a:fontRef>
+        </p:style>
+      </p:cxnSp>
+      <p:cxnSp>
+        <p:nvCxnSpPr>
+          <p:cNvPr id="24" name="Straight Connector 23">
+            <a:extLst>
+              <a:ext uri="{FF2B5EF4-FFF2-40B4-BE49-F238E27FC236}">
+                <a16:creationId xmlns:a16="http://schemas.microsoft.com/office/drawing/2014/main" id="{7C045C73-1418-6073-7B29-1EEEF65D4982}"/>
+              </a:ext>
+            </a:extLst>
+          </p:cNvPr>
+          <p:cNvCxnSpPr>
+            <a:cxnSpLocks/>
+          </p:cNvCxnSpPr>
+          <p:nvPr/>
+        </p:nvCxnSpPr>
+        <p:spPr>
+          <a:xfrm rot="5400000" flipH="1">
+            <a:off x="8214997" y="4527389"/>
+            <a:ext cx="216000" cy="0"/>
+          </a:xfrm>
+          <a:prstGeom prst="line">
+            <a:avLst/>
+          </a:prstGeom>
+          <a:ln w="38100" cap="rnd">
+            <a:solidFill>
+              <a:schemeClr val="bg1">
+                <a:lumMod val="65000"/>
+              </a:schemeClr>
+            </a:solidFill>
+          </a:ln>
+        </p:spPr>
+        <p:style>
+          <a:lnRef idx="1">
+            <a:schemeClr val="accent1"/>
+          </a:lnRef>
+          <a:fillRef idx="0">
+            <a:schemeClr val="accent1"/>
+          </a:fillRef>
+          <a:effectRef idx="0">
+            <a:schemeClr val="accent1"/>
+          </a:effectRef>
+          <a:fontRef idx="minor">
+            <a:schemeClr val="tx1"/>
+          </a:fontRef>
+        </p:style>
+      </p:cxnSp>
+      <p:sp>
+        <p:nvSpPr>
+          <p:cNvPr id="25" name="Oval 24">
+            <a:extLst>
+              <a:ext uri="{FF2B5EF4-FFF2-40B4-BE49-F238E27FC236}">
+                <a16:creationId xmlns:a16="http://schemas.microsoft.com/office/drawing/2014/main" id="{0BC870E7-6545-0DC0-8005-7B4D44481C66}"/>
+              </a:ext>
+            </a:extLst>
+          </p:cNvPr>
+          <p:cNvSpPr/>
+          <p:nvPr/>
+        </p:nvSpPr>
+        <p:spPr>
+          <a:xfrm>
+            <a:off x="8130252" y="4435037"/>
+            <a:ext cx="108000" cy="108000"/>
+          </a:xfrm>
+          <a:prstGeom prst="ellipse">
+            <a:avLst/>
+          </a:prstGeom>
+          <a:solidFill>
+            <a:srgbClr val="01AE4F"/>
+          </a:solidFill>
+          <a:ln w="12700" cap="rnd">
+            <a:noFill/>
+          </a:ln>
+        </p:spPr>
+        <p:style>
+          <a:lnRef idx="1">
+            <a:schemeClr val="accent1"/>
+          </a:lnRef>
+          <a:fillRef idx="0">
+            <a:schemeClr val="accent1"/>
+          </a:fillRef>
+          <a:effectRef idx="0">
+            <a:schemeClr val="accent1"/>
+          </a:effectRef>
+          <a:fontRef idx="minor">
+            <a:schemeClr val="tx1"/>
+          </a:fontRef>
+        </p:style>
+        <p:txBody>
+          <a:bodyPr rtlCol="0" anchor="ctr"/>
+          <a:lstStyle/>
+          <a:p>
+            <a:pPr algn="ctr"/>
+            <a:endParaRPr lang="en-TW"/>
+          </a:p>
+        </p:txBody>
+      </p:sp>
+      <p:sp>
+        <p:nvSpPr>
+          <p:cNvPr id="26" name="Oval 25">
+            <a:extLst>
+              <a:ext uri="{FF2B5EF4-FFF2-40B4-BE49-F238E27FC236}">
+                <a16:creationId xmlns:a16="http://schemas.microsoft.com/office/drawing/2014/main" id="{0AD93F03-05BF-7209-FDB7-99A67D4BCB08}"/>
+              </a:ext>
+            </a:extLst>
+          </p:cNvPr>
+          <p:cNvSpPr/>
+          <p:nvPr/>
+        </p:nvSpPr>
+        <p:spPr>
+          <a:xfrm>
+            <a:off x="8268997" y="4511742"/>
+            <a:ext cx="108000" cy="108000"/>
+          </a:xfrm>
+          <a:prstGeom prst="ellipse">
+            <a:avLst/>
+          </a:prstGeom>
+          <a:solidFill>
+            <a:srgbClr val="026FC0"/>
+          </a:solidFill>
+          <a:ln w="12700" cap="rnd">
+            <a:noFill/>
+          </a:ln>
+        </p:spPr>
+        <p:style>
+          <a:lnRef idx="1">
+            <a:schemeClr val="accent1"/>
+          </a:lnRef>
+          <a:fillRef idx="0">
+            <a:schemeClr val="accent1"/>
+          </a:fillRef>
+          <a:effectRef idx="0">
+            <a:schemeClr val="accent1"/>
+          </a:effectRef>
+          <a:fontRef idx="minor">
+            <a:schemeClr val="tx1"/>
+          </a:fontRef>
+        </p:style>
+        <p:txBody>
+          <a:bodyPr rtlCol="0" anchor="ctr"/>
+          <a:lstStyle/>
+          <a:p>
+            <a:pPr algn="ctr"/>
+            <a:endParaRPr lang="en-TW"/>
+          </a:p>
+        </p:txBody>
+      </p:sp>
+      <p:sp>
+        <p:nvSpPr>
+          <p:cNvPr id="27" name="Rectangle 26">
+            <a:extLst>
+              <a:ext uri="{FF2B5EF4-FFF2-40B4-BE49-F238E27FC236}">
+                <a16:creationId xmlns:a16="http://schemas.microsoft.com/office/drawing/2014/main" id="{6FA2BAC3-D704-4591-8581-C3865B55AF10}"/>
+              </a:ext>
+            </a:extLst>
+          </p:cNvPr>
+          <p:cNvSpPr>
+            <a:spLocks noChangeAspect="1"/>
+          </p:cNvSpPr>
+          <p:nvPr/>
+        </p:nvSpPr>
+        <p:spPr>
+          <a:xfrm rot="5400000">
             <a:off x="9511974" y="2150611"/>
             <a:ext cx="360000" cy="360000"/>
           </a:xfrm>
@@ -8019,250 +8209,6 @@
           <a:lstStyle/>
           <a:p>
             <a:pPr algn="ctr"/>
-            <a:endParaRPr lang="en-TW"/>
-          </a:p>
-        </p:txBody>
-      </p:sp>
-      <p:cxnSp>
-        <p:nvCxnSpPr>
-          <p:cNvPr id="23" name="Straight Connector 22">
-            <a:extLst>
-              <a:ext uri="{FF2B5EF4-FFF2-40B4-BE49-F238E27FC236}">
-                <a16:creationId xmlns:a16="http://schemas.microsoft.com/office/drawing/2014/main" id="{2F25CD03-21DF-0998-2BF9-2CD3D8D918B6}"/>
-              </a:ext>
-            </a:extLst>
-          </p:cNvPr>
-          <p:cNvCxnSpPr>
-            <a:cxnSpLocks/>
-          </p:cNvCxnSpPr>
-          <p:nvPr/>
-        </p:nvCxnSpPr>
-        <p:spPr>
-          <a:xfrm rot="5400000" flipH="1">
-            <a:off x="9515447" y="2330611"/>
-            <a:ext cx="216000" cy="0"/>
-          </a:xfrm>
-          <a:prstGeom prst="line">
-            <a:avLst/>
-          </a:prstGeom>
-          <a:ln w="38100" cap="rnd">
-            <a:solidFill>
-              <a:schemeClr val="bg1">
-                <a:lumMod val="65000"/>
-              </a:schemeClr>
-            </a:solidFill>
-          </a:ln>
-        </p:spPr>
-        <p:style>
-          <a:lnRef idx="1">
-            <a:schemeClr val="accent1"/>
-          </a:lnRef>
-          <a:fillRef idx="0">
-            <a:schemeClr val="accent1"/>
-          </a:fillRef>
-          <a:effectRef idx="0">
-            <a:schemeClr val="accent1"/>
-          </a:effectRef>
-          <a:fontRef idx="minor">
-            <a:schemeClr val="tx1"/>
-          </a:fontRef>
-        </p:style>
-      </p:cxnSp>
-      <p:cxnSp>
-        <p:nvCxnSpPr>
-          <p:cNvPr id="24" name="Straight Connector 23">
-            <a:extLst>
-              <a:ext uri="{FF2B5EF4-FFF2-40B4-BE49-F238E27FC236}">
-                <a16:creationId xmlns:a16="http://schemas.microsoft.com/office/drawing/2014/main" id="{7C045C73-1418-6073-7B29-1EEEF65D4982}"/>
-              </a:ext>
-            </a:extLst>
-          </p:cNvPr>
-          <p:cNvCxnSpPr>
-            <a:cxnSpLocks/>
-          </p:cNvCxnSpPr>
-          <p:nvPr/>
-        </p:nvCxnSpPr>
-        <p:spPr>
-          <a:xfrm rot="5400000" flipH="1">
-            <a:off x="9652501" y="2330611"/>
-            <a:ext cx="216000" cy="0"/>
-          </a:xfrm>
-          <a:prstGeom prst="line">
-            <a:avLst/>
-          </a:prstGeom>
-          <a:ln w="38100" cap="rnd">
-            <a:solidFill>
-              <a:schemeClr val="bg1">
-                <a:lumMod val="65000"/>
-              </a:schemeClr>
-            </a:solidFill>
-          </a:ln>
-        </p:spPr>
-        <p:style>
-          <a:lnRef idx="1">
-            <a:schemeClr val="accent1"/>
-          </a:lnRef>
-          <a:fillRef idx="0">
-            <a:schemeClr val="accent1"/>
-          </a:fillRef>
-          <a:effectRef idx="0">
-            <a:schemeClr val="accent1"/>
-          </a:effectRef>
-          <a:fontRef idx="minor">
-            <a:schemeClr val="tx1"/>
-          </a:fontRef>
-        </p:style>
-      </p:cxnSp>
-      <p:sp>
-        <p:nvSpPr>
-          <p:cNvPr id="25" name="Oval 24">
-            <a:extLst>
-              <a:ext uri="{FF2B5EF4-FFF2-40B4-BE49-F238E27FC236}">
-                <a16:creationId xmlns:a16="http://schemas.microsoft.com/office/drawing/2014/main" id="{0BC870E7-6545-0DC0-8005-7B4D44481C66}"/>
-              </a:ext>
-            </a:extLst>
-          </p:cNvPr>
-          <p:cNvSpPr/>
-          <p:nvPr/>
-        </p:nvSpPr>
-        <p:spPr>
-          <a:xfrm>
-            <a:off x="9567756" y="2238259"/>
-            <a:ext cx="108000" cy="108000"/>
-          </a:xfrm>
-          <a:prstGeom prst="ellipse">
-            <a:avLst/>
-          </a:prstGeom>
-          <a:solidFill>
-            <a:srgbClr val="03BDFC"/>
-          </a:solidFill>
-          <a:ln w="12700" cap="rnd">
-            <a:noFill/>
-          </a:ln>
-        </p:spPr>
-        <p:style>
-          <a:lnRef idx="1">
-            <a:schemeClr val="accent1"/>
-          </a:lnRef>
-          <a:fillRef idx="0">
-            <a:schemeClr val="accent1"/>
-          </a:fillRef>
-          <a:effectRef idx="0">
-            <a:schemeClr val="accent1"/>
-          </a:effectRef>
-          <a:fontRef idx="minor">
-            <a:schemeClr val="tx1"/>
-          </a:fontRef>
-        </p:style>
-        <p:txBody>
-          <a:bodyPr rtlCol="0" anchor="ctr"/>
-          <a:lstStyle/>
-          <a:p>
-            <a:pPr algn="ctr"/>
-            <a:endParaRPr lang="en-TW"/>
-          </a:p>
-        </p:txBody>
-      </p:sp>
-      <p:sp>
-        <p:nvSpPr>
-          <p:cNvPr id="26" name="Oval 25">
-            <a:extLst>
-              <a:ext uri="{FF2B5EF4-FFF2-40B4-BE49-F238E27FC236}">
-                <a16:creationId xmlns:a16="http://schemas.microsoft.com/office/drawing/2014/main" id="{0AD93F03-05BF-7209-FDB7-99A67D4BCB08}"/>
-              </a:ext>
-            </a:extLst>
-          </p:cNvPr>
-          <p:cNvSpPr/>
-          <p:nvPr/>
-        </p:nvSpPr>
-        <p:spPr>
-          <a:xfrm>
-            <a:off x="9706501" y="2314964"/>
-            <a:ext cx="108000" cy="108000"/>
-          </a:xfrm>
-          <a:prstGeom prst="ellipse">
-            <a:avLst/>
-          </a:prstGeom>
-          <a:solidFill>
-            <a:srgbClr val="0098CC"/>
-          </a:solidFill>
-          <a:ln w="12700" cap="rnd">
-            <a:noFill/>
-          </a:ln>
-        </p:spPr>
-        <p:style>
-          <a:lnRef idx="1">
-            <a:schemeClr val="accent1"/>
-          </a:lnRef>
-          <a:fillRef idx="0">
-            <a:schemeClr val="accent1"/>
-          </a:fillRef>
-          <a:effectRef idx="0">
-            <a:schemeClr val="accent1"/>
-          </a:effectRef>
-          <a:fontRef idx="minor">
-            <a:schemeClr val="tx1"/>
-          </a:fontRef>
-        </p:style>
-        <p:txBody>
-          <a:bodyPr rtlCol="0" anchor="ctr"/>
-          <a:lstStyle/>
-          <a:p>
-            <a:pPr algn="ctr"/>
-            <a:endParaRPr lang="en-TW"/>
-          </a:p>
-        </p:txBody>
-      </p:sp>
-      <p:sp>
-        <p:nvSpPr>
-          <p:cNvPr id="27" name="Rectangle 26">
-            <a:extLst>
-              <a:ext uri="{FF2B5EF4-FFF2-40B4-BE49-F238E27FC236}">
-                <a16:creationId xmlns:a16="http://schemas.microsoft.com/office/drawing/2014/main" id="{6FA2BAC3-D704-4591-8581-C3865B55AF10}"/>
-              </a:ext>
-            </a:extLst>
-          </p:cNvPr>
-          <p:cNvSpPr>
-            <a:spLocks noChangeAspect="1"/>
-          </p:cNvSpPr>
-          <p:nvPr/>
-        </p:nvSpPr>
-        <p:spPr>
-          <a:xfrm rot="5400000">
-            <a:off x="9511974" y="2884369"/>
-            <a:ext cx="360000" cy="360000"/>
-          </a:xfrm>
-          <a:prstGeom prst="rect">
-            <a:avLst/>
-          </a:prstGeom>
-          <a:solidFill>
-            <a:schemeClr val="bg1"/>
-          </a:solidFill>
-          <a:ln w="3175">
-            <a:noFill/>
-          </a:ln>
-        </p:spPr>
-        <p:style>
-          <a:lnRef idx="2">
-            <a:schemeClr val="accent1">
-              <a:shade val="15000"/>
-            </a:schemeClr>
-          </a:lnRef>
-          <a:fillRef idx="1">
-            <a:schemeClr val="accent1"/>
-          </a:fillRef>
-          <a:effectRef idx="0">
-            <a:schemeClr val="accent1"/>
-          </a:effectRef>
-          <a:fontRef idx="minor">
-            <a:schemeClr val="lt1"/>
-          </a:fontRef>
-        </p:style>
-        <p:txBody>
-          <a:bodyPr rtlCol="0" anchor="ctr"/>
-          <a:lstStyle/>
-          <a:p>
-            <a:pPr algn="ctr"/>
             <a:endParaRPr lang="en-TW" dirty="0"/>
           </a:p>
         </p:txBody>
@@ -8283,7 +8229,7 @@
         </p:nvSpPr>
         <p:spPr>
           <a:xfrm>
-            <a:off x="9511974" y="2935813"/>
+            <a:off x="9511974" y="2202055"/>
             <a:ext cx="360000" cy="284173"/>
           </a:xfrm>
           <a:custGeom>
@@ -8954,7 +8900,7 @@
         </p:nvCxnSpPr>
         <p:spPr>
           <a:xfrm>
-            <a:off x="9511974" y="3232177"/>
+            <a:off x="9511974" y="2498419"/>
             <a:ext cx="360000" cy="0"/>
           </a:xfrm>
           <a:prstGeom prst="line">
@@ -9000,7 +8946,7 @@
         </p:nvSpPr>
         <p:spPr>
           <a:xfrm rot="5400000">
-            <a:off x="9511974" y="4347389"/>
+            <a:off x="9511974" y="3618127"/>
             <a:ext cx="360000" cy="360000"/>
           </a:xfrm>
           <a:prstGeom prst="rect">
@@ -9054,7 +9000,7 @@
         </p:nvCxnSpPr>
         <p:spPr>
           <a:xfrm flipV="1">
-            <a:off x="9533149" y="4404564"/>
+            <a:off x="9533149" y="3675302"/>
             <a:ext cx="324000" cy="252000"/>
           </a:xfrm>
           <a:prstGeom prst="line">
@@ -9095,7 +9041,7 @@
         </p:nvSpPr>
         <p:spPr>
           <a:xfrm>
-            <a:off x="9637539" y="4462496"/>
+            <a:off x="9637539" y="3733234"/>
             <a:ext cx="54000" cy="54000"/>
           </a:xfrm>
           <a:prstGeom prst="ellipse">
@@ -9150,7 +9096,7 @@
         </p:nvSpPr>
         <p:spPr>
           <a:xfrm>
-            <a:off x="9677212" y="4577388"/>
+            <a:off x="9677212" y="3848126"/>
             <a:ext cx="54000" cy="54000"/>
           </a:xfrm>
           <a:prstGeom prst="ellipse">
@@ -9205,7 +9151,7 @@
         </p:nvSpPr>
         <p:spPr>
           <a:xfrm>
-            <a:off x="9779413" y="4559388"/>
+            <a:off x="9779413" y="3830126"/>
             <a:ext cx="54000" cy="54000"/>
           </a:xfrm>
           <a:prstGeom prst="ellipse">
@@ -9260,7 +9206,7 @@
         </p:nvSpPr>
         <p:spPr>
           <a:xfrm>
-            <a:off x="9540756" y="4514975"/>
+            <a:off x="9540756" y="3785713"/>
             <a:ext cx="54000" cy="54000"/>
           </a:xfrm>
           <a:prstGeom prst="ellipse">
@@ -9315,7 +9261,7 @@
         </p:nvSpPr>
         <p:spPr>
           <a:xfrm>
-            <a:off x="9801229" y="4451609"/>
+            <a:off x="9801229" y="3722347"/>
             <a:ext cx="54000" cy="54000"/>
           </a:xfrm>
           <a:prstGeom prst="ellipse">
@@ -9370,7 +9316,7 @@
         </p:nvSpPr>
         <p:spPr>
           <a:xfrm>
-            <a:off x="9604769" y="4624711"/>
+            <a:off x="9604769" y="3895449"/>
             <a:ext cx="54000" cy="54000"/>
           </a:xfrm>
           <a:prstGeom prst="ellipse">
@@ -9425,7 +9371,7 @@
         </p:nvSpPr>
         <p:spPr>
           <a:xfrm>
-            <a:off x="9706224" y="4394067"/>
+            <a:off x="9706224" y="3664805"/>
             <a:ext cx="54000" cy="54000"/>
           </a:xfrm>
           <a:prstGeom prst="ellipse">
@@ -9466,6 +9412,60 @@
           </a:p>
         </p:txBody>
       </p:sp>
+      <p:sp>
+        <p:nvSpPr>
+          <p:cNvPr id="60" name="Rectangle 59">
+            <a:extLst>
+              <a:ext uri="{FF2B5EF4-FFF2-40B4-BE49-F238E27FC236}">
+                <a16:creationId xmlns:a16="http://schemas.microsoft.com/office/drawing/2014/main" id="{FCEAF35A-C0EC-3319-34BF-1A9736943AB2}"/>
+              </a:ext>
+            </a:extLst>
+          </p:cNvPr>
+          <p:cNvSpPr>
+            <a:spLocks noChangeAspect="1"/>
+          </p:cNvSpPr>
+          <p:nvPr/>
+        </p:nvSpPr>
+        <p:spPr>
+          <a:xfrm rot="5400000">
+            <a:off x="9511974" y="2884369"/>
+            <a:ext cx="360000" cy="360000"/>
+          </a:xfrm>
+          <a:prstGeom prst="rect">
+            <a:avLst/>
+          </a:prstGeom>
+          <a:solidFill>
+            <a:schemeClr val="bg1"/>
+          </a:solidFill>
+          <a:ln w="3175">
+            <a:noFill/>
+          </a:ln>
+        </p:spPr>
+        <p:style>
+          <a:lnRef idx="2">
+            <a:schemeClr val="accent1">
+              <a:shade val="15000"/>
+            </a:schemeClr>
+          </a:lnRef>
+          <a:fillRef idx="1">
+            <a:schemeClr val="accent1"/>
+          </a:fillRef>
+          <a:effectRef idx="0">
+            <a:schemeClr val="accent1"/>
+          </a:effectRef>
+          <a:fontRef idx="minor">
+            <a:schemeClr val="lt1"/>
+          </a:fontRef>
+        </p:style>
+        <p:txBody>
+          <a:bodyPr rtlCol="0" anchor="ctr"/>
+          <a:lstStyle/>
+          <a:p>
+            <a:pPr algn="ctr"/>
+            <a:endParaRPr lang="en-TW" dirty="0"/>
+          </a:p>
+        </p:txBody>
+      </p:sp>
       <p:pic>
         <p:nvPicPr>
           <p:cNvPr id="59" name="Picture 58">
@@ -9487,7 +9487,7 @@
         </p:blipFill>
         <p:spPr>
           <a:xfrm>
-            <a:off x="9527849" y="3635537"/>
+            <a:off x="9527849" y="2901779"/>
             <a:ext cx="327380" cy="327380"/>
           </a:xfrm>
           <a:prstGeom prst="rect">
